--- a/a7/build/out/u5/A7 5.10 Multi-Step Proportion Problems - Slides.pptx
+++ b/a7/build/out/u5/A7 5.10 Multi-Step Proportion Problems - Slides.pptx
@@ -4090,7 +4090,7 @@
         <p:spPr>
           <a:xfrm>
             <a:off x="777240" y="4656151"/>
-            <a:ext cx="10607040" cy="1072896"/>
+            <a:ext cx="10607040" cy="548640"/>
           </a:xfrm>
           <a:prstGeom prst="rect">
             <a:avLst/>
@@ -4111,7 +4111,7 @@
                 </a:solidFill>
                 <a:latin typeface="Lexend"/>
               </a:rPr>
-              <a:t>Answer:   A = 12.88 km/h, B = 12 km/h; A is faster</a:t>
+              <a:t>Answer:   A = 12.88 km/h, B = 12 km/h: A</a:t>
             </a:r>
           </a:p>
         </p:txBody>
@@ -5018,7 +5018,7 @@
                 </a:solidFill>
                 <a:latin typeface="Lexend"/>
               </a:rPr>
-              <a:t>How much rice for 12 servings? With 4 cups on hand, how many servings?</a:t>
+              <a:t>How much rice for 12 servings? With 4½ cups on hand, how many servings?</a:t>
             </a:r>
           </a:p>
         </p:txBody>
@@ -5316,7 +5316,7 @@
                 </a:solidFill>
                 <a:latin typeface="Lexend"/>
               </a:rPr>
-              <a:t>How much rice for 12 servings? With 4 cups on hand, how many servings?</a:t>
+              <a:t>How much rice for 12 servings? With 4½ cups on hand, how many servings?</a:t>
             </a:r>
           </a:p>
         </p:txBody>
@@ -5337,7 +5337,7 @@
         </p:blipFill>
         <p:spPr>
           <a:xfrm>
-            <a:off x="4157471" y="3180919"/>
+            <a:off x="4279392" y="3180919"/>
             <a:ext cx="3474720" cy="606552"/>
           </a:xfrm>
           <a:prstGeom prst="rect">
@@ -5347,7 +5347,7 @@
       </p:pic>
       <p:pic>
         <p:nvPicPr>
-          <p:cNvPr id="11" name="Picture 10" descr="34a8d86603519ebf.png"/>
+          <p:cNvPr id="11" name="Picture 10" descr="13f1547c75366d5d.png"/>
           <p:cNvPicPr>
             <a:picLocks noChangeAspect="1"/>
           </p:cNvPicPr>
@@ -5361,8 +5361,8 @@
         </p:blipFill>
         <p:spPr>
           <a:xfrm>
-            <a:off x="4157471" y="3915487"/>
-            <a:ext cx="3959352" cy="606552"/>
+            <a:off x="4279392" y="3915487"/>
+            <a:ext cx="3712463" cy="606552"/>
           </a:xfrm>
           <a:prstGeom prst="rect">
             <a:avLst/>
@@ -5399,7 +5399,7 @@
                 </a:solidFill>
                 <a:latin typeface="Lexend"/>
               </a:rPr>
-              <a:t>Answer:   3 cups; 16 servings</a:t>
+              <a:t>Answer:   3 cups; 18 servings</a:t>
             </a:r>
           </a:p>
         </p:txBody>
@@ -5662,7 +5662,7 @@
                 </a:solidFill>
                 <a:latin typeface="Lexend"/>
               </a:rPr>
-              <a:t>A car does 28 miles per gallon. Its tank holds 15 gal.</a:t>
+              <a:t>A car gets 28 miles per gallon. Its tank holds 15 gal.</a:t>
             </a:r>
           </a:p>
         </p:txBody>
@@ -5995,7 +5995,7 @@
                 </a:solidFill>
                 <a:latin typeface="Lexend"/>
               </a:rPr>
-              <a:t>A car does 28 miles per gallon. Its tank holds 15 gal.</a:t>
+              <a:t>A car gets 28 miles per gallon. Its tank holds 15 gal.</a:t>
             </a:r>
           </a:p>
         </p:txBody>
@@ -8124,7 +8124,7 @@
                 </a:solidFill>
                 <a:latin typeface="Lexend"/>
               </a:rPr>
-              <a:t>A car does 30 miles per gallon with a 12-gal tank. It starts a 900-mi trip with a full tank.</a:t>
+              <a:t>A car gets 30 miles per gallon with a 12-gal tank. It makes a 900-mi trip.</a:t>
             </a:r>
           </a:p>
         </p:txBody>
@@ -8138,7 +8138,7 @@
         <p:spPr>
           <a:xfrm>
             <a:off x="1234440" y="2842988"/>
-            <a:ext cx="10058400" cy="429370"/>
+            <a:ext cx="10058400" cy="858740"/>
           </a:xfrm>
           <a:prstGeom prst="rect">
             <a:avLst/>
@@ -8159,7 +8159,7 @@
                 </a:solidFill>
                 <a:latin typeface="Lexend"/>
               </a:rPr>
-              <a:t>How many tanks of gas does the trip take?</a:t>
+              <a:t>How many tanks of gas does the trip use? (Part of a tank counts as a whole tank.)</a:t>
             </a:r>
           </a:p>
         </p:txBody>
@@ -8172,7 +8172,7 @@
         </p:nvSpPr>
         <p:spPr>
           <a:xfrm>
-            <a:off x="1691640" y="3574111"/>
+            <a:off x="1691640" y="4003481"/>
             <a:ext cx="594360" cy="457200"/>
           </a:xfrm>
           <a:prstGeom prst="rect">
@@ -8215,7 +8215,7 @@
         </p:blipFill>
         <p:spPr>
           <a:xfrm>
-            <a:off x="2258568" y="3587827"/>
+            <a:off x="2258568" y="4017197"/>
             <a:ext cx="182880" cy="274320"/>
           </a:xfrm>
           <a:prstGeom prst="rect">
@@ -8231,7 +8231,7 @@
         </p:nvSpPr>
         <p:spPr>
           <a:xfrm>
-            <a:off x="6537959" y="3574111"/>
+            <a:off x="6537959" y="4003481"/>
             <a:ext cx="594360" cy="457200"/>
           </a:xfrm>
           <a:prstGeom prst="rect">
@@ -8274,7 +8274,7 @@
         </p:blipFill>
         <p:spPr>
           <a:xfrm>
-            <a:off x="7104888" y="3587827"/>
+            <a:off x="7104888" y="4017197"/>
             <a:ext cx="384048" cy="274320"/>
           </a:xfrm>
           <a:prstGeom prst="rect">
@@ -8290,7 +8290,7 @@
         </p:nvSpPr>
         <p:spPr>
           <a:xfrm>
-            <a:off x="1691640" y="4186759"/>
+            <a:off x="1691640" y="4616129"/>
             <a:ext cx="594360" cy="457200"/>
           </a:xfrm>
           <a:prstGeom prst="rect">
@@ -8333,7 +8333,7 @@
         </p:blipFill>
         <p:spPr>
           <a:xfrm>
-            <a:off x="2258568" y="4198951"/>
+            <a:off x="2258568" y="4628321"/>
             <a:ext cx="390144" cy="277368"/>
           </a:xfrm>
           <a:prstGeom prst="rect">
@@ -8349,7 +8349,7 @@
         </p:nvSpPr>
         <p:spPr>
           <a:xfrm>
-            <a:off x="6537959" y="4186759"/>
+            <a:off x="6537959" y="4616129"/>
             <a:ext cx="594360" cy="457200"/>
           </a:xfrm>
           <a:prstGeom prst="rect">
@@ -8392,7 +8392,7 @@
         </p:blipFill>
         <p:spPr>
           <a:xfrm>
-            <a:off x="7104888" y="4200475"/>
+            <a:off x="7104888" y="4629845"/>
             <a:ext cx="185928" cy="274320"/>
           </a:xfrm>
           <a:prstGeom prst="rect">
@@ -8408,7 +8408,7 @@
         </p:nvSpPr>
         <p:spPr>
           <a:xfrm>
-            <a:off x="777240" y="4863415"/>
+            <a:off x="777240" y="5292785"/>
             <a:ext cx="10607040" cy="457200"/>
           </a:xfrm>
           <a:prstGeom prst="rect">
@@ -8693,7 +8693,7 @@
                 </a:solidFill>
                 <a:latin typeface="Lexend"/>
               </a:rPr>
-              <a:t>A car does 30 miles per gallon with a 12-gal tank. It starts a 900-mi trip with a full tank.</a:t>
+              <a:t>A car gets 30 miles per gallon with a 12-gal tank. It makes a 900-mi trip.</a:t>
             </a:r>
           </a:p>
         </p:txBody>
@@ -8707,7 +8707,7 @@
         <p:spPr>
           <a:xfrm>
             <a:off x="1234440" y="2842988"/>
-            <a:ext cx="10058400" cy="429370"/>
+            <a:ext cx="10058400" cy="858740"/>
           </a:xfrm>
           <a:prstGeom prst="rect">
             <a:avLst/>
@@ -8728,7 +8728,7 @@
                 </a:solidFill>
                 <a:latin typeface="Lexend"/>
               </a:rPr>
-              <a:t>How many tanks of gas does the trip take?</a:t>
+              <a:t>How many tanks of gas does the trip use? (Part of a tank counts as a whole tank.)</a:t>
             </a:r>
           </a:p>
         </p:txBody>
@@ -8749,7 +8749,7 @@
         </p:blipFill>
         <p:spPr>
           <a:xfrm>
-            <a:off x="4130039" y="3532963"/>
+            <a:off x="4130039" y="3962333"/>
             <a:ext cx="4014215" cy="347472"/>
           </a:xfrm>
           <a:prstGeom prst="rect">
@@ -8773,7 +8773,7 @@
         </p:blipFill>
         <p:spPr>
           <a:xfrm>
-            <a:off x="4130039" y="4113607"/>
+            <a:off x="4130039" y="4542977"/>
             <a:ext cx="3986784" cy="265176"/>
           </a:xfrm>
           <a:prstGeom prst="rect">
@@ -8789,7 +8789,7 @@
         </p:nvSpPr>
         <p:spPr>
           <a:xfrm>
-            <a:off x="777240" y="4663440"/>
+            <a:off x="777240" y="5018465"/>
             <a:ext cx="10607040" cy="548640"/>
           </a:xfrm>
           <a:prstGeom prst="rect">
@@ -10315,7 +10315,7 @@
       </p:sp>
       <p:pic>
         <p:nvPicPr>
-          <p:cNvPr id="10" name="Picture 9" descr="90047daee9af913d.png"/>
+          <p:cNvPr id="10" name="Picture 9" descr="506f303710cd3d34.png"/>
           <p:cNvPicPr>
             <a:picLocks noChangeAspect="1"/>
           </p:cNvPicPr>
@@ -10330,7 +10330,7 @@
         <p:spPr>
           <a:xfrm>
             <a:off x="2382011" y="3500959"/>
-            <a:ext cx="3407664" cy="606552"/>
+            <a:ext cx="6062472" cy="606552"/>
           </a:xfrm>
           <a:prstGeom prst="rect">
             <a:avLst/>
@@ -11935,7 +11935,7 @@
                 </a:solidFill>
                 <a:latin typeface="Lexend"/>
               </a:rPr>
-              <a:t>Find the room's area in square metres.</a:t>
+              <a:t>Find the room's area in square meters.</a:t>
             </a:r>
           </a:p>
         </p:txBody>
@@ -12268,7 +12268,7 @@
                 </a:solidFill>
                 <a:latin typeface="Lexend"/>
               </a:rPr>
-              <a:t>Find the room's area in square metres.</a:t>
+              <a:t>Find the room's area in square meters.</a:t>
             </a:r>
           </a:p>
         </p:txBody>
@@ -13372,7 +13372,7 @@
                 </a:solidFill>
                 <a:latin typeface="Lexend"/>
               </a:rPr>
-              <a:t>A car does 32 miles per gallon and its tank holds 14 gal. How far does it go on a tank?</a:t>
+              <a:t>A car gets 32 miles per gallon and its tank holds 14 gal. How far does it go on a tank?</a:t>
             </a:r>
           </a:p>
         </p:txBody>
@@ -13442,7 +13442,7 @@
                 </a:solidFill>
                 <a:latin typeface="Lexend"/>
               </a:rPr>
-              <a:t>That car starts a 1,000-mi trip with a full tank. How many tanks of gas does the trip take?</a:t>
+              <a:t>That car makes a 1,000-mi trip. How many tanks of gas does it use? (Part of a tank counts as a whole tank.)</a:t>
             </a:r>
           </a:p>
         </p:txBody>
@@ -13722,7 +13722,7 @@
                 </a:solidFill>
                 <a:latin typeface="Lexend"/>
               </a:rPr>
-              <a:t>A plan is drawn at 1 in : 5 ft; a room is 2 in by 3 in on it. 1 ft = 0.305 m. Find the room's area in square metres.</a:t>
+              <a:t>A plan is drawn at 1 in : 6 ft; a room is 2 in by 3.5 in on it. Find the room's real area.</a:t>
             </a:r>
           </a:p>
         </p:txBody>
@@ -15709,6 +15709,30 @@
           </a:prstGeom>
         </p:spPr>
       </p:pic>
+      <p:pic>
+        <p:nvPicPr>
+          <p:cNvPr id="11" name="Picture 10" descr="f2b684c3a3f3c20f.png"/>
+          <p:cNvPicPr>
+            <a:picLocks noChangeAspect="1"/>
+          </p:cNvPicPr>
+          <p:nvPr/>
+        </p:nvPicPr>
+        <p:blipFill>
+          <a:blip r:embed="rId3"/>
+          <a:stretch>
+            <a:fillRect/>
+          </a:stretch>
+        </p:blipFill>
+        <p:spPr>
+          <a:xfrm>
+            <a:off x="1043939" y="2953512"/>
+            <a:ext cx="10073640" cy="387096"/>
+          </a:xfrm>
+          <a:prstGeom prst="rect">
+            <a:avLst/>
+          </a:prstGeom>
+        </p:spPr>
+      </p:pic>
     </p:spTree>
   </p:cSld>
   <p:clrMapOvr>
@@ -16237,7 +16261,7 @@
       </p:sp>
       <p:pic>
         <p:nvPicPr>
-          <p:cNvPr id="8" name="Picture 7" descr="66491fba6d2c4594.png"/>
+          <p:cNvPr id="8" name="Picture 7" descr="2785da30ee960501.png"/>
           <p:cNvPicPr>
             <a:picLocks noChangeAspect="1"/>
           </p:cNvPicPr>
@@ -16252,7 +16276,7 @@
         <p:spPr>
           <a:xfrm>
             <a:off x="1828800" y="1920240"/>
-            <a:ext cx="6635496" cy="670560"/>
+            <a:ext cx="5949696" cy="670560"/>
           </a:xfrm>
           <a:prstGeom prst="rect">
             <a:avLst/>
@@ -16261,7 +16285,7 @@
       </p:pic>
       <p:pic>
         <p:nvPicPr>
-          <p:cNvPr id="9" name="Picture 8" descr="3c725b51699ea057.png"/>
+          <p:cNvPr id="9" name="Picture 8" descr="4fc8bab69cb80b62.png"/>
           <p:cNvPicPr>
             <a:picLocks noChangeAspect="1"/>
           </p:cNvPicPr>
@@ -16276,7 +16300,7 @@
         <p:spPr>
           <a:xfrm>
             <a:off x="1828800" y="2865120"/>
-            <a:ext cx="1615440" cy="667512"/>
+            <a:ext cx="2874264" cy="670560"/>
           </a:xfrm>
           <a:prstGeom prst="rect">
             <a:avLst/>
@@ -16285,7 +16309,7 @@
       </p:pic>
       <p:pic>
         <p:nvPicPr>
-          <p:cNvPr id="10" name="Picture 9" descr="8081506ef4a1aba9.png"/>
+          <p:cNvPr id="10" name="Picture 9" descr="3c725b51699ea057.png"/>
           <p:cNvPicPr>
             <a:picLocks noChangeAspect="1"/>
           </p:cNvPicPr>
@@ -16299,7 +16323,31 @@
         </p:blipFill>
         <p:spPr>
           <a:xfrm>
-            <a:off x="1828800" y="3806952"/>
+            <a:off x="1828800" y="3810000"/>
+            <a:ext cx="1615440" cy="667512"/>
+          </a:xfrm>
+          <a:prstGeom prst="rect">
+            <a:avLst/>
+          </a:prstGeom>
+        </p:spPr>
+      </p:pic>
+      <p:pic>
+        <p:nvPicPr>
+          <p:cNvPr id="11" name="Picture 10" descr="8081506ef4a1aba9.png"/>
+          <p:cNvPicPr>
+            <a:picLocks noChangeAspect="1"/>
+          </p:cNvPicPr>
+          <p:nvPr/>
+        </p:nvPicPr>
+        <p:blipFill>
+          <a:blip r:embed="rId5"/>
+          <a:stretch>
+            <a:fillRect/>
+          </a:stretch>
+        </p:blipFill>
+        <p:spPr>
+          <a:xfrm>
+            <a:off x="1828800" y="4751832"/>
             <a:ext cx="1859280" cy="277368"/>
           </a:xfrm>
           <a:prstGeom prst="rect">
@@ -16309,14 +16357,14 @@
       </p:pic>
       <p:sp>
         <p:nvSpPr>
-          <p:cNvPr id="11" name="TextBox 10"/>
-          <p:cNvSpPr txBox="1"/>
-          <p:nvPr/>
-        </p:nvSpPr>
-        <p:spPr>
-          <a:xfrm>
-            <a:off x="777240" y="4572000"/>
-            <a:ext cx="10607040" cy="1072896"/>
+          <p:cNvPr id="12" name="TextBox 11"/>
+          <p:cNvSpPr txBox="1"/>
+          <p:nvPr/>
+        </p:nvSpPr>
+        <p:spPr>
+          <a:xfrm>
+            <a:off x="777240" y="5486400"/>
+            <a:ext cx="10607040" cy="548640"/>
           </a:xfrm>
           <a:prstGeom prst="rect">
             <a:avLst/>
@@ -16337,7 +16385,7 @@
                 </a:solidFill>
                 <a:latin typeface="Lexend"/>
               </a:rPr>
-              <a:t>Answer:   A ≈ 12.08 km/h, B = 12 km/h; A is faster</a:t>
+              <a:t>Answer:   A ≈ 12.08 km/h, B = 12 km/h: A</a:t>
             </a:r>
           </a:p>
         </p:txBody>

--- a/a7/build/out/u5/A7 5.10 Multi-Step Proportion Problems - Slides.pptx
+++ b/a7/build/out/u5/A7 5.10 Multi-Step Proportion Problems - Slides.pptx
@@ -3665,16 +3665,75 @@
           </a:p>
         </p:txBody>
       </p:sp>
-      <p:sp>
-        <p:nvSpPr>
-          <p:cNvPr id="8" name="TextBox 7"/>
-          <p:cNvSpPr txBox="1"/>
-          <p:nvPr/>
-        </p:nvSpPr>
-        <p:spPr>
-          <a:xfrm>
-            <a:off x="777240" y="1600200"/>
-            <a:ext cx="10607040" cy="858740"/>
+      <p:pic>
+        <p:nvPicPr>
+          <p:cNvPr id="8" name="Picture 7" descr="55c3fc7a368775f4.png"/>
+          <p:cNvPicPr>
+            <a:picLocks noChangeAspect="1"/>
+          </p:cNvPicPr>
+          <p:nvPr/>
+        </p:nvPicPr>
+        <p:blipFill>
+          <a:blip r:embed="rId2"/>
+          <a:stretch>
+            <a:fillRect/>
+          </a:stretch>
+        </p:blipFill>
+        <p:spPr>
+          <a:xfrm>
+            <a:off x="4541702" y="1600200"/>
+            <a:ext cx="2929128" cy="377952"/>
+          </a:xfrm>
+          <a:prstGeom prst="rect">
+            <a:avLst/>
+          </a:prstGeom>
+        </p:spPr>
+      </p:pic>
+      <p:sp>
+        <p:nvSpPr>
+          <p:cNvPr id="9" name="TextBox 8"/>
+          <p:cNvSpPr txBox="1"/>
+          <p:nvPr/>
+        </p:nvSpPr>
+        <p:spPr>
+          <a:xfrm>
+            <a:off x="7470830" y="1577340"/>
+            <a:ext cx="286146" cy="457200"/>
+          </a:xfrm>
+          <a:prstGeom prst="rect">
+            <a:avLst/>
+          </a:prstGeom>
+          <a:noFill/>
+        </p:spPr>
+        <p:txBody>
+          <a:bodyPr wrap="none" lIns="45720" rIns="45720" tIns="18288" bIns="18288" anchor="ctr">
+            <a:noAutofit/>
+          </a:bodyPr>
+          <a:lstStyle/>
+          <a:p>
+            <a:pPr algn="l"/>
+            <a:r>
+              <a:rPr sz="2470" b="0" i="0">
+                <a:solidFill>
+                  <a:srgbClr val="1A1A1A"/>
+                </a:solidFill>
+                <a:latin typeface="Lexend"/>
+              </a:rPr>
+              <a:t>.</a:t>
+            </a:r>
+          </a:p>
+        </p:txBody>
+      </p:sp>
+      <p:sp>
+        <p:nvSpPr>
+          <p:cNvPr id="10" name="TextBox 9"/>
+          <p:cNvSpPr txBox="1"/>
+          <p:nvPr/>
+        </p:nvSpPr>
+        <p:spPr>
+          <a:xfrm>
+            <a:off x="777240" y="2331720"/>
+            <a:ext cx="10607040" cy="429370"/>
           </a:xfrm>
           <a:prstGeom prst="rect">
             <a:avLst/>
@@ -3695,20 +3754,20 @@
                 </a:solidFill>
                 <a:latin typeface="Lexend"/>
               </a:rPr>
-              <a:t>1 mi = 1.61 km. Runner A does 4 mi in 30 min; runner B does 7 km in 35 min.</a:t>
-            </a:r>
-          </a:p>
-        </p:txBody>
-      </p:sp>
-      <p:sp>
-        <p:nvSpPr>
-          <p:cNvPr id="9" name="TextBox 8"/>
-          <p:cNvSpPr txBox="1"/>
-          <p:nvPr/>
-        </p:nvSpPr>
-        <p:spPr>
-          <a:xfrm>
-            <a:off x="777240" y="2568668"/>
+              <a:t>Runner A does 4 mi in 30 min; runner B does 7 km in 35 min.</a:t>
+            </a:r>
+          </a:p>
+        </p:txBody>
+      </p:sp>
+      <p:sp>
+        <p:nvSpPr>
+          <p:cNvPr id="11" name="TextBox 10"/>
+          <p:cNvSpPr txBox="1"/>
+          <p:nvPr/>
+        </p:nvSpPr>
+        <p:spPr>
+          <a:xfrm>
+            <a:off x="777240" y="2870818"/>
             <a:ext cx="10607040" cy="429370"/>
           </a:xfrm>
           <a:prstGeom prst="rect">
@@ -3963,79 +4022,9 @@
           </a:p>
         </p:txBody>
       </p:sp>
-      <p:sp>
-        <p:nvSpPr>
-          <p:cNvPr id="8" name="TextBox 7"/>
-          <p:cNvSpPr txBox="1"/>
-          <p:nvPr/>
-        </p:nvSpPr>
-        <p:spPr>
-          <a:xfrm>
-            <a:off x="777240" y="1600200"/>
-            <a:ext cx="10607040" cy="858740"/>
-          </a:xfrm>
-          <a:prstGeom prst="rect">
-            <a:avLst/>
-          </a:prstGeom>
-          <a:noFill/>
-        </p:spPr>
-        <p:txBody>
-          <a:bodyPr wrap="square" lIns="45720" rIns="45720" tIns="18288" bIns="18288" anchor="t">
-            <a:spAutoFit/>
-          </a:bodyPr>
-          <a:lstStyle/>
-          <a:p>
-            <a:pPr algn="ctr"/>
-            <a:r>
-              <a:rPr sz="2280" b="0" i="0">
-                <a:solidFill>
-                  <a:srgbClr val="1A1A1A"/>
-                </a:solidFill>
-                <a:latin typeface="Lexend"/>
-              </a:rPr>
-              <a:t>1 mi = 1.61 km. Runner A does 4 mi in 30 min; runner B does 7 km in 35 min.</a:t>
-            </a:r>
-          </a:p>
-        </p:txBody>
-      </p:sp>
-      <p:sp>
-        <p:nvSpPr>
-          <p:cNvPr id="9" name="TextBox 8"/>
-          <p:cNvSpPr txBox="1"/>
-          <p:nvPr/>
-        </p:nvSpPr>
-        <p:spPr>
-          <a:xfrm>
-            <a:off x="777240" y="2568668"/>
-            <a:ext cx="10607040" cy="429370"/>
-          </a:xfrm>
-          <a:prstGeom prst="rect">
-            <a:avLst/>
-          </a:prstGeom>
-          <a:noFill/>
-        </p:spPr>
-        <p:txBody>
-          <a:bodyPr wrap="square" lIns="45720" rIns="45720" tIns="18288" bIns="18288" anchor="t">
-            <a:spAutoFit/>
-          </a:bodyPr>
-          <a:lstStyle/>
-          <a:p>
-            <a:pPr algn="ctr"/>
-            <a:r>
-              <a:rPr sz="2280" b="0" i="0">
-                <a:solidFill>
-                  <a:srgbClr val="1A1A1A"/>
-                </a:solidFill>
-                <a:latin typeface="Lexend"/>
-              </a:rPr>
-              <a:t>Find each speed in km/h. Who is faster?</a:t>
-            </a:r>
-          </a:p>
-        </p:txBody>
-      </p:sp>
       <p:pic>
         <p:nvPicPr>
-          <p:cNvPr id="10" name="Picture 9" descr="7b8f562dd79bcbb1.png"/>
+          <p:cNvPr id="8" name="Picture 7" descr="f6c1428a8fe5faa1.png"/>
           <p:cNvPicPr>
             <a:picLocks noChangeAspect="1"/>
           </p:cNvPicPr>
@@ -4049,17 +4038,122 @@
         </p:blipFill>
         <p:spPr>
           <a:xfrm>
-            <a:off x="3509772" y="3180919"/>
-            <a:ext cx="5251704" cy="606552"/>
+            <a:off x="4543226" y="1600200"/>
+            <a:ext cx="2926080" cy="377952"/>
           </a:xfrm>
           <a:prstGeom prst="rect">
             <a:avLst/>
           </a:prstGeom>
         </p:spPr>
       </p:pic>
+      <p:sp>
+        <p:nvSpPr>
+          <p:cNvPr id="9" name="TextBox 8"/>
+          <p:cNvSpPr txBox="1"/>
+          <p:nvPr/>
+        </p:nvSpPr>
+        <p:spPr>
+          <a:xfrm>
+            <a:off x="7469306" y="1577340"/>
+            <a:ext cx="286146" cy="457200"/>
+          </a:xfrm>
+          <a:prstGeom prst="rect">
+            <a:avLst/>
+          </a:prstGeom>
+          <a:noFill/>
+        </p:spPr>
+        <p:txBody>
+          <a:bodyPr wrap="none" lIns="45720" rIns="45720" tIns="18288" bIns="18288" anchor="ctr">
+            <a:noAutofit/>
+          </a:bodyPr>
+          <a:lstStyle/>
+          <a:p>
+            <a:pPr algn="l"/>
+            <a:r>
+              <a:rPr sz="2470" b="0" i="0">
+                <a:solidFill>
+                  <a:srgbClr val="1A1A1A"/>
+                </a:solidFill>
+                <a:latin typeface="Lexend"/>
+              </a:rPr>
+              <a:t>.</a:t>
+            </a:r>
+          </a:p>
+        </p:txBody>
+      </p:sp>
+      <p:sp>
+        <p:nvSpPr>
+          <p:cNvPr id="10" name="TextBox 9"/>
+          <p:cNvSpPr txBox="1"/>
+          <p:nvPr/>
+        </p:nvSpPr>
+        <p:spPr>
+          <a:xfrm>
+            <a:off x="777240" y="2331720"/>
+            <a:ext cx="10607040" cy="429370"/>
+          </a:xfrm>
+          <a:prstGeom prst="rect">
+            <a:avLst/>
+          </a:prstGeom>
+          <a:noFill/>
+        </p:spPr>
+        <p:txBody>
+          <a:bodyPr wrap="square" lIns="45720" rIns="45720" tIns="18288" bIns="18288" anchor="t">
+            <a:spAutoFit/>
+          </a:bodyPr>
+          <a:lstStyle/>
+          <a:p>
+            <a:pPr algn="ctr"/>
+            <a:r>
+              <a:rPr sz="2280" b="0" i="0">
+                <a:solidFill>
+                  <a:srgbClr val="1A1A1A"/>
+                </a:solidFill>
+                <a:latin typeface="Lexend"/>
+              </a:rPr>
+              <a:t>Runner A does 4 mi in 30 min; runner B does 7 km in 35 min.</a:t>
+            </a:r>
+          </a:p>
+        </p:txBody>
+      </p:sp>
+      <p:sp>
+        <p:nvSpPr>
+          <p:cNvPr id="11" name="TextBox 10"/>
+          <p:cNvSpPr txBox="1"/>
+          <p:nvPr/>
+        </p:nvSpPr>
+        <p:spPr>
+          <a:xfrm>
+            <a:off x="777240" y="2870818"/>
+            <a:ext cx="10607040" cy="429370"/>
+          </a:xfrm>
+          <a:prstGeom prst="rect">
+            <a:avLst/>
+          </a:prstGeom>
+          <a:noFill/>
+        </p:spPr>
+        <p:txBody>
+          <a:bodyPr wrap="square" lIns="45720" rIns="45720" tIns="18288" bIns="18288" anchor="t">
+            <a:spAutoFit/>
+          </a:bodyPr>
+          <a:lstStyle/>
+          <a:p>
+            <a:pPr algn="ctr"/>
+            <a:r>
+              <a:rPr sz="2280" b="0" i="0">
+                <a:solidFill>
+                  <a:srgbClr val="1A1A1A"/>
+                </a:solidFill>
+                <a:latin typeface="Lexend"/>
+              </a:rPr>
+              <a:t>Find each speed in km/h. Who is faster?</a:t>
+            </a:r>
+          </a:p>
+        </p:txBody>
+      </p:sp>
       <p:pic>
         <p:nvPicPr>
-          <p:cNvPr id="11" name="Picture 10" descr="fb86ceff55f1ba9c.png"/>
+          <p:cNvPr id="12" name="Picture 11" descr="7b8f562dd79bcbb1.png"/>
           <p:cNvPicPr>
             <a:picLocks noChangeAspect="1"/>
           </p:cNvPicPr>
@@ -4073,7 +4167,31 @@
         </p:blipFill>
         <p:spPr>
           <a:xfrm>
-            <a:off x="3509772" y="3915487"/>
+            <a:off x="3509772" y="3483068"/>
+            <a:ext cx="5251704" cy="606552"/>
+          </a:xfrm>
+          <a:prstGeom prst="rect">
+            <a:avLst/>
+          </a:prstGeom>
+        </p:spPr>
+      </p:pic>
+      <p:pic>
+        <p:nvPicPr>
+          <p:cNvPr id="13" name="Picture 12" descr="fb86ceff55f1ba9c.png"/>
+          <p:cNvPicPr>
+            <a:picLocks noChangeAspect="1"/>
+          </p:cNvPicPr>
+          <p:nvPr/>
+        </p:nvPicPr>
+        <p:blipFill>
+          <a:blip r:embed="rId4"/>
+          <a:stretch>
+            <a:fillRect/>
+          </a:stretch>
+        </p:blipFill>
+        <p:spPr>
+          <a:xfrm>
+            <a:off x="3509772" y="4217636"/>
             <a:ext cx="1603248" cy="603504"/>
           </a:xfrm>
           <a:prstGeom prst="rect">
@@ -4083,13 +4201,13 @@
       </p:pic>
       <p:sp>
         <p:nvSpPr>
-          <p:cNvPr id="12" name="TextBox 11"/>
-          <p:cNvSpPr txBox="1"/>
-          <p:nvPr/>
-        </p:nvSpPr>
-        <p:spPr>
-          <a:xfrm>
-            <a:off x="777240" y="4656151"/>
+          <p:cNvPr id="14" name="TextBox 13"/>
+          <p:cNvSpPr txBox="1"/>
+          <p:nvPr/>
+        </p:nvSpPr>
+        <p:spPr>
+          <a:xfrm>
+            <a:off x="777240" y="4958300"/>
             <a:ext cx="10607040" cy="548640"/>
           </a:xfrm>
           <a:prstGeom prst="rect">
@@ -4352,21 +4470,21 @@
         </p:nvSpPr>
         <p:spPr>
           <a:xfrm>
-            <a:off x="777240" y="2103120"/>
-            <a:ext cx="10607040" cy="429370"/>
-          </a:xfrm>
-          <a:prstGeom prst="rect">
-            <a:avLst/>
-          </a:prstGeom>
-          <a:noFill/>
-        </p:spPr>
-        <p:txBody>
-          <a:bodyPr wrap="square" lIns="45720" rIns="45720" tIns="18288" bIns="18288" anchor="t">
-            <a:spAutoFit/>
-          </a:bodyPr>
-          <a:lstStyle/>
-          <a:p>
-            <a:pPr algn="ctr"/>
+            <a:off x="2820414" y="2145792"/>
+            <a:ext cx="4377744" cy="457200"/>
+          </a:xfrm>
+          <a:prstGeom prst="rect">
+            <a:avLst/>
+          </a:prstGeom>
+          <a:noFill/>
+        </p:spPr>
+        <p:txBody>
+          <a:bodyPr wrap="none" lIns="45720" rIns="45720" tIns="18288" bIns="18288" anchor="ctr">
+            <a:noAutofit/>
+          </a:bodyPr>
+          <a:lstStyle/>
+          <a:p>
+            <a:pPr algn="l"/>
             <a:r>
               <a:rPr sz="2280" b="0" i="0">
                 <a:solidFill>
@@ -4374,20 +4492,79 @@
                 </a:solidFill>
                 <a:latin typeface="Lexend"/>
               </a:rPr>
-              <a:t>A recipe for 8 servings uses 2½ cups of rice.</a:t>
-            </a:r>
-          </a:p>
-        </p:txBody>
-      </p:sp>
-      <p:sp>
-        <p:nvSpPr>
-          <p:cNvPr id="9" name="TextBox 8"/>
-          <p:cNvSpPr txBox="1"/>
-          <p:nvPr/>
-        </p:nvSpPr>
-        <p:spPr>
-          <a:xfrm>
-            <a:off x="777240" y="2825098"/>
+              <a:t>A recipe for 8 servings uses </a:t>
+            </a:r>
+          </a:p>
+        </p:txBody>
+      </p:sp>
+      <p:pic>
+        <p:nvPicPr>
+          <p:cNvPr id="9" name="Picture 8" descr="37e2160f39e92d84.png"/>
+          <p:cNvPicPr>
+            <a:picLocks noChangeAspect="1"/>
+          </p:cNvPicPr>
+          <p:nvPr/>
+        </p:nvPicPr>
+        <p:blipFill>
+          <a:blip r:embed="rId2"/>
+          <a:stretch>
+            <a:fillRect/>
+          </a:stretch>
+        </p:blipFill>
+        <p:spPr>
+          <a:xfrm>
+            <a:off x="7060999" y="2103120"/>
+            <a:ext cx="332232" cy="542544"/>
+          </a:xfrm>
+          <a:prstGeom prst="rect">
+            <a:avLst/>
+          </a:prstGeom>
+        </p:spPr>
+      </p:pic>
+      <p:sp>
+        <p:nvSpPr>
+          <p:cNvPr id="10" name="TextBox 9"/>
+          <p:cNvSpPr txBox="1"/>
+          <p:nvPr/>
+        </p:nvSpPr>
+        <p:spPr>
+          <a:xfrm>
+            <a:off x="7393231" y="2145792"/>
+            <a:ext cx="2085034" cy="457200"/>
+          </a:xfrm>
+          <a:prstGeom prst="rect">
+            <a:avLst/>
+          </a:prstGeom>
+          <a:noFill/>
+        </p:spPr>
+        <p:txBody>
+          <a:bodyPr wrap="none" lIns="45720" rIns="45720" tIns="18288" bIns="18288" anchor="ctr">
+            <a:noAutofit/>
+          </a:bodyPr>
+          <a:lstStyle/>
+          <a:p>
+            <a:pPr algn="l"/>
+            <a:r>
+              <a:rPr sz="2280" b="0" i="0">
+                <a:solidFill>
+                  <a:srgbClr val="1A1A1A"/>
+                </a:solidFill>
+                <a:latin typeface="Lexend"/>
+              </a:rPr>
+              <a:t> cups of rice.</a:t>
+            </a:r>
+          </a:p>
+        </p:txBody>
+      </p:sp>
+      <p:sp>
+        <p:nvSpPr>
+          <p:cNvPr id="11" name="TextBox 10"/>
+          <p:cNvSpPr txBox="1"/>
+          <p:nvPr/>
+        </p:nvSpPr>
+        <p:spPr>
+          <a:xfrm>
+            <a:off x="777240" y="3102864"/>
             <a:ext cx="10607040" cy="858740"/>
           </a:xfrm>
           <a:prstGeom prst="rect">
@@ -4961,7 +5138,101 @@
         </p:nvSpPr>
         <p:spPr>
           <a:xfrm>
-            <a:off x="777240" y="1600200"/>
+            <a:off x="2835978" y="1642872"/>
+            <a:ext cx="4371000" cy="457200"/>
+          </a:xfrm>
+          <a:prstGeom prst="rect">
+            <a:avLst/>
+          </a:prstGeom>
+          <a:noFill/>
+        </p:spPr>
+        <p:txBody>
+          <a:bodyPr wrap="none" lIns="45720" rIns="45720" tIns="18288" bIns="18288" anchor="ctr">
+            <a:noAutofit/>
+          </a:bodyPr>
+          <a:lstStyle/>
+          <a:p>
+            <a:pPr algn="l"/>
+            <a:r>
+              <a:rPr sz="2280" b="0" i="0">
+                <a:solidFill>
+                  <a:srgbClr val="1A1A1A"/>
+                </a:solidFill>
+                <a:latin typeface="Lexend"/>
+              </a:rPr>
+              <a:t>A recipe for 6 servings uses </a:t>
+            </a:r>
+          </a:p>
+        </p:txBody>
+      </p:sp>
+      <p:pic>
+        <p:nvPicPr>
+          <p:cNvPr id="9" name="Picture 8" descr="c329812939336051.png"/>
+          <p:cNvPicPr>
+            <a:picLocks noChangeAspect="1"/>
+          </p:cNvPicPr>
+          <p:nvPr/>
+        </p:nvPicPr>
+        <p:blipFill>
+          <a:blip r:embed="rId2"/>
+          <a:stretch>
+            <a:fillRect/>
+          </a:stretch>
+        </p:blipFill>
+        <p:spPr>
+          <a:xfrm>
+            <a:off x="7069818" y="1600200"/>
+            <a:ext cx="307848" cy="542544"/>
+          </a:xfrm>
+          <a:prstGeom prst="rect">
+            <a:avLst/>
+          </a:prstGeom>
+        </p:spPr>
+      </p:pic>
+      <p:sp>
+        <p:nvSpPr>
+          <p:cNvPr id="10" name="TextBox 9"/>
+          <p:cNvSpPr txBox="1"/>
+          <p:nvPr/>
+        </p:nvSpPr>
+        <p:spPr>
+          <a:xfrm>
+            <a:off x="7377666" y="1642872"/>
+            <a:ext cx="2085034" cy="457200"/>
+          </a:xfrm>
+          <a:prstGeom prst="rect">
+            <a:avLst/>
+          </a:prstGeom>
+          <a:noFill/>
+        </p:spPr>
+        <p:txBody>
+          <a:bodyPr wrap="none" lIns="45720" rIns="45720" tIns="18288" bIns="18288" anchor="ctr">
+            <a:noAutofit/>
+          </a:bodyPr>
+          <a:lstStyle/>
+          <a:p>
+            <a:pPr algn="l"/>
+            <a:r>
+              <a:rPr sz="2280" b="0" i="0">
+                <a:solidFill>
+                  <a:srgbClr val="1A1A1A"/>
+                </a:solidFill>
+                <a:latin typeface="Lexend"/>
+              </a:rPr>
+              <a:t> cups of rice.</a:t>
+            </a:r>
+          </a:p>
+        </p:txBody>
+      </p:sp>
+      <p:sp>
+        <p:nvSpPr>
+          <p:cNvPr id="11" name="TextBox 10"/>
+          <p:cNvSpPr txBox="1"/>
+          <p:nvPr/>
+        </p:nvSpPr>
+        <p:spPr>
+          <a:xfrm>
+            <a:off x="777240" y="2417064"/>
             <a:ext cx="10607040" cy="429370"/>
           </a:xfrm>
           <a:prstGeom prst="rect">
@@ -4983,34 +5254,34 @@
                 </a:solidFill>
                 <a:latin typeface="Lexend"/>
               </a:rPr>
-              <a:t>A recipe for 6 servings uses 1½ cups of rice.</a:t>
-            </a:r>
-          </a:p>
-        </p:txBody>
-      </p:sp>
-      <p:sp>
-        <p:nvSpPr>
-          <p:cNvPr id="9" name="TextBox 8"/>
-          <p:cNvSpPr txBox="1"/>
-          <p:nvPr/>
-        </p:nvSpPr>
-        <p:spPr>
-          <a:xfrm>
-            <a:off x="777240" y="2139298"/>
-            <a:ext cx="10607040" cy="858740"/>
-          </a:xfrm>
-          <a:prstGeom prst="rect">
-            <a:avLst/>
-          </a:prstGeom>
-          <a:noFill/>
-        </p:spPr>
-        <p:txBody>
-          <a:bodyPr wrap="square" lIns="45720" rIns="45720" tIns="18288" bIns="18288" anchor="t">
-            <a:spAutoFit/>
-          </a:bodyPr>
-          <a:lstStyle/>
-          <a:p>
-            <a:pPr algn="ctr"/>
+              <a:t>How much rice for 12 servings?</a:t>
+            </a:r>
+          </a:p>
+        </p:txBody>
+      </p:sp>
+      <p:sp>
+        <p:nvSpPr>
+          <p:cNvPr id="12" name="TextBox 11"/>
+          <p:cNvSpPr txBox="1"/>
+          <p:nvPr/>
+        </p:nvSpPr>
+        <p:spPr>
+          <a:xfrm>
+            <a:off x="2802201" y="2998834"/>
+            <a:ext cx="987737" cy="457200"/>
+          </a:xfrm>
+          <a:prstGeom prst="rect">
+            <a:avLst/>
+          </a:prstGeom>
+          <a:noFill/>
+        </p:spPr>
+        <p:txBody>
+          <a:bodyPr wrap="none" lIns="45720" rIns="45720" tIns="18288" bIns="18288" anchor="ctr">
+            <a:noAutofit/>
+          </a:bodyPr>
+          <a:lstStyle/>
+          <a:p>
+            <a:pPr algn="l"/>
             <a:r>
               <a:rPr sz="2280" b="0" i="0">
                 <a:solidFill>
@@ -5018,7 +5289,66 @@
                 </a:solidFill>
                 <a:latin typeface="Lexend"/>
               </a:rPr>
-              <a:t>How much rice for 12 servings? With 4½ cups on hand, how many servings?</a:t>
+              <a:t>With </a:t>
+            </a:r>
+          </a:p>
+        </p:txBody>
+      </p:sp>
+      <p:pic>
+        <p:nvPicPr>
+          <p:cNvPr id="13" name="Picture 12" descr="c4d7fa400edc5e3e.png"/>
+          <p:cNvPicPr>
+            <a:picLocks noChangeAspect="1"/>
+          </p:cNvPicPr>
+          <p:nvPr/>
+        </p:nvPicPr>
+        <p:blipFill>
+          <a:blip r:embed="rId3"/>
+          <a:stretch>
+            <a:fillRect/>
+          </a:stretch>
+        </p:blipFill>
+        <p:spPr>
+          <a:xfrm>
+            <a:off x="3652778" y="2956162"/>
+            <a:ext cx="362712" cy="542544"/>
+          </a:xfrm>
+          <a:prstGeom prst="rect">
+            <a:avLst/>
+          </a:prstGeom>
+        </p:spPr>
+      </p:pic>
+      <p:sp>
+        <p:nvSpPr>
+          <p:cNvPr id="14" name="TextBox 13"/>
+          <p:cNvSpPr txBox="1"/>
+          <p:nvPr/>
+        </p:nvSpPr>
+        <p:spPr>
+          <a:xfrm>
+            <a:off x="4015490" y="2998834"/>
+            <a:ext cx="5480987" cy="457200"/>
+          </a:xfrm>
+          <a:prstGeom prst="rect">
+            <a:avLst/>
+          </a:prstGeom>
+          <a:noFill/>
+        </p:spPr>
+        <p:txBody>
+          <a:bodyPr wrap="none" lIns="45720" rIns="45720" tIns="18288" bIns="18288" anchor="ctr">
+            <a:noAutofit/>
+          </a:bodyPr>
+          <a:lstStyle/>
+          <a:p>
+            <a:pPr algn="l"/>
+            <a:r>
+              <a:rPr sz="2280" b="0" i="0">
+                <a:solidFill>
+                  <a:srgbClr val="1A1A1A"/>
+                </a:solidFill>
+                <a:latin typeface="Lexend"/>
+              </a:rPr>
+              <a:t> cups on hand, how many servings?</a:t>
             </a:r>
           </a:p>
         </p:txBody>
@@ -5259,21 +5589,21 @@
         </p:nvSpPr>
         <p:spPr>
           <a:xfrm>
-            <a:off x="777240" y="1600200"/>
-            <a:ext cx="10607040" cy="429370"/>
-          </a:xfrm>
-          <a:prstGeom prst="rect">
-            <a:avLst/>
-          </a:prstGeom>
-          <a:noFill/>
-        </p:spPr>
-        <p:txBody>
-          <a:bodyPr wrap="square" lIns="45720" rIns="45720" tIns="18288" bIns="18288" anchor="t">
-            <a:spAutoFit/>
-          </a:bodyPr>
-          <a:lstStyle/>
-          <a:p>
-            <a:pPr algn="ctr"/>
+            <a:off x="2839026" y="1642872"/>
+            <a:ext cx="4371000" cy="457200"/>
+          </a:xfrm>
+          <a:prstGeom prst="rect">
+            <a:avLst/>
+          </a:prstGeom>
+          <a:noFill/>
+        </p:spPr>
+        <p:txBody>
+          <a:bodyPr wrap="none" lIns="45720" rIns="45720" tIns="18288" bIns="18288" anchor="ctr">
+            <a:noAutofit/>
+          </a:bodyPr>
+          <a:lstStyle/>
+          <a:p>
+            <a:pPr algn="l"/>
             <a:r>
               <a:rPr sz="2280" b="0" i="0">
                 <a:solidFill>
@@ -5281,49 +5611,14 @@
                 </a:solidFill>
                 <a:latin typeface="Lexend"/>
               </a:rPr>
-              <a:t>A recipe for 6 servings uses 1½ cups of rice.</a:t>
-            </a:r>
-          </a:p>
-        </p:txBody>
-      </p:sp>
-      <p:sp>
-        <p:nvSpPr>
-          <p:cNvPr id="9" name="TextBox 8"/>
-          <p:cNvSpPr txBox="1"/>
-          <p:nvPr/>
-        </p:nvSpPr>
-        <p:spPr>
-          <a:xfrm>
-            <a:off x="777240" y="2139298"/>
-            <a:ext cx="10607040" cy="858740"/>
-          </a:xfrm>
-          <a:prstGeom prst="rect">
-            <a:avLst/>
-          </a:prstGeom>
-          <a:noFill/>
-        </p:spPr>
-        <p:txBody>
-          <a:bodyPr wrap="square" lIns="45720" rIns="45720" tIns="18288" bIns="18288" anchor="t">
-            <a:spAutoFit/>
-          </a:bodyPr>
-          <a:lstStyle/>
-          <a:p>
-            <a:pPr algn="ctr"/>
-            <a:r>
-              <a:rPr sz="2280" b="0" i="0">
-                <a:solidFill>
-                  <a:srgbClr val="1A1A1A"/>
-                </a:solidFill>
-                <a:latin typeface="Lexend"/>
-              </a:rPr>
-              <a:t>How much rice for 12 servings? With 4½ cups on hand, how many servings?</a:t>
+              <a:t>A recipe for 6 servings uses </a:t>
             </a:r>
           </a:p>
         </p:txBody>
       </p:sp>
       <p:pic>
         <p:nvPicPr>
-          <p:cNvPr id="10" name="Picture 9" descr="9d4724fac4a2806c.png"/>
+          <p:cNvPr id="9" name="Picture 8" descr="da5a8fd9ee34c7c2.png"/>
           <p:cNvPicPr>
             <a:picLocks noChangeAspect="1"/>
           </p:cNvPicPr>
@@ -5337,17 +5632,122 @@
         </p:blipFill>
         <p:spPr>
           <a:xfrm>
-            <a:off x="4279392" y="3180919"/>
-            <a:ext cx="3474720" cy="606552"/>
+            <a:off x="7072866" y="1600200"/>
+            <a:ext cx="301752" cy="542544"/>
           </a:xfrm>
           <a:prstGeom prst="rect">
             <a:avLst/>
           </a:prstGeom>
         </p:spPr>
       </p:pic>
+      <p:sp>
+        <p:nvSpPr>
+          <p:cNvPr id="10" name="TextBox 9"/>
+          <p:cNvSpPr txBox="1"/>
+          <p:nvPr/>
+        </p:nvSpPr>
+        <p:spPr>
+          <a:xfrm>
+            <a:off x="7374618" y="1642872"/>
+            <a:ext cx="2085034" cy="457200"/>
+          </a:xfrm>
+          <a:prstGeom prst="rect">
+            <a:avLst/>
+          </a:prstGeom>
+          <a:noFill/>
+        </p:spPr>
+        <p:txBody>
+          <a:bodyPr wrap="none" lIns="45720" rIns="45720" tIns="18288" bIns="18288" anchor="ctr">
+            <a:noAutofit/>
+          </a:bodyPr>
+          <a:lstStyle/>
+          <a:p>
+            <a:pPr algn="l"/>
+            <a:r>
+              <a:rPr sz="2280" b="0" i="0">
+                <a:solidFill>
+                  <a:srgbClr val="1A1A1A"/>
+                </a:solidFill>
+                <a:latin typeface="Lexend"/>
+              </a:rPr>
+              <a:t> cups of rice.</a:t>
+            </a:r>
+          </a:p>
+        </p:txBody>
+      </p:sp>
+      <p:sp>
+        <p:nvSpPr>
+          <p:cNvPr id="11" name="TextBox 10"/>
+          <p:cNvSpPr txBox="1"/>
+          <p:nvPr/>
+        </p:nvSpPr>
+        <p:spPr>
+          <a:xfrm>
+            <a:off x="777240" y="2417064"/>
+            <a:ext cx="10607040" cy="429370"/>
+          </a:xfrm>
+          <a:prstGeom prst="rect">
+            <a:avLst/>
+          </a:prstGeom>
+          <a:noFill/>
+        </p:spPr>
+        <p:txBody>
+          <a:bodyPr wrap="square" lIns="45720" rIns="45720" tIns="18288" bIns="18288" anchor="t">
+            <a:spAutoFit/>
+          </a:bodyPr>
+          <a:lstStyle/>
+          <a:p>
+            <a:pPr algn="ctr"/>
+            <a:r>
+              <a:rPr sz="2280" b="0" i="0">
+                <a:solidFill>
+                  <a:srgbClr val="1A1A1A"/>
+                </a:solidFill>
+                <a:latin typeface="Lexend"/>
+              </a:rPr>
+              <a:t>How much rice for 12 servings?</a:t>
+            </a:r>
+          </a:p>
+        </p:txBody>
+      </p:sp>
+      <p:sp>
+        <p:nvSpPr>
+          <p:cNvPr id="12" name="TextBox 11"/>
+          <p:cNvSpPr txBox="1"/>
+          <p:nvPr/>
+        </p:nvSpPr>
+        <p:spPr>
+          <a:xfrm>
+            <a:off x="2805249" y="2998834"/>
+            <a:ext cx="987737" cy="457200"/>
+          </a:xfrm>
+          <a:prstGeom prst="rect">
+            <a:avLst/>
+          </a:prstGeom>
+          <a:noFill/>
+        </p:spPr>
+        <p:txBody>
+          <a:bodyPr wrap="none" lIns="45720" rIns="45720" tIns="18288" bIns="18288" anchor="ctr">
+            <a:noAutofit/>
+          </a:bodyPr>
+          <a:lstStyle/>
+          <a:p>
+            <a:pPr algn="l"/>
+            <a:r>
+              <a:rPr sz="2280" b="0" i="0">
+                <a:solidFill>
+                  <a:srgbClr val="1A1A1A"/>
+                </a:solidFill>
+                <a:latin typeface="Lexend"/>
+              </a:rPr>
+              <a:t>With </a:t>
+            </a:r>
+          </a:p>
+        </p:txBody>
+      </p:sp>
       <p:pic>
         <p:nvPicPr>
-          <p:cNvPr id="11" name="Picture 10" descr="13f1547c75366d5d.png"/>
+          <p:cNvPr id="13" name="Picture 12" descr="8e2d2576f86f7f20.png"/>
           <p:cNvPicPr>
             <a:picLocks noChangeAspect="1"/>
           </p:cNvPicPr>
@@ -5361,7 +5761,90 @@
         </p:blipFill>
         <p:spPr>
           <a:xfrm>
-            <a:off x="4279392" y="3915487"/>
+            <a:off x="3655826" y="2956162"/>
+            <a:ext cx="356616" cy="542544"/>
+          </a:xfrm>
+          <a:prstGeom prst="rect">
+            <a:avLst/>
+          </a:prstGeom>
+        </p:spPr>
+      </p:pic>
+      <p:sp>
+        <p:nvSpPr>
+          <p:cNvPr id="14" name="TextBox 13"/>
+          <p:cNvSpPr txBox="1"/>
+          <p:nvPr/>
+        </p:nvSpPr>
+        <p:spPr>
+          <a:xfrm>
+            <a:off x="4012442" y="2998834"/>
+            <a:ext cx="5480987" cy="457200"/>
+          </a:xfrm>
+          <a:prstGeom prst="rect">
+            <a:avLst/>
+          </a:prstGeom>
+          <a:noFill/>
+        </p:spPr>
+        <p:txBody>
+          <a:bodyPr wrap="none" lIns="45720" rIns="45720" tIns="18288" bIns="18288" anchor="ctr">
+            <a:noAutofit/>
+          </a:bodyPr>
+          <a:lstStyle/>
+          <a:p>
+            <a:pPr algn="l"/>
+            <a:r>
+              <a:rPr sz="2280" b="0" i="0">
+                <a:solidFill>
+                  <a:srgbClr val="1A1A1A"/>
+                </a:solidFill>
+                <a:latin typeface="Lexend"/>
+              </a:rPr>
+              <a:t> cups on hand, how many servings?</a:t>
+            </a:r>
+          </a:p>
+        </p:txBody>
+      </p:sp>
+      <p:pic>
+        <p:nvPicPr>
+          <p:cNvPr id="15" name="Picture 14" descr="9d4724fac4a2806c.png"/>
+          <p:cNvPicPr>
+            <a:picLocks noChangeAspect="1"/>
+          </p:cNvPicPr>
+          <p:nvPr/>
+        </p:nvPicPr>
+        <p:blipFill>
+          <a:blip r:embed="rId4"/>
+          <a:stretch>
+            <a:fillRect/>
+          </a:stretch>
+        </p:blipFill>
+        <p:spPr>
+          <a:xfrm>
+            <a:off x="4279392" y="3846178"/>
+            <a:ext cx="3474720" cy="606552"/>
+          </a:xfrm>
+          <a:prstGeom prst="rect">
+            <a:avLst/>
+          </a:prstGeom>
+        </p:spPr>
+      </p:pic>
+      <p:pic>
+        <p:nvPicPr>
+          <p:cNvPr id="16" name="Picture 15" descr="13f1547c75366d5d.png"/>
+          <p:cNvPicPr>
+            <a:picLocks noChangeAspect="1"/>
+          </p:cNvPicPr>
+          <p:nvPr/>
+        </p:nvPicPr>
+        <p:blipFill>
+          <a:blip r:embed="rId5"/>
+          <a:stretch>
+            <a:fillRect/>
+          </a:stretch>
+        </p:blipFill>
+        <p:spPr>
+          <a:xfrm>
+            <a:off x="4279392" y="4580746"/>
             <a:ext cx="3712463" cy="606552"/>
           </a:xfrm>
           <a:prstGeom prst="rect">
@@ -5371,13 +5854,13 @@
       </p:pic>
       <p:sp>
         <p:nvSpPr>
-          <p:cNvPr id="12" name="TextBox 11"/>
-          <p:cNvSpPr txBox="1"/>
-          <p:nvPr/>
-        </p:nvSpPr>
-        <p:spPr>
-          <a:xfrm>
-            <a:off x="777240" y="4659199"/>
+          <p:cNvPr id="17" name="TextBox 16"/>
+          <p:cNvSpPr txBox="1"/>
+          <p:nvPr/>
+        </p:nvSpPr>
+        <p:spPr>
+          <a:xfrm>
+            <a:off x="777240" y="5324458"/>
             <a:ext cx="10607040" cy="548640"/>
           </a:xfrm>
           <a:prstGeom prst="rect">
@@ -6051,7 +6534,7 @@
         </p:blipFill>
         <p:spPr>
           <a:xfrm>
-            <a:off x="5145023" y="3150836"/>
+            <a:off x="5145023" y="3168553"/>
             <a:ext cx="1981199" cy="252984"/>
           </a:xfrm>
           <a:prstGeom prst="rect">
@@ -6741,7 +7224,7 @@
         </p:blipFill>
         <p:spPr>
           <a:xfrm>
-            <a:off x="4963667" y="3120356"/>
+            <a:off x="4963667" y="3165505"/>
             <a:ext cx="2343912" cy="313944"/>
           </a:xfrm>
           <a:prstGeom prst="rect">
@@ -7021,7 +7504,7 @@
         <p:spPr>
           <a:xfrm>
             <a:off x="1874519" y="1440180"/>
-            <a:ext cx="6627442" cy="457200"/>
+            <a:ext cx="671561" cy="457200"/>
           </a:xfrm>
           <a:prstGeom prst="rect">
             <a:avLst/>
@@ -7042,84 +7525,14 @@
                 </a:solidFill>
                 <a:latin typeface="Lexend"/>
               </a:rPr>
-              <a:t>1.   1 kg = 2.204 lb. How many pounds is 4 kg?</a:t>
-            </a:r>
-          </a:p>
-        </p:txBody>
-      </p:sp>
-      <p:sp>
-        <p:nvSpPr>
-          <p:cNvPr id="9" name="TextBox 8"/>
-          <p:cNvSpPr txBox="1"/>
-          <p:nvPr/>
-        </p:nvSpPr>
-        <p:spPr>
-          <a:xfrm>
-            <a:off x="1874519" y="2052828"/>
-            <a:ext cx="7901486" cy="457200"/>
-          </a:xfrm>
-          <a:prstGeom prst="rect">
-            <a:avLst/>
-          </a:prstGeom>
-          <a:noFill/>
-        </p:spPr>
-        <p:txBody>
-          <a:bodyPr wrap="none" lIns="45720" rIns="45720" tIns="18288" bIns="18288" anchor="ctr">
-            <a:noAutofit/>
-          </a:bodyPr>
-          <a:lstStyle/>
-          <a:p>
-            <a:pPr algn="l"/>
-            <a:r>
-              <a:rPr sz="2180" b="0" i="0">
-                <a:solidFill>
-                  <a:srgbClr val="1A1A1A"/>
-                </a:solidFill>
-                <a:latin typeface="Lexend"/>
-              </a:rPr>
-              <a:t>2.   At 1 cm : 50 km, 3 cm on the map is how many km?</a:t>
-            </a:r>
-          </a:p>
-        </p:txBody>
-      </p:sp>
-      <p:sp>
-        <p:nvSpPr>
-          <p:cNvPr id="10" name="TextBox 9"/>
-          <p:cNvSpPr txBox="1"/>
-          <p:nvPr/>
-        </p:nvSpPr>
-        <p:spPr>
-          <a:xfrm>
-            <a:off x="1874519" y="2665476"/>
-            <a:ext cx="2930351" cy="457200"/>
-          </a:xfrm>
-          <a:prstGeom prst="rect">
-            <a:avLst/>
-          </a:prstGeom>
-          <a:noFill/>
-        </p:spPr>
-        <p:txBody>
-          <a:bodyPr wrap="none" lIns="45720" rIns="45720" tIns="18288" bIns="18288" anchor="ctr">
-            <a:noAutofit/>
-          </a:bodyPr>
-          <a:lstStyle/>
-          <a:p>
-            <a:pPr algn="l"/>
-            <a:r>
-              <a:rPr sz="2180" b="0" i="0">
-                <a:solidFill>
-                  <a:srgbClr val="1A1A1A"/>
-                </a:solidFill>
-                <a:latin typeface="Lexend"/>
-              </a:rPr>
-              <a:t>3.   Find the value:  </a:t>
+              <a:t>1.   </a:t>
             </a:r>
           </a:p>
         </p:txBody>
       </p:sp>
       <p:pic>
         <p:nvPicPr>
-          <p:cNvPr id="11" name="Picture 10" descr="278b168b184c0a71.png"/>
+          <p:cNvPr id="9" name="Picture 8" descr="d7de33d50f52caf2.png"/>
           <p:cNvPicPr>
             <a:picLocks noChangeAspect="1"/>
           </p:cNvPicPr>
@@ -7133,7 +7546,195 @@
         </p:blipFill>
         <p:spPr>
           <a:xfrm>
-            <a:off x="4667711" y="2781300"/>
+            <a:off x="2408921" y="1546669"/>
+            <a:ext cx="1965960" cy="304800"/>
+          </a:xfrm>
+          <a:prstGeom prst="rect">
+            <a:avLst/>
+          </a:prstGeom>
+        </p:spPr>
+      </p:pic>
+      <p:sp>
+        <p:nvSpPr>
+          <p:cNvPr id="10" name="TextBox 9"/>
+          <p:cNvSpPr txBox="1"/>
+          <p:nvPr/>
+        </p:nvSpPr>
+        <p:spPr>
+          <a:xfrm>
+            <a:off x="4374881" y="1440180"/>
+            <a:ext cx="4161532" cy="457200"/>
+          </a:xfrm>
+          <a:prstGeom prst="rect">
+            <a:avLst/>
+          </a:prstGeom>
+          <a:noFill/>
+        </p:spPr>
+        <p:txBody>
+          <a:bodyPr wrap="none" lIns="45720" rIns="45720" tIns="18288" bIns="18288" anchor="ctr">
+            <a:noAutofit/>
+          </a:bodyPr>
+          <a:lstStyle/>
+          <a:p>
+            <a:pPr algn="l"/>
+            <a:r>
+              <a:rPr sz="2180" b="0" i="0">
+                <a:solidFill>
+                  <a:srgbClr val="1A1A1A"/>
+                </a:solidFill>
+                <a:latin typeface="Lexend"/>
+              </a:rPr>
+              <a:t>. How many pounds is 4 kg?</a:t>
+            </a:r>
+          </a:p>
+        </p:txBody>
+      </p:sp>
+      <p:sp>
+        <p:nvSpPr>
+          <p:cNvPr id="11" name="TextBox 10"/>
+          <p:cNvSpPr txBox="1"/>
+          <p:nvPr/>
+        </p:nvSpPr>
+        <p:spPr>
+          <a:xfrm>
+            <a:off x="1874519" y="2052828"/>
+            <a:ext cx="1085502" cy="457200"/>
+          </a:xfrm>
+          <a:prstGeom prst="rect">
+            <a:avLst/>
+          </a:prstGeom>
+          <a:noFill/>
+        </p:spPr>
+        <p:txBody>
+          <a:bodyPr wrap="none" lIns="45720" rIns="45720" tIns="18288" bIns="18288" anchor="ctr">
+            <a:noAutofit/>
+          </a:bodyPr>
+          <a:lstStyle/>
+          <a:p>
+            <a:pPr algn="l"/>
+            <a:r>
+              <a:rPr sz="2180" b="0" i="0">
+                <a:solidFill>
+                  <a:srgbClr val="1A1A1A"/>
+                </a:solidFill>
+                <a:latin typeface="Lexend"/>
+              </a:rPr>
+              <a:t>2.   At </a:t>
+            </a:r>
+          </a:p>
+        </p:txBody>
+      </p:sp>
+      <p:pic>
+        <p:nvPicPr>
+          <p:cNvPr id="12" name="Picture 11" descr="f4514319604e2a5c.png"/>
+          <p:cNvPicPr>
+            <a:picLocks noChangeAspect="1"/>
+          </p:cNvPicPr>
+          <p:nvPr/>
+        </p:nvPicPr>
+        <p:blipFill>
+          <a:blip r:embed="rId3"/>
+          <a:stretch>
+            <a:fillRect/>
+          </a:stretch>
+        </p:blipFill>
+        <p:spPr>
+          <a:xfrm>
+            <a:off x="2822862" y="2162365"/>
+            <a:ext cx="1685544" cy="234696"/>
+          </a:xfrm>
+          <a:prstGeom prst="rect">
+            <a:avLst/>
+          </a:prstGeom>
+        </p:spPr>
+      </p:pic>
+      <p:sp>
+        <p:nvSpPr>
+          <p:cNvPr id="13" name="TextBox 12"/>
+          <p:cNvSpPr txBox="1"/>
+          <p:nvPr/>
+        </p:nvSpPr>
+        <p:spPr>
+          <a:xfrm>
+            <a:off x="4508406" y="2052828"/>
+            <a:ext cx="5270819" cy="457200"/>
+          </a:xfrm>
+          <a:prstGeom prst="rect">
+            <a:avLst/>
+          </a:prstGeom>
+          <a:noFill/>
+        </p:spPr>
+        <p:txBody>
+          <a:bodyPr wrap="none" lIns="45720" rIns="45720" tIns="18288" bIns="18288" anchor="ctr">
+            <a:noAutofit/>
+          </a:bodyPr>
+          <a:lstStyle/>
+          <a:p>
+            <a:pPr algn="l"/>
+            <a:r>
+              <a:rPr sz="2180" b="0" i="0">
+                <a:solidFill>
+                  <a:srgbClr val="1A1A1A"/>
+                </a:solidFill>
+                <a:latin typeface="Lexend"/>
+              </a:rPr>
+              <a:t>, 3 cm on the map is how many km?</a:t>
+            </a:r>
+          </a:p>
+        </p:txBody>
+      </p:sp>
+      <p:sp>
+        <p:nvSpPr>
+          <p:cNvPr id="14" name="TextBox 13"/>
+          <p:cNvSpPr txBox="1"/>
+          <p:nvPr/>
+        </p:nvSpPr>
+        <p:spPr>
+          <a:xfrm>
+            <a:off x="1874519" y="2665476"/>
+            <a:ext cx="2930351" cy="457200"/>
+          </a:xfrm>
+          <a:prstGeom prst="rect">
+            <a:avLst/>
+          </a:prstGeom>
+          <a:noFill/>
+        </p:spPr>
+        <p:txBody>
+          <a:bodyPr wrap="none" lIns="45720" rIns="45720" tIns="18288" bIns="18288" anchor="ctr">
+            <a:noAutofit/>
+          </a:bodyPr>
+          <a:lstStyle/>
+          <a:p>
+            <a:pPr algn="l"/>
+            <a:r>
+              <a:rPr sz="2180" b="0" i="0">
+                <a:solidFill>
+                  <a:srgbClr val="1A1A1A"/>
+                </a:solidFill>
+                <a:latin typeface="Lexend"/>
+              </a:rPr>
+              <a:t>3.   Find the value:  </a:t>
+            </a:r>
+          </a:p>
+        </p:txBody>
+      </p:sp>
+      <p:pic>
+        <p:nvPicPr>
+          <p:cNvPr id="15" name="Picture 14" descr="278b168b184c0a71.png"/>
+          <p:cNvPicPr>
+            <a:picLocks noChangeAspect="1"/>
+          </p:cNvPicPr>
+          <p:nvPr/>
+        </p:nvPicPr>
+        <p:blipFill>
+          <a:blip r:embed="rId4"/>
+          <a:stretch>
+            <a:fillRect/>
+          </a:stretch>
+        </p:blipFill>
+        <p:spPr>
+          <a:xfrm>
+            <a:off x="4667711" y="2784157"/>
             <a:ext cx="1536192" cy="225552"/>
           </a:xfrm>
           <a:prstGeom prst="rect">
@@ -7143,7 +7744,7 @@
       </p:pic>
       <p:sp>
         <p:nvSpPr>
-          <p:cNvPr id="12" name="TextBox 11"/>
+          <p:cNvPr id="16" name="TextBox 15"/>
           <p:cNvSpPr txBox="1"/>
           <p:nvPr/>
         </p:nvSpPr>
@@ -7823,7 +8424,7 @@
         </p:blipFill>
         <p:spPr>
           <a:xfrm>
-            <a:off x="3869435" y="3578683"/>
+            <a:off x="3869435" y="3594875"/>
             <a:ext cx="4532376" cy="256032"/>
           </a:xfrm>
           <a:prstGeom prst="rect">
@@ -8215,7 +8816,7 @@
         </p:blipFill>
         <p:spPr>
           <a:xfrm>
-            <a:off x="2258568" y="4017197"/>
+            <a:off x="2258568" y="3994337"/>
             <a:ext cx="182880" cy="274320"/>
           </a:xfrm>
           <a:prstGeom prst="rect">
@@ -8274,7 +8875,7 @@
         </p:blipFill>
         <p:spPr>
           <a:xfrm>
-            <a:off x="7104888" y="4017197"/>
+            <a:off x="7104888" y="3997385"/>
             <a:ext cx="384048" cy="274320"/>
           </a:xfrm>
           <a:prstGeom prst="rect">
@@ -8333,7 +8934,7 @@
         </p:blipFill>
         <p:spPr>
           <a:xfrm>
-            <a:off x="2258568" y="4628321"/>
+            <a:off x="2258568" y="4606985"/>
             <a:ext cx="390144" cy="277368"/>
           </a:xfrm>
           <a:prstGeom prst="rect">
@@ -8392,7 +8993,7 @@
         </p:blipFill>
         <p:spPr>
           <a:xfrm>
-            <a:off x="7104888" y="4629845"/>
+            <a:off x="7104888" y="4613081"/>
             <a:ext cx="185928" cy="274320"/>
           </a:xfrm>
           <a:prstGeom prst="rect">
@@ -8749,7 +9350,7 @@
         </p:blipFill>
         <p:spPr>
           <a:xfrm>
-            <a:off x="4130039" y="3962333"/>
+            <a:off x="4130039" y="3994337"/>
             <a:ext cx="4014215" cy="347472"/>
           </a:xfrm>
           <a:prstGeom prst="rect">
@@ -8773,7 +9374,7 @@
         </p:blipFill>
         <p:spPr>
           <a:xfrm>
-            <a:off x="4130039" y="4542977"/>
+            <a:off x="4130039" y="4554598"/>
             <a:ext cx="3986784" cy="265176"/>
           </a:xfrm>
           <a:prstGeom prst="rect">
@@ -9463,7 +10064,7 @@
         </p:blipFill>
         <p:spPr>
           <a:xfrm>
-            <a:off x="3578352" y="3120356"/>
+            <a:off x="3578352" y="3165505"/>
             <a:ext cx="5114544" cy="313944"/>
           </a:xfrm>
           <a:prstGeom prst="rect">
@@ -9734,25 +10335,49 @@
           </a:p>
         </p:txBody>
       </p:sp>
-      <p:sp>
-        <p:nvSpPr>
-          <p:cNvPr id="8" name="TextBox 7"/>
-          <p:cNvSpPr txBox="1"/>
-          <p:nvPr/>
-        </p:nvSpPr>
-        <p:spPr>
-          <a:xfrm>
-            <a:off x="1234440" y="1874519"/>
-            <a:ext cx="10058400" cy="858740"/>
-          </a:xfrm>
-          <a:prstGeom prst="rect">
-            <a:avLst/>
-          </a:prstGeom>
-          <a:noFill/>
-        </p:spPr>
-        <p:txBody>
-          <a:bodyPr wrap="square" lIns="45720" rIns="45720" tIns="18288" bIns="18288" anchor="t">
-            <a:spAutoFit/>
+      <p:pic>
+        <p:nvPicPr>
+          <p:cNvPr id="8" name="Picture 7" descr="673c0080fbe2317f.png"/>
+          <p:cNvPicPr>
+            <a:picLocks noChangeAspect="1"/>
+          </p:cNvPicPr>
+          <p:nvPr/>
+        </p:nvPicPr>
+        <p:blipFill>
+          <a:blip r:embed="rId2"/>
+          <a:stretch>
+            <a:fillRect/>
+          </a:stretch>
+        </p:blipFill>
+        <p:spPr>
+          <a:xfrm>
+            <a:off x="1234440" y="1956815"/>
+            <a:ext cx="1901952" cy="243840"/>
+          </a:xfrm>
+          <a:prstGeom prst="rect">
+            <a:avLst/>
+          </a:prstGeom>
+        </p:spPr>
+      </p:pic>
+      <p:sp>
+        <p:nvSpPr>
+          <p:cNvPr id="9" name="TextBox 8"/>
+          <p:cNvSpPr txBox="1"/>
+          <p:nvPr/>
+        </p:nvSpPr>
+        <p:spPr>
+          <a:xfrm>
+            <a:off x="3136392" y="1851660"/>
+            <a:ext cx="280301" cy="457200"/>
+          </a:xfrm>
+          <a:prstGeom prst="rect">
+            <a:avLst/>
+          </a:prstGeom>
+          <a:noFill/>
+        </p:spPr>
+        <p:txBody>
+          <a:bodyPr wrap="none" lIns="45720" rIns="45720" tIns="18288" bIns="18288" anchor="ctr">
+            <a:noAutofit/>
           </a:bodyPr>
           <a:lstStyle/>
           <a:p>
@@ -9764,20 +10389,20 @@
                 </a:solidFill>
                 <a:latin typeface="Lexend"/>
               </a:rPr>
-              <a:t>1 mi = 1.61 km. Cyclist A rides 12 km in 50 min; cyclist B rides 7 mi in 45 min.</a:t>
-            </a:r>
-          </a:p>
-        </p:txBody>
-      </p:sp>
-      <p:sp>
-        <p:nvSpPr>
-          <p:cNvPr id="9" name="TextBox 8"/>
-          <p:cNvSpPr txBox="1"/>
-          <p:nvPr/>
-        </p:nvSpPr>
-        <p:spPr>
-          <a:xfrm>
-            <a:off x="1234440" y="2842988"/>
+              <a:t>.</a:t>
+            </a:r>
+          </a:p>
+        </p:txBody>
+      </p:sp>
+      <p:sp>
+        <p:nvSpPr>
+          <p:cNvPr id="10" name="TextBox 9"/>
+          <p:cNvSpPr txBox="1"/>
+          <p:nvPr/>
+        </p:nvSpPr>
+        <p:spPr>
+          <a:xfrm>
+            <a:off x="1234440" y="2487168"/>
             <a:ext cx="10058400" cy="429370"/>
           </a:xfrm>
           <a:prstGeom prst="rect">
@@ -9793,6 +10418,41 @@
           <a:p>
             <a:pPr algn="l"/>
             <a:r>
+              <a:rPr sz="2280" b="0" i="0">
+                <a:solidFill>
+                  <a:srgbClr val="1A1A1A"/>
+                </a:solidFill>
+                <a:latin typeface="Lexend"/>
+              </a:rPr>
+              <a:t>Cyclist A rides 12 km in 50 min; cyclist B rides 7 mi in 45 min.</a:t>
+            </a:r>
+          </a:p>
+        </p:txBody>
+      </p:sp>
+      <p:sp>
+        <p:nvSpPr>
+          <p:cNvPr id="11" name="TextBox 10"/>
+          <p:cNvSpPr txBox="1"/>
+          <p:nvPr/>
+        </p:nvSpPr>
+        <p:spPr>
+          <a:xfrm>
+            <a:off x="1234440" y="3026266"/>
+            <a:ext cx="10058400" cy="429370"/>
+          </a:xfrm>
+          <a:prstGeom prst="rect">
+            <a:avLst/>
+          </a:prstGeom>
+          <a:noFill/>
+        </p:spPr>
+        <p:txBody>
+          <a:bodyPr wrap="square" lIns="45720" rIns="45720" tIns="18288" bIns="18288" anchor="t">
+            <a:spAutoFit/>
+          </a:bodyPr>
+          <a:lstStyle/>
+          <a:p>
+            <a:pPr algn="l"/>
+            <a:r>
               <a:rPr sz="2280" b="1" i="0">
                 <a:solidFill>
                   <a:srgbClr val="1A1A1A"/>
@@ -9806,13 +10466,13 @@
       </p:sp>
       <p:sp>
         <p:nvSpPr>
-          <p:cNvPr id="10" name="TextBox 9"/>
-          <p:cNvSpPr txBox="1"/>
-          <p:nvPr/>
-        </p:nvSpPr>
-        <p:spPr>
-          <a:xfrm>
-            <a:off x="1874519" y="3519247"/>
+          <p:cNvPr id="12" name="TextBox 11"/>
+          <p:cNvSpPr txBox="1"/>
+          <p:nvPr/>
+        </p:nvSpPr>
+        <p:spPr>
+          <a:xfrm>
+            <a:off x="1874519" y="3702524"/>
             <a:ext cx="4572000" cy="548640"/>
           </a:xfrm>
           <a:prstGeom prst="rect">
@@ -9850,13 +10510,13 @@
       </p:sp>
       <p:sp>
         <p:nvSpPr>
-          <p:cNvPr id="11" name="TextBox 10"/>
-          <p:cNvSpPr txBox="1"/>
-          <p:nvPr/>
-        </p:nvSpPr>
-        <p:spPr>
-          <a:xfrm>
-            <a:off x="6629400" y="3519247"/>
+          <p:cNvPr id="13" name="TextBox 12"/>
+          <p:cNvSpPr txBox="1"/>
+          <p:nvPr/>
+        </p:nvSpPr>
+        <p:spPr>
+          <a:xfrm>
+            <a:off x="6629400" y="3702524"/>
             <a:ext cx="4572000" cy="548640"/>
           </a:xfrm>
           <a:prstGeom prst="rect">
@@ -9894,13 +10554,13 @@
       </p:sp>
       <p:sp>
         <p:nvSpPr>
-          <p:cNvPr id="12" name="TextBox 11"/>
-          <p:cNvSpPr txBox="1"/>
-          <p:nvPr/>
-        </p:nvSpPr>
-        <p:spPr>
-          <a:xfrm>
-            <a:off x="1874519" y="4205047"/>
+          <p:cNvPr id="14" name="TextBox 13"/>
+          <p:cNvSpPr txBox="1"/>
+          <p:nvPr/>
+        </p:nvSpPr>
+        <p:spPr>
+          <a:xfrm>
+            <a:off x="1874519" y="4388324"/>
             <a:ext cx="4572000" cy="548640"/>
           </a:xfrm>
           <a:prstGeom prst="rect">
@@ -9938,13 +10598,13 @@
       </p:sp>
       <p:sp>
         <p:nvSpPr>
-          <p:cNvPr id="13" name="TextBox 12"/>
-          <p:cNvSpPr txBox="1"/>
-          <p:nvPr/>
-        </p:nvSpPr>
-        <p:spPr>
-          <a:xfrm>
-            <a:off x="6629400" y="4205047"/>
+          <p:cNvPr id="15" name="TextBox 14"/>
+          <p:cNvSpPr txBox="1"/>
+          <p:nvPr/>
+        </p:nvSpPr>
+        <p:spPr>
+          <a:xfrm>
+            <a:off x="6629400" y="4388324"/>
             <a:ext cx="4572000" cy="548640"/>
           </a:xfrm>
           <a:prstGeom prst="rect">
@@ -9982,13 +10642,13 @@
       </p:sp>
       <p:sp>
         <p:nvSpPr>
-          <p:cNvPr id="14" name="TextBox 13"/>
-          <p:cNvSpPr txBox="1"/>
-          <p:nvPr/>
-        </p:nvSpPr>
-        <p:spPr>
-          <a:xfrm>
-            <a:off x="777240" y="5210887"/>
+          <p:cNvPr id="16" name="TextBox 15"/>
+          <p:cNvSpPr txBox="1"/>
+          <p:nvPr/>
+        </p:nvSpPr>
+        <p:spPr>
+          <a:xfrm>
+            <a:off x="777240" y="5394164"/>
             <a:ext cx="10607040" cy="457200"/>
           </a:xfrm>
           <a:prstGeom prst="rect">
@@ -10243,79 +10903,9 @@
           </a:p>
         </p:txBody>
       </p:sp>
-      <p:sp>
-        <p:nvSpPr>
-          <p:cNvPr id="8" name="TextBox 7"/>
-          <p:cNvSpPr txBox="1"/>
-          <p:nvPr/>
-        </p:nvSpPr>
-        <p:spPr>
-          <a:xfrm>
-            <a:off x="1234440" y="1874519"/>
-            <a:ext cx="10058400" cy="858740"/>
-          </a:xfrm>
-          <a:prstGeom prst="rect">
-            <a:avLst/>
-          </a:prstGeom>
-          <a:noFill/>
-        </p:spPr>
-        <p:txBody>
-          <a:bodyPr wrap="square" lIns="45720" rIns="45720" tIns="18288" bIns="18288" anchor="t">
-            <a:spAutoFit/>
-          </a:bodyPr>
-          <a:lstStyle/>
-          <a:p>
-            <a:pPr algn="l"/>
-            <a:r>
-              <a:rPr sz="2280" b="0" i="0">
-                <a:solidFill>
-                  <a:srgbClr val="1A1A1A"/>
-                </a:solidFill>
-                <a:latin typeface="Lexend"/>
-              </a:rPr>
-              <a:t>1 mi = 1.61 km. Cyclist A rides 12 km in 50 min; cyclist B rides 7 mi in 45 min.</a:t>
-            </a:r>
-          </a:p>
-        </p:txBody>
-      </p:sp>
-      <p:sp>
-        <p:nvSpPr>
-          <p:cNvPr id="9" name="TextBox 8"/>
-          <p:cNvSpPr txBox="1"/>
-          <p:nvPr/>
-        </p:nvSpPr>
-        <p:spPr>
-          <a:xfrm>
-            <a:off x="1234440" y="2842988"/>
-            <a:ext cx="10058400" cy="429370"/>
-          </a:xfrm>
-          <a:prstGeom prst="rect">
-            <a:avLst/>
-          </a:prstGeom>
-          <a:noFill/>
-        </p:spPr>
-        <p:txBody>
-          <a:bodyPr wrap="square" lIns="45720" rIns="45720" tIns="18288" bIns="18288" anchor="t">
-            <a:spAutoFit/>
-          </a:bodyPr>
-          <a:lstStyle/>
-          <a:p>
-            <a:pPr algn="l"/>
-            <a:r>
-              <a:rPr sz="2280" b="1" i="0">
-                <a:solidFill>
-                  <a:srgbClr val="1A1A1A"/>
-                </a:solidFill>
-                <a:latin typeface="Lexend"/>
-              </a:rPr>
-              <a:t>Who is faster?</a:t>
-            </a:r>
-          </a:p>
-        </p:txBody>
-      </p:sp>
       <p:pic>
         <p:nvPicPr>
-          <p:cNvPr id="10" name="Picture 9" descr="506f303710cd3d34.png"/>
+          <p:cNvPr id="8" name="Picture 7" descr="e62e96f3d6ecb8f1.png"/>
           <p:cNvPicPr>
             <a:picLocks noChangeAspect="1"/>
           </p:cNvPicPr>
@@ -10329,17 +10919,122 @@
         </p:blipFill>
         <p:spPr>
           <a:xfrm>
-            <a:off x="2382011" y="3500959"/>
-            <a:ext cx="6062472" cy="606552"/>
+            <a:off x="1234440" y="1956815"/>
+            <a:ext cx="1901952" cy="243840"/>
           </a:xfrm>
           <a:prstGeom prst="rect">
             <a:avLst/>
           </a:prstGeom>
         </p:spPr>
       </p:pic>
+      <p:sp>
+        <p:nvSpPr>
+          <p:cNvPr id="9" name="TextBox 8"/>
+          <p:cNvSpPr txBox="1"/>
+          <p:nvPr/>
+        </p:nvSpPr>
+        <p:spPr>
+          <a:xfrm>
+            <a:off x="3136392" y="1851660"/>
+            <a:ext cx="280301" cy="457200"/>
+          </a:xfrm>
+          <a:prstGeom prst="rect">
+            <a:avLst/>
+          </a:prstGeom>
+          <a:noFill/>
+        </p:spPr>
+        <p:txBody>
+          <a:bodyPr wrap="none" lIns="45720" rIns="45720" tIns="18288" bIns="18288" anchor="ctr">
+            <a:noAutofit/>
+          </a:bodyPr>
+          <a:lstStyle/>
+          <a:p>
+            <a:pPr algn="l"/>
+            <a:r>
+              <a:rPr sz="2280" b="0" i="0">
+                <a:solidFill>
+                  <a:srgbClr val="1A1A1A"/>
+                </a:solidFill>
+                <a:latin typeface="Lexend"/>
+              </a:rPr>
+              <a:t>.</a:t>
+            </a:r>
+          </a:p>
+        </p:txBody>
+      </p:sp>
+      <p:sp>
+        <p:nvSpPr>
+          <p:cNvPr id="10" name="TextBox 9"/>
+          <p:cNvSpPr txBox="1"/>
+          <p:nvPr/>
+        </p:nvSpPr>
+        <p:spPr>
+          <a:xfrm>
+            <a:off x="1234440" y="2487168"/>
+            <a:ext cx="10058400" cy="429370"/>
+          </a:xfrm>
+          <a:prstGeom prst="rect">
+            <a:avLst/>
+          </a:prstGeom>
+          <a:noFill/>
+        </p:spPr>
+        <p:txBody>
+          <a:bodyPr wrap="square" lIns="45720" rIns="45720" tIns="18288" bIns="18288" anchor="t">
+            <a:spAutoFit/>
+          </a:bodyPr>
+          <a:lstStyle/>
+          <a:p>
+            <a:pPr algn="l"/>
+            <a:r>
+              <a:rPr sz="2280" b="0" i="0">
+                <a:solidFill>
+                  <a:srgbClr val="1A1A1A"/>
+                </a:solidFill>
+                <a:latin typeface="Lexend"/>
+              </a:rPr>
+              <a:t>Cyclist A rides 12 km in 50 min; cyclist B rides 7 mi in 45 min.</a:t>
+            </a:r>
+          </a:p>
+        </p:txBody>
+      </p:sp>
+      <p:sp>
+        <p:nvSpPr>
+          <p:cNvPr id="11" name="TextBox 10"/>
+          <p:cNvSpPr txBox="1"/>
+          <p:nvPr/>
+        </p:nvSpPr>
+        <p:spPr>
+          <a:xfrm>
+            <a:off x="1234440" y="3026266"/>
+            <a:ext cx="10058400" cy="429370"/>
+          </a:xfrm>
+          <a:prstGeom prst="rect">
+            <a:avLst/>
+          </a:prstGeom>
+          <a:noFill/>
+        </p:spPr>
+        <p:txBody>
+          <a:bodyPr wrap="square" lIns="45720" rIns="45720" tIns="18288" bIns="18288" anchor="t">
+            <a:spAutoFit/>
+          </a:bodyPr>
+          <a:lstStyle/>
+          <a:p>
+            <a:pPr algn="l"/>
+            <a:r>
+              <a:rPr sz="2280" b="1" i="0">
+                <a:solidFill>
+                  <a:srgbClr val="1A1A1A"/>
+                </a:solidFill>
+                <a:latin typeface="Lexend"/>
+              </a:rPr>
+              <a:t>Who is faster?</a:t>
+            </a:r>
+          </a:p>
+        </p:txBody>
+      </p:sp>
       <p:pic>
         <p:nvPicPr>
-          <p:cNvPr id="11" name="Picture 10" descr="c13e104580267840.png"/>
+          <p:cNvPr id="12" name="Picture 11" descr="506f303710cd3d34.png"/>
           <p:cNvPicPr>
             <a:picLocks noChangeAspect="1"/>
           </p:cNvPicPr>
@@ -10353,7 +11048,31 @@
         </p:blipFill>
         <p:spPr>
           <a:xfrm>
-            <a:off x="2382011" y="4235527"/>
+            <a:off x="2382011" y="3684236"/>
+            <a:ext cx="6062472" cy="606552"/>
+          </a:xfrm>
+          <a:prstGeom prst="rect">
+            <a:avLst/>
+          </a:prstGeom>
+        </p:spPr>
+      </p:pic>
+      <p:pic>
+        <p:nvPicPr>
+          <p:cNvPr id="13" name="Picture 12" descr="c13e104580267840.png"/>
+          <p:cNvPicPr>
+            <a:picLocks noChangeAspect="1"/>
+          </p:cNvPicPr>
+          <p:nvPr/>
+        </p:nvPicPr>
+        <p:blipFill>
+          <a:blip r:embed="rId4"/>
+          <a:stretch>
+            <a:fillRect/>
+          </a:stretch>
+        </p:blipFill>
+        <p:spPr>
+          <a:xfrm>
+            <a:off x="2382011" y="4418804"/>
             <a:ext cx="7510272" cy="603504"/>
           </a:xfrm>
           <a:prstGeom prst="rect">
@@ -10363,13 +11082,13 @@
       </p:pic>
       <p:sp>
         <p:nvSpPr>
-          <p:cNvPr id="12" name="TextBox 11"/>
-          <p:cNvSpPr txBox="1"/>
-          <p:nvPr/>
-        </p:nvSpPr>
-        <p:spPr>
-          <a:xfrm>
-            <a:off x="777240" y="4976191"/>
+          <p:cNvPr id="14" name="TextBox 13"/>
+          <p:cNvSpPr txBox="1"/>
+          <p:nvPr/>
+        </p:nvSpPr>
+        <p:spPr>
+          <a:xfrm>
+            <a:off x="777240" y="5159468"/>
             <a:ext cx="10607040" cy="548640"/>
           </a:xfrm>
           <a:prstGeom prst="rect">
@@ -10632,17 +11351,17 @@
         </p:nvSpPr>
         <p:spPr>
           <a:xfrm>
-            <a:off x="1234440" y="1874519"/>
-            <a:ext cx="10058400" cy="858740"/>
-          </a:xfrm>
-          <a:prstGeom prst="rect">
-            <a:avLst/>
-          </a:prstGeom>
-          <a:noFill/>
-        </p:spPr>
-        <p:txBody>
-          <a:bodyPr wrap="square" lIns="45720" rIns="45720" tIns="18288" bIns="18288" anchor="t">
-            <a:spAutoFit/>
+            <a:off x="1234440" y="1851660"/>
+            <a:ext cx="5322424" cy="457200"/>
+          </a:xfrm>
+          <a:prstGeom prst="rect">
+            <a:avLst/>
+          </a:prstGeom>
+          <a:noFill/>
+        </p:spPr>
+        <p:txBody>
+          <a:bodyPr wrap="none" lIns="45720" rIns="45720" tIns="18288" bIns="18288" anchor="ctr">
+            <a:noAutofit/>
           </a:bodyPr>
           <a:lstStyle/>
           <a:p>
@@ -10654,20 +11373,79 @@
                 </a:solidFill>
                 <a:latin typeface="Lexend"/>
               </a:rPr>
-              <a:t>Paint is mixed white : blue : grey = 2 : 4 : 5. A batch uses 8 gal of white.</a:t>
-            </a:r>
-          </a:p>
-        </p:txBody>
-      </p:sp>
-      <p:sp>
-        <p:nvSpPr>
-          <p:cNvPr id="9" name="TextBox 8"/>
-          <p:cNvSpPr txBox="1"/>
-          <p:nvPr/>
-        </p:nvSpPr>
-        <p:spPr>
-          <a:xfrm>
-            <a:off x="1234440" y="2842988"/>
+              <a:t>Paint is mixed white : blue : grey = </a:t>
+            </a:r>
+          </a:p>
+        </p:txBody>
+      </p:sp>
+      <p:pic>
+        <p:nvPicPr>
+          <p:cNvPr id="9" name="Picture 8" descr="36303ebf85e26cd1.png"/>
+          <p:cNvPicPr>
+            <a:picLocks noChangeAspect="1"/>
+          </p:cNvPicPr>
+          <p:nvPr/>
+        </p:nvPicPr>
+        <p:blipFill>
+          <a:blip r:embed="rId2"/>
+          <a:stretch>
+            <a:fillRect/>
+          </a:stretch>
+        </p:blipFill>
+        <p:spPr>
+          <a:xfrm>
+            <a:off x="6419704" y="1975103"/>
+            <a:ext cx="883920" cy="225552"/>
+          </a:xfrm>
+          <a:prstGeom prst="rect">
+            <a:avLst/>
+          </a:prstGeom>
+        </p:spPr>
+      </p:pic>
+      <p:sp>
+        <p:nvSpPr>
+          <p:cNvPr id="10" name="TextBox 9"/>
+          <p:cNvSpPr txBox="1"/>
+          <p:nvPr/>
+        </p:nvSpPr>
+        <p:spPr>
+          <a:xfrm>
+            <a:off x="7303624" y="1851660"/>
+            <a:ext cx="280301" cy="457200"/>
+          </a:xfrm>
+          <a:prstGeom prst="rect">
+            <a:avLst/>
+          </a:prstGeom>
+          <a:noFill/>
+        </p:spPr>
+        <p:txBody>
+          <a:bodyPr wrap="none" lIns="45720" rIns="45720" tIns="18288" bIns="18288" anchor="ctr">
+            <a:noAutofit/>
+          </a:bodyPr>
+          <a:lstStyle/>
+          <a:p>
+            <a:pPr algn="l"/>
+            <a:r>
+              <a:rPr sz="2280" b="0" i="0">
+                <a:solidFill>
+                  <a:srgbClr val="1A1A1A"/>
+                </a:solidFill>
+                <a:latin typeface="Lexend"/>
+              </a:rPr>
+              <a:t>.</a:t>
+            </a:r>
+          </a:p>
+        </p:txBody>
+      </p:sp>
+      <p:sp>
+        <p:nvSpPr>
+          <p:cNvPr id="11" name="TextBox 10"/>
+          <p:cNvSpPr txBox="1"/>
+          <p:nvPr/>
+        </p:nvSpPr>
+        <p:spPr>
+          <a:xfrm>
+            <a:off x="1234440" y="2487168"/>
             <a:ext cx="10058400" cy="429370"/>
           </a:xfrm>
           <a:prstGeom prst="rect">
@@ -10683,6 +11461,41 @@
           <a:p>
             <a:pPr algn="l"/>
             <a:r>
+              <a:rPr sz="2280" b="0" i="0">
+                <a:solidFill>
+                  <a:srgbClr val="1A1A1A"/>
+                </a:solidFill>
+                <a:latin typeface="Lexend"/>
+              </a:rPr>
+              <a:t>A batch uses 8 gal of white.</a:t>
+            </a:r>
+          </a:p>
+        </p:txBody>
+      </p:sp>
+      <p:sp>
+        <p:nvSpPr>
+          <p:cNvPr id="12" name="TextBox 11"/>
+          <p:cNvSpPr txBox="1"/>
+          <p:nvPr/>
+        </p:nvSpPr>
+        <p:spPr>
+          <a:xfrm>
+            <a:off x="1234440" y="3026266"/>
+            <a:ext cx="10058400" cy="429370"/>
+          </a:xfrm>
+          <a:prstGeom prst="rect">
+            <a:avLst/>
+          </a:prstGeom>
+          <a:noFill/>
+        </p:spPr>
+        <p:txBody>
+          <a:bodyPr wrap="square" lIns="45720" rIns="45720" tIns="18288" bIns="18288" anchor="t">
+            <a:spAutoFit/>
+          </a:bodyPr>
+          <a:lstStyle/>
+          <a:p>
+            <a:pPr algn="l"/>
+            <a:r>
               <a:rPr sz="2280" b="1" i="0">
                 <a:solidFill>
                   <a:srgbClr val="1A1A1A"/>
@@ -10696,7 +11509,7 @@
       </p:sp>
       <p:sp>
         <p:nvSpPr>
-          <p:cNvPr id="10" name="TextBox 9"/>
+          <p:cNvPr id="13" name="TextBox 12"/>
           <p:cNvSpPr txBox="1"/>
           <p:nvPr/>
         </p:nvSpPr>
@@ -10965,17 +11778,17 @@
         </p:nvSpPr>
         <p:spPr>
           <a:xfrm>
-            <a:off x="1234440" y="1874519"/>
-            <a:ext cx="10058400" cy="858740"/>
-          </a:xfrm>
-          <a:prstGeom prst="rect">
-            <a:avLst/>
-          </a:prstGeom>
-          <a:noFill/>
-        </p:spPr>
-        <p:txBody>
-          <a:bodyPr wrap="square" lIns="45720" rIns="45720" tIns="18288" bIns="18288" anchor="t">
-            <a:spAutoFit/>
+            <a:off x="1234440" y="1851660"/>
+            <a:ext cx="5322424" cy="457200"/>
+          </a:xfrm>
+          <a:prstGeom prst="rect">
+            <a:avLst/>
+          </a:prstGeom>
+          <a:noFill/>
+        </p:spPr>
+        <p:txBody>
+          <a:bodyPr wrap="none" lIns="45720" rIns="45720" tIns="18288" bIns="18288" anchor="ctr">
+            <a:noAutofit/>
           </a:bodyPr>
           <a:lstStyle/>
           <a:p>
@@ -10987,49 +11800,14 @@
                 </a:solidFill>
                 <a:latin typeface="Lexend"/>
               </a:rPr>
-              <a:t>Paint is mixed white : blue : grey = 2 : 4 : 5. A batch uses 8 gal of white.</a:t>
-            </a:r>
-          </a:p>
-        </p:txBody>
-      </p:sp>
-      <p:sp>
-        <p:nvSpPr>
-          <p:cNvPr id="9" name="TextBox 8"/>
-          <p:cNvSpPr txBox="1"/>
-          <p:nvPr/>
-        </p:nvSpPr>
-        <p:spPr>
-          <a:xfrm>
-            <a:off x="1234440" y="2842988"/>
-            <a:ext cx="10058400" cy="429370"/>
-          </a:xfrm>
-          <a:prstGeom prst="rect">
-            <a:avLst/>
-          </a:prstGeom>
-          <a:noFill/>
-        </p:spPr>
-        <p:txBody>
-          <a:bodyPr wrap="square" lIns="45720" rIns="45720" tIns="18288" bIns="18288" anchor="t">
-            <a:spAutoFit/>
-          </a:bodyPr>
-          <a:lstStyle/>
-          <a:p>
-            <a:pPr algn="l"/>
-            <a:r>
-              <a:rPr sz="2280" b="1" i="0">
-                <a:solidFill>
-                  <a:srgbClr val="1A1A1A"/>
-                </a:solidFill>
-                <a:latin typeface="Lexend"/>
-              </a:rPr>
-              <a:t>How many gallons is the whole batch?</a:t>
+              <a:t>Paint is mixed white : blue : grey = </a:t>
             </a:r>
           </a:p>
         </p:txBody>
       </p:sp>
       <p:pic>
         <p:nvPicPr>
-          <p:cNvPr id="10" name="Picture 9" descr="d59191ca87bf000c.png"/>
+          <p:cNvPr id="9" name="Picture 8" descr="55a59dfed8072881.png"/>
           <p:cNvPicPr>
             <a:picLocks noChangeAspect="1"/>
           </p:cNvPicPr>
@@ -11043,17 +11821,122 @@
         </p:blipFill>
         <p:spPr>
           <a:xfrm>
-            <a:off x="3706367" y="3500959"/>
-            <a:ext cx="4861560" cy="609600"/>
+            <a:off x="6419704" y="1975103"/>
+            <a:ext cx="886968" cy="225552"/>
           </a:xfrm>
           <a:prstGeom prst="rect">
             <a:avLst/>
           </a:prstGeom>
         </p:spPr>
       </p:pic>
+      <p:sp>
+        <p:nvSpPr>
+          <p:cNvPr id="10" name="TextBox 9"/>
+          <p:cNvSpPr txBox="1"/>
+          <p:nvPr/>
+        </p:nvSpPr>
+        <p:spPr>
+          <a:xfrm>
+            <a:off x="7306672" y="1851660"/>
+            <a:ext cx="280301" cy="457200"/>
+          </a:xfrm>
+          <a:prstGeom prst="rect">
+            <a:avLst/>
+          </a:prstGeom>
+          <a:noFill/>
+        </p:spPr>
+        <p:txBody>
+          <a:bodyPr wrap="none" lIns="45720" rIns="45720" tIns="18288" bIns="18288" anchor="ctr">
+            <a:noAutofit/>
+          </a:bodyPr>
+          <a:lstStyle/>
+          <a:p>
+            <a:pPr algn="l"/>
+            <a:r>
+              <a:rPr sz="2280" b="0" i="0">
+                <a:solidFill>
+                  <a:srgbClr val="1A1A1A"/>
+                </a:solidFill>
+                <a:latin typeface="Lexend"/>
+              </a:rPr>
+              <a:t>.</a:t>
+            </a:r>
+          </a:p>
+        </p:txBody>
+      </p:sp>
+      <p:sp>
+        <p:nvSpPr>
+          <p:cNvPr id="11" name="TextBox 10"/>
+          <p:cNvSpPr txBox="1"/>
+          <p:nvPr/>
+        </p:nvSpPr>
+        <p:spPr>
+          <a:xfrm>
+            <a:off x="1234440" y="2487168"/>
+            <a:ext cx="10058400" cy="429370"/>
+          </a:xfrm>
+          <a:prstGeom prst="rect">
+            <a:avLst/>
+          </a:prstGeom>
+          <a:noFill/>
+        </p:spPr>
+        <p:txBody>
+          <a:bodyPr wrap="square" lIns="45720" rIns="45720" tIns="18288" bIns="18288" anchor="t">
+            <a:spAutoFit/>
+          </a:bodyPr>
+          <a:lstStyle/>
+          <a:p>
+            <a:pPr algn="l"/>
+            <a:r>
+              <a:rPr sz="2280" b="0" i="0">
+                <a:solidFill>
+                  <a:srgbClr val="1A1A1A"/>
+                </a:solidFill>
+                <a:latin typeface="Lexend"/>
+              </a:rPr>
+              <a:t>A batch uses 8 gal of white.</a:t>
+            </a:r>
+          </a:p>
+        </p:txBody>
+      </p:sp>
+      <p:sp>
+        <p:nvSpPr>
+          <p:cNvPr id="12" name="TextBox 11"/>
+          <p:cNvSpPr txBox="1"/>
+          <p:nvPr/>
+        </p:nvSpPr>
+        <p:spPr>
+          <a:xfrm>
+            <a:off x="1234440" y="3026266"/>
+            <a:ext cx="10058400" cy="429370"/>
+          </a:xfrm>
+          <a:prstGeom prst="rect">
+            <a:avLst/>
+          </a:prstGeom>
+          <a:noFill/>
+        </p:spPr>
+        <p:txBody>
+          <a:bodyPr wrap="square" lIns="45720" rIns="45720" tIns="18288" bIns="18288" anchor="t">
+            <a:spAutoFit/>
+          </a:bodyPr>
+          <a:lstStyle/>
+          <a:p>
+            <a:pPr algn="l"/>
+            <a:r>
+              <a:rPr sz="2280" b="1" i="0">
+                <a:solidFill>
+                  <a:srgbClr val="1A1A1A"/>
+                </a:solidFill>
+                <a:latin typeface="Lexend"/>
+              </a:rPr>
+              <a:t>How many gallons is the whole batch?</a:t>
+            </a:r>
+          </a:p>
+        </p:txBody>
+      </p:sp>
       <p:pic>
         <p:nvPicPr>
-          <p:cNvPr id="11" name="Picture 10" descr="60ebe7948d8a203f.png"/>
+          <p:cNvPr id="13" name="Picture 12" descr="d59191ca87bf000c.png"/>
           <p:cNvPicPr>
             <a:picLocks noChangeAspect="1"/>
           </p:cNvPicPr>
@@ -11067,7 +11950,31 @@
         </p:blipFill>
         <p:spPr>
           <a:xfrm>
-            <a:off x="3706367" y="4319347"/>
+            <a:off x="3706367" y="3684236"/>
+            <a:ext cx="4861560" cy="609600"/>
+          </a:xfrm>
+          <a:prstGeom prst="rect">
+            <a:avLst/>
+          </a:prstGeom>
+        </p:spPr>
+      </p:pic>
+      <p:pic>
+        <p:nvPicPr>
+          <p:cNvPr id="14" name="Picture 13" descr="60ebe7948d8a203f.png"/>
+          <p:cNvPicPr>
+            <a:picLocks noChangeAspect="1"/>
+          </p:cNvPicPr>
+          <p:nvPr/>
+        </p:nvPicPr>
+        <p:blipFill>
+          <a:blip r:embed="rId4"/>
+          <a:stretch>
+            <a:fillRect/>
+          </a:stretch>
+        </p:blipFill>
+        <p:spPr>
+          <a:xfrm>
+            <a:off x="3706367" y="4515769"/>
             <a:ext cx="1581912" cy="249935"/>
           </a:xfrm>
           <a:prstGeom prst="rect">
@@ -11077,13 +11984,13 @@
       </p:pic>
       <p:sp>
         <p:nvSpPr>
-          <p:cNvPr id="12" name="TextBox 11"/>
-          <p:cNvSpPr txBox="1"/>
-          <p:nvPr/>
-        </p:nvSpPr>
-        <p:spPr>
-          <a:xfrm>
-            <a:off x="777240" y="4787215"/>
+          <p:cNvPr id="15" name="TextBox 14"/>
+          <p:cNvSpPr txBox="1"/>
+          <p:nvPr/>
+        </p:nvSpPr>
+        <p:spPr>
+          <a:xfrm>
+            <a:off x="777240" y="4970492"/>
             <a:ext cx="10607040" cy="548640"/>
           </a:xfrm>
           <a:prstGeom prst="rect">
@@ -11347,7 +12254,7 @@
         <p:spPr>
           <a:xfrm>
             <a:off x="1874519" y="1440180"/>
-            <a:ext cx="6627442" cy="457200"/>
+            <a:ext cx="671561" cy="457200"/>
           </a:xfrm>
           <a:prstGeom prst="rect">
             <a:avLst/>
@@ -11368,154 +12275,14 @@
                 </a:solidFill>
                 <a:latin typeface="Lexend"/>
               </a:rPr>
-              <a:t>1.   1 kg = 2.204 lb. How many pounds is 4 kg?</a:t>
-            </a:r>
-          </a:p>
-        </p:txBody>
-      </p:sp>
-      <p:sp>
-        <p:nvSpPr>
-          <p:cNvPr id="9" name="TextBox 8"/>
-          <p:cNvSpPr txBox="1"/>
-          <p:nvPr/>
-        </p:nvSpPr>
-        <p:spPr>
-          <a:xfrm>
-            <a:off x="8913442" y="1440180"/>
-            <a:ext cx="1350672" cy="457200"/>
-          </a:xfrm>
-          <a:prstGeom prst="rect">
-            <a:avLst/>
-          </a:prstGeom>
-          <a:noFill/>
-        </p:spPr>
-        <p:txBody>
-          <a:bodyPr wrap="none" lIns="45720" rIns="45720" tIns="18288" bIns="18288" anchor="ctr">
-            <a:noAutofit/>
-          </a:bodyPr>
-          <a:lstStyle/>
-          <a:p>
-            <a:pPr algn="l"/>
-            <a:r>
-              <a:rPr sz="2180" b="1" i="0">
-                <a:solidFill>
-                  <a:srgbClr val="9E1B32"/>
-                </a:solidFill>
-                <a:latin typeface="Lexend"/>
-              </a:rPr>
-              <a:t>8.816 lb</a:t>
-            </a:r>
-          </a:p>
-        </p:txBody>
-      </p:sp>
-      <p:sp>
-        <p:nvSpPr>
-          <p:cNvPr id="10" name="TextBox 9"/>
-          <p:cNvSpPr txBox="1"/>
-          <p:nvPr/>
-        </p:nvSpPr>
-        <p:spPr>
-          <a:xfrm>
-            <a:off x="1874519" y="2052828"/>
-            <a:ext cx="7901486" cy="457200"/>
-          </a:xfrm>
-          <a:prstGeom prst="rect">
-            <a:avLst/>
-          </a:prstGeom>
-          <a:noFill/>
-        </p:spPr>
-        <p:txBody>
-          <a:bodyPr wrap="none" lIns="45720" rIns="45720" tIns="18288" bIns="18288" anchor="ctr">
-            <a:noAutofit/>
-          </a:bodyPr>
-          <a:lstStyle/>
-          <a:p>
-            <a:pPr algn="l"/>
-            <a:r>
-              <a:rPr sz="2180" b="0" i="0">
-                <a:solidFill>
-                  <a:srgbClr val="1A1A1A"/>
-                </a:solidFill>
-                <a:latin typeface="Lexend"/>
-              </a:rPr>
-              <a:t>2.   At 1 cm : 50 km, 3 cm on the map is how many km?</a:t>
-            </a:r>
-          </a:p>
-        </p:txBody>
-      </p:sp>
-      <p:sp>
-        <p:nvSpPr>
-          <p:cNvPr id="11" name="TextBox 10"/>
-          <p:cNvSpPr txBox="1"/>
-          <p:nvPr/>
-        </p:nvSpPr>
-        <p:spPr>
-          <a:xfrm>
-            <a:off x="10187486" y="2052828"/>
-            <a:ext cx="1310357" cy="457200"/>
-          </a:xfrm>
-          <a:prstGeom prst="rect">
-            <a:avLst/>
-          </a:prstGeom>
-          <a:noFill/>
-        </p:spPr>
-        <p:txBody>
-          <a:bodyPr wrap="none" lIns="45720" rIns="45720" tIns="18288" bIns="18288" anchor="ctr">
-            <a:noAutofit/>
-          </a:bodyPr>
-          <a:lstStyle/>
-          <a:p>
-            <a:pPr algn="l"/>
-            <a:r>
-              <a:rPr sz="2180" b="1" i="0">
-                <a:solidFill>
-                  <a:srgbClr val="9E1B32"/>
-                </a:solidFill>
-                <a:latin typeface="Lexend"/>
-              </a:rPr>
-              <a:t>150 km</a:t>
-            </a:r>
-          </a:p>
-        </p:txBody>
-      </p:sp>
-      <p:sp>
-        <p:nvSpPr>
-          <p:cNvPr id="12" name="TextBox 11"/>
-          <p:cNvSpPr txBox="1"/>
-          <p:nvPr/>
-        </p:nvSpPr>
-        <p:spPr>
-          <a:xfrm>
-            <a:off x="1874519" y="2665476"/>
-            <a:ext cx="2930351" cy="457200"/>
-          </a:xfrm>
-          <a:prstGeom prst="rect">
-            <a:avLst/>
-          </a:prstGeom>
-          <a:noFill/>
-        </p:spPr>
-        <p:txBody>
-          <a:bodyPr wrap="none" lIns="45720" rIns="45720" tIns="18288" bIns="18288" anchor="ctr">
-            <a:noAutofit/>
-          </a:bodyPr>
-          <a:lstStyle/>
-          <a:p>
-            <a:pPr algn="l"/>
-            <a:r>
-              <a:rPr sz="2180" b="0" i="0">
-                <a:solidFill>
-                  <a:srgbClr val="1A1A1A"/>
-                </a:solidFill>
-                <a:latin typeface="Lexend"/>
-              </a:rPr>
-              <a:t>3.   Find the value:  </a:t>
+              <a:t>1.   </a:t>
             </a:r>
           </a:p>
         </p:txBody>
       </p:sp>
       <p:pic>
         <p:nvPicPr>
-          <p:cNvPr id="13" name="Picture 12" descr="278b168b184c0a71.png"/>
+          <p:cNvPr id="9" name="Picture 8" descr="d7de33d50f52caf2.png"/>
           <p:cNvPicPr>
             <a:picLocks noChangeAspect="1"/>
           </p:cNvPicPr>
@@ -11529,7 +12296,265 @@
         </p:blipFill>
         <p:spPr>
           <a:xfrm>
-            <a:off x="4667711" y="2781300"/>
+            <a:off x="2408921" y="1546669"/>
+            <a:ext cx="1965960" cy="304800"/>
+          </a:xfrm>
+          <a:prstGeom prst="rect">
+            <a:avLst/>
+          </a:prstGeom>
+        </p:spPr>
+      </p:pic>
+      <p:sp>
+        <p:nvSpPr>
+          <p:cNvPr id="10" name="TextBox 9"/>
+          <p:cNvSpPr txBox="1"/>
+          <p:nvPr/>
+        </p:nvSpPr>
+        <p:spPr>
+          <a:xfrm>
+            <a:off x="4374881" y="1440180"/>
+            <a:ext cx="4161532" cy="457200"/>
+          </a:xfrm>
+          <a:prstGeom prst="rect">
+            <a:avLst/>
+          </a:prstGeom>
+          <a:noFill/>
+        </p:spPr>
+        <p:txBody>
+          <a:bodyPr wrap="none" lIns="45720" rIns="45720" tIns="18288" bIns="18288" anchor="ctr">
+            <a:noAutofit/>
+          </a:bodyPr>
+          <a:lstStyle/>
+          <a:p>
+            <a:pPr algn="l"/>
+            <a:r>
+              <a:rPr sz="2180" b="0" i="0">
+                <a:solidFill>
+                  <a:srgbClr val="1A1A1A"/>
+                </a:solidFill>
+                <a:latin typeface="Lexend"/>
+              </a:rPr>
+              <a:t>. How many pounds is 4 kg?</a:t>
+            </a:r>
+          </a:p>
+        </p:txBody>
+      </p:sp>
+      <p:sp>
+        <p:nvSpPr>
+          <p:cNvPr id="11" name="TextBox 10"/>
+          <p:cNvSpPr txBox="1"/>
+          <p:nvPr/>
+        </p:nvSpPr>
+        <p:spPr>
+          <a:xfrm>
+            <a:off x="8947894" y="1440180"/>
+            <a:ext cx="1350672" cy="457200"/>
+          </a:xfrm>
+          <a:prstGeom prst="rect">
+            <a:avLst/>
+          </a:prstGeom>
+          <a:noFill/>
+        </p:spPr>
+        <p:txBody>
+          <a:bodyPr wrap="none" lIns="45720" rIns="45720" tIns="18288" bIns="18288" anchor="ctr">
+            <a:noAutofit/>
+          </a:bodyPr>
+          <a:lstStyle/>
+          <a:p>
+            <a:pPr algn="l"/>
+            <a:r>
+              <a:rPr sz="2180" b="1" i="0">
+                <a:solidFill>
+                  <a:srgbClr val="9E1B32"/>
+                </a:solidFill>
+                <a:latin typeface="Lexend"/>
+              </a:rPr>
+              <a:t>8.816 lb</a:t>
+            </a:r>
+          </a:p>
+        </p:txBody>
+      </p:sp>
+      <p:sp>
+        <p:nvSpPr>
+          <p:cNvPr id="12" name="TextBox 11"/>
+          <p:cNvSpPr txBox="1"/>
+          <p:nvPr/>
+        </p:nvSpPr>
+        <p:spPr>
+          <a:xfrm>
+            <a:off x="1874519" y="2052828"/>
+            <a:ext cx="1085502" cy="457200"/>
+          </a:xfrm>
+          <a:prstGeom prst="rect">
+            <a:avLst/>
+          </a:prstGeom>
+          <a:noFill/>
+        </p:spPr>
+        <p:txBody>
+          <a:bodyPr wrap="none" lIns="45720" rIns="45720" tIns="18288" bIns="18288" anchor="ctr">
+            <a:noAutofit/>
+          </a:bodyPr>
+          <a:lstStyle/>
+          <a:p>
+            <a:pPr algn="l"/>
+            <a:r>
+              <a:rPr sz="2180" b="0" i="0">
+                <a:solidFill>
+                  <a:srgbClr val="1A1A1A"/>
+                </a:solidFill>
+                <a:latin typeface="Lexend"/>
+              </a:rPr>
+              <a:t>2.   At </a:t>
+            </a:r>
+          </a:p>
+        </p:txBody>
+      </p:sp>
+      <p:pic>
+        <p:nvPicPr>
+          <p:cNvPr id="13" name="Picture 12" descr="f4514319604e2a5c.png"/>
+          <p:cNvPicPr>
+            <a:picLocks noChangeAspect="1"/>
+          </p:cNvPicPr>
+          <p:nvPr/>
+        </p:nvPicPr>
+        <p:blipFill>
+          <a:blip r:embed="rId3"/>
+          <a:stretch>
+            <a:fillRect/>
+          </a:stretch>
+        </p:blipFill>
+        <p:spPr>
+          <a:xfrm>
+            <a:off x="2822862" y="2162365"/>
+            <a:ext cx="1685544" cy="234696"/>
+          </a:xfrm>
+          <a:prstGeom prst="rect">
+            <a:avLst/>
+          </a:prstGeom>
+        </p:spPr>
+      </p:pic>
+      <p:sp>
+        <p:nvSpPr>
+          <p:cNvPr id="14" name="TextBox 13"/>
+          <p:cNvSpPr txBox="1"/>
+          <p:nvPr/>
+        </p:nvSpPr>
+        <p:spPr>
+          <a:xfrm>
+            <a:off x="4508406" y="2052828"/>
+            <a:ext cx="5270819" cy="457200"/>
+          </a:xfrm>
+          <a:prstGeom prst="rect">
+            <a:avLst/>
+          </a:prstGeom>
+          <a:noFill/>
+        </p:spPr>
+        <p:txBody>
+          <a:bodyPr wrap="none" lIns="45720" rIns="45720" tIns="18288" bIns="18288" anchor="ctr">
+            <a:noAutofit/>
+          </a:bodyPr>
+          <a:lstStyle/>
+          <a:p>
+            <a:pPr algn="l"/>
+            <a:r>
+              <a:rPr sz="2180" b="0" i="0">
+                <a:solidFill>
+                  <a:srgbClr val="1A1A1A"/>
+                </a:solidFill>
+                <a:latin typeface="Lexend"/>
+              </a:rPr>
+              <a:t>, 3 cm on the map is how many km?</a:t>
+            </a:r>
+          </a:p>
+        </p:txBody>
+      </p:sp>
+      <p:sp>
+        <p:nvSpPr>
+          <p:cNvPr id="15" name="TextBox 14"/>
+          <p:cNvSpPr txBox="1"/>
+          <p:nvPr/>
+        </p:nvSpPr>
+        <p:spPr>
+          <a:xfrm>
+            <a:off x="10190706" y="2052828"/>
+            <a:ext cx="1310357" cy="457200"/>
+          </a:xfrm>
+          <a:prstGeom prst="rect">
+            <a:avLst/>
+          </a:prstGeom>
+          <a:noFill/>
+        </p:spPr>
+        <p:txBody>
+          <a:bodyPr wrap="none" lIns="45720" rIns="45720" tIns="18288" bIns="18288" anchor="ctr">
+            <a:noAutofit/>
+          </a:bodyPr>
+          <a:lstStyle/>
+          <a:p>
+            <a:pPr algn="l"/>
+            <a:r>
+              <a:rPr sz="2180" b="1" i="0">
+                <a:solidFill>
+                  <a:srgbClr val="9E1B32"/>
+                </a:solidFill>
+                <a:latin typeface="Lexend"/>
+              </a:rPr>
+              <a:t>150 km</a:t>
+            </a:r>
+          </a:p>
+        </p:txBody>
+      </p:sp>
+      <p:sp>
+        <p:nvSpPr>
+          <p:cNvPr id="16" name="TextBox 15"/>
+          <p:cNvSpPr txBox="1"/>
+          <p:nvPr/>
+        </p:nvSpPr>
+        <p:spPr>
+          <a:xfrm>
+            <a:off x="1874519" y="2665476"/>
+            <a:ext cx="2930351" cy="457200"/>
+          </a:xfrm>
+          <a:prstGeom prst="rect">
+            <a:avLst/>
+          </a:prstGeom>
+          <a:noFill/>
+        </p:spPr>
+        <p:txBody>
+          <a:bodyPr wrap="none" lIns="45720" rIns="45720" tIns="18288" bIns="18288" anchor="ctr">
+            <a:noAutofit/>
+          </a:bodyPr>
+          <a:lstStyle/>
+          <a:p>
+            <a:pPr algn="l"/>
+            <a:r>
+              <a:rPr sz="2180" b="0" i="0">
+                <a:solidFill>
+                  <a:srgbClr val="1A1A1A"/>
+                </a:solidFill>
+                <a:latin typeface="Lexend"/>
+              </a:rPr>
+              <a:t>3.   Find the value:  </a:t>
+            </a:r>
+          </a:p>
+        </p:txBody>
+      </p:sp>
+      <p:pic>
+        <p:nvPicPr>
+          <p:cNvPr id="17" name="Picture 16" descr="278b168b184c0a71.png"/>
+          <p:cNvPicPr>
+            <a:picLocks noChangeAspect="1"/>
+          </p:cNvPicPr>
+          <p:nvPr/>
+        </p:nvPicPr>
+        <p:blipFill>
+          <a:blip r:embed="rId4"/>
+          <a:stretch>
+            <a:fillRect/>
+          </a:stretch>
+        </p:blipFill>
+        <p:spPr>
+          <a:xfrm>
+            <a:off x="4667711" y="2784157"/>
             <a:ext cx="1536192" cy="225552"/>
           </a:xfrm>
           <a:prstGeom prst="rect">
@@ -11539,7 +12564,7 @@
       </p:pic>
       <p:sp>
         <p:nvSpPr>
-          <p:cNvPr id="14" name="TextBox 13"/>
+          <p:cNvPr id="18" name="TextBox 17"/>
           <p:cNvSpPr txBox="1"/>
           <p:nvPr/>
         </p:nvSpPr>
@@ -11574,7 +12599,7 @@
       </p:sp>
       <p:sp>
         <p:nvSpPr>
-          <p:cNvPr id="15" name="TextBox 14"/>
+          <p:cNvPr id="19" name="TextBox 18"/>
           <p:cNvSpPr txBox="1"/>
           <p:nvPr/>
         </p:nvSpPr>
@@ -11609,7 +12634,7 @@
       </p:sp>
       <p:sp>
         <p:nvSpPr>
-          <p:cNvPr id="16" name="TextBox 15"/>
+          <p:cNvPr id="20" name="TextBox 19"/>
           <p:cNvSpPr txBox="1"/>
           <p:nvPr/>
         </p:nvSpPr>
@@ -11878,17 +12903,17 @@
         </p:nvSpPr>
         <p:spPr>
           <a:xfrm>
-            <a:off x="1234440" y="1874519"/>
-            <a:ext cx="10058400" cy="858740"/>
-          </a:xfrm>
-          <a:prstGeom prst="rect">
-            <a:avLst/>
-          </a:prstGeom>
-          <a:noFill/>
-        </p:spPr>
-        <p:txBody>
-          <a:bodyPr wrap="square" lIns="45720" rIns="45720" tIns="18288" bIns="18288" anchor="t">
-            <a:spAutoFit/>
+            <a:off x="1234440" y="1851660"/>
+            <a:ext cx="2976011" cy="457200"/>
+          </a:xfrm>
+          <a:prstGeom prst="rect">
+            <a:avLst/>
+          </a:prstGeom>
+          <a:noFill/>
+        </p:spPr>
+        <p:txBody>
+          <a:bodyPr wrap="none" lIns="45720" rIns="45720" tIns="18288" bIns="18288" anchor="ctr">
+            <a:noAutofit/>
           </a:bodyPr>
           <a:lstStyle/>
           <a:p>
@@ -11900,20 +12925,138 @@
                 </a:solidFill>
                 <a:latin typeface="Lexend"/>
               </a:rPr>
-              <a:t>A plan is drawn at 1 in : 4 ft; a room is 2 in by 2.5 in on it. 1 ft = 0.305 m.</a:t>
-            </a:r>
-          </a:p>
-        </p:txBody>
-      </p:sp>
-      <p:sp>
-        <p:nvSpPr>
-          <p:cNvPr id="9" name="TextBox 8"/>
-          <p:cNvSpPr txBox="1"/>
-          <p:nvPr/>
-        </p:nvSpPr>
-        <p:spPr>
-          <a:xfrm>
-            <a:off x="1234440" y="2842988"/>
+              <a:t>A plan is drawn at </a:t>
+            </a:r>
+          </a:p>
+        </p:txBody>
+      </p:sp>
+      <p:pic>
+        <p:nvPicPr>
+          <p:cNvPr id="9" name="Picture 8" descr="69da27b14c874025.png"/>
+          <p:cNvPicPr>
+            <a:picLocks noChangeAspect="1"/>
+          </p:cNvPicPr>
+          <p:nvPr/>
+        </p:nvPicPr>
+        <p:blipFill>
+          <a:blip r:embed="rId2"/>
+          <a:stretch>
+            <a:fillRect/>
+          </a:stretch>
+        </p:blipFill>
+        <p:spPr>
+          <a:xfrm>
+            <a:off x="4073291" y="1956815"/>
+            <a:ext cx="1121664" cy="243840"/>
+          </a:xfrm>
+          <a:prstGeom prst="rect">
+            <a:avLst/>
+          </a:prstGeom>
+        </p:spPr>
+      </p:pic>
+      <p:sp>
+        <p:nvSpPr>
+          <p:cNvPr id="10" name="TextBox 9"/>
+          <p:cNvSpPr txBox="1"/>
+          <p:nvPr/>
+        </p:nvSpPr>
+        <p:spPr>
+          <a:xfrm>
+            <a:off x="5194955" y="1851660"/>
+            <a:ext cx="4480705" cy="457200"/>
+          </a:xfrm>
+          <a:prstGeom prst="rect">
+            <a:avLst/>
+          </a:prstGeom>
+          <a:noFill/>
+        </p:spPr>
+        <p:txBody>
+          <a:bodyPr wrap="none" lIns="45720" rIns="45720" tIns="18288" bIns="18288" anchor="ctr">
+            <a:noAutofit/>
+          </a:bodyPr>
+          <a:lstStyle/>
+          <a:p>
+            <a:pPr algn="l"/>
+            <a:r>
+              <a:rPr sz="2280" b="0" i="0">
+                <a:solidFill>
+                  <a:srgbClr val="1A1A1A"/>
+                </a:solidFill>
+                <a:latin typeface="Lexend"/>
+              </a:rPr>
+              <a:t>; a room is 2 in by 2.5 in on it.</a:t>
+            </a:r>
+          </a:p>
+        </p:txBody>
+      </p:sp>
+      <p:pic>
+        <p:nvPicPr>
+          <p:cNvPr id="11" name="Picture 10" descr="c79700df5a23d6de.png"/>
+          <p:cNvPicPr>
+            <a:picLocks noChangeAspect="1"/>
+          </p:cNvPicPr>
+          <p:nvPr/>
+        </p:nvPicPr>
+        <p:blipFill>
+          <a:blip r:embed="rId3"/>
+          <a:stretch>
+            <a:fillRect/>
+          </a:stretch>
+        </p:blipFill>
+        <p:spPr>
+          <a:xfrm>
+            <a:off x="1234440" y="2578608"/>
+            <a:ext cx="1828800" cy="234696"/>
+          </a:xfrm>
+          <a:prstGeom prst="rect">
+            <a:avLst/>
+          </a:prstGeom>
+        </p:spPr>
+      </p:pic>
+      <p:sp>
+        <p:nvSpPr>
+          <p:cNvPr id="12" name="TextBox 11"/>
+          <p:cNvSpPr txBox="1"/>
+          <p:nvPr/>
+        </p:nvSpPr>
+        <p:spPr>
+          <a:xfrm>
+            <a:off x="3063240" y="2464308"/>
+            <a:ext cx="280301" cy="457200"/>
+          </a:xfrm>
+          <a:prstGeom prst="rect">
+            <a:avLst/>
+          </a:prstGeom>
+          <a:noFill/>
+        </p:spPr>
+        <p:txBody>
+          <a:bodyPr wrap="none" lIns="45720" rIns="45720" tIns="18288" bIns="18288" anchor="ctr">
+            <a:noAutofit/>
+          </a:bodyPr>
+          <a:lstStyle/>
+          <a:p>
+            <a:pPr algn="l"/>
+            <a:r>
+              <a:rPr sz="2280" b="0" i="0">
+                <a:solidFill>
+                  <a:srgbClr val="1A1A1A"/>
+                </a:solidFill>
+                <a:latin typeface="Lexend"/>
+              </a:rPr>
+              <a:t>.</a:t>
+            </a:r>
+          </a:p>
+        </p:txBody>
+      </p:sp>
+      <p:sp>
+        <p:nvSpPr>
+          <p:cNvPr id="13" name="TextBox 12"/>
+          <p:cNvSpPr txBox="1"/>
+          <p:nvPr/>
+        </p:nvSpPr>
+        <p:spPr>
+          <a:xfrm>
+            <a:off x="1234440" y="3099816"/>
             <a:ext cx="10058400" cy="429370"/>
           </a:xfrm>
           <a:prstGeom prst="rect">
@@ -11942,7 +13085,7 @@
       </p:sp>
       <p:sp>
         <p:nvSpPr>
-          <p:cNvPr id="10" name="TextBox 9"/>
+          <p:cNvPr id="14" name="TextBox 13"/>
           <p:cNvSpPr txBox="1"/>
           <p:nvPr/>
         </p:nvSpPr>
@@ -12211,17 +13354,17 @@
         </p:nvSpPr>
         <p:spPr>
           <a:xfrm>
-            <a:off x="1234440" y="1874519"/>
-            <a:ext cx="10058400" cy="858740"/>
-          </a:xfrm>
-          <a:prstGeom prst="rect">
-            <a:avLst/>
-          </a:prstGeom>
-          <a:noFill/>
-        </p:spPr>
-        <p:txBody>
-          <a:bodyPr wrap="square" lIns="45720" rIns="45720" tIns="18288" bIns="18288" anchor="t">
-            <a:spAutoFit/>
+            <a:off x="1234440" y="1851660"/>
+            <a:ext cx="2976011" cy="457200"/>
+          </a:xfrm>
+          <a:prstGeom prst="rect">
+            <a:avLst/>
+          </a:prstGeom>
+          <a:noFill/>
+        </p:spPr>
+        <p:txBody>
+          <a:bodyPr wrap="none" lIns="45720" rIns="45720" tIns="18288" bIns="18288" anchor="ctr">
+            <a:noAutofit/>
           </a:bodyPr>
           <a:lstStyle/>
           <a:p>
@@ -12233,49 +13376,14 @@
                 </a:solidFill>
                 <a:latin typeface="Lexend"/>
               </a:rPr>
-              <a:t>A plan is drawn at 1 in : 4 ft; a room is 2 in by 2.5 in on it. 1 ft = 0.305 m.</a:t>
-            </a:r>
-          </a:p>
-        </p:txBody>
-      </p:sp>
-      <p:sp>
-        <p:nvSpPr>
-          <p:cNvPr id="9" name="TextBox 8"/>
-          <p:cNvSpPr txBox="1"/>
-          <p:nvPr/>
-        </p:nvSpPr>
-        <p:spPr>
-          <a:xfrm>
-            <a:off x="1234440" y="2842988"/>
-            <a:ext cx="10058400" cy="429370"/>
-          </a:xfrm>
-          <a:prstGeom prst="rect">
-            <a:avLst/>
-          </a:prstGeom>
-          <a:noFill/>
-        </p:spPr>
-        <p:txBody>
-          <a:bodyPr wrap="square" lIns="45720" rIns="45720" tIns="18288" bIns="18288" anchor="t">
-            <a:spAutoFit/>
-          </a:bodyPr>
-          <a:lstStyle/>
-          <a:p>
-            <a:pPr algn="l"/>
-            <a:r>
-              <a:rPr sz="2280" b="1" i="0">
-                <a:solidFill>
-                  <a:srgbClr val="1A1A1A"/>
-                </a:solidFill>
-                <a:latin typeface="Lexend"/>
-              </a:rPr>
-              <a:t>Find the room's area in square meters.</a:t>
+              <a:t>A plan is drawn at </a:t>
             </a:r>
           </a:p>
         </p:txBody>
       </p:sp>
       <p:pic>
         <p:nvPicPr>
-          <p:cNvPr id="10" name="Picture 9" descr="edc42479e43efb19.png"/>
+          <p:cNvPr id="9" name="Picture 8" descr="0108e640f9a5d2fa.png"/>
           <p:cNvPicPr>
             <a:picLocks noChangeAspect="1"/>
           </p:cNvPicPr>
@@ -12289,17 +13397,52 @@
         </p:blipFill>
         <p:spPr>
           <a:xfrm>
-            <a:off x="1557527" y="3572587"/>
-            <a:ext cx="4294632" cy="268224"/>
+            <a:off x="4073291" y="1956815"/>
+            <a:ext cx="1121664" cy="243840"/>
           </a:xfrm>
           <a:prstGeom prst="rect">
             <a:avLst/>
           </a:prstGeom>
         </p:spPr>
       </p:pic>
+      <p:sp>
+        <p:nvSpPr>
+          <p:cNvPr id="10" name="TextBox 9"/>
+          <p:cNvSpPr txBox="1"/>
+          <p:nvPr/>
+        </p:nvSpPr>
+        <p:spPr>
+          <a:xfrm>
+            <a:off x="5194955" y="1851660"/>
+            <a:ext cx="4480705" cy="457200"/>
+          </a:xfrm>
+          <a:prstGeom prst="rect">
+            <a:avLst/>
+          </a:prstGeom>
+          <a:noFill/>
+        </p:spPr>
+        <p:txBody>
+          <a:bodyPr wrap="none" lIns="45720" rIns="45720" tIns="18288" bIns="18288" anchor="ctr">
+            <a:noAutofit/>
+          </a:bodyPr>
+          <a:lstStyle/>
+          <a:p>
+            <a:pPr algn="l"/>
+            <a:r>
+              <a:rPr sz="2280" b="0" i="0">
+                <a:solidFill>
+                  <a:srgbClr val="1A1A1A"/>
+                </a:solidFill>
+                <a:latin typeface="Lexend"/>
+              </a:rPr>
+              <a:t>; a room is 2 in by 2.5 in on it.</a:t>
+            </a:r>
+          </a:p>
+        </p:txBody>
+      </p:sp>
       <p:pic>
         <p:nvPicPr>
-          <p:cNvPr id="11" name="Picture 10" descr="8d1545a1affce0b7.png"/>
+          <p:cNvPr id="11" name="Picture 10" descr="c76c66710128e6b0.png"/>
           <p:cNvPicPr>
             <a:picLocks noChangeAspect="1"/>
           </p:cNvPicPr>
@@ -12313,7 +13456,125 @@
         </p:blipFill>
         <p:spPr>
           <a:xfrm>
-            <a:off x="1557527" y="4119703"/>
+            <a:off x="1234440" y="2578608"/>
+            <a:ext cx="1828800" cy="234696"/>
+          </a:xfrm>
+          <a:prstGeom prst="rect">
+            <a:avLst/>
+          </a:prstGeom>
+        </p:spPr>
+      </p:pic>
+      <p:sp>
+        <p:nvSpPr>
+          <p:cNvPr id="12" name="TextBox 11"/>
+          <p:cNvSpPr txBox="1"/>
+          <p:nvPr/>
+        </p:nvSpPr>
+        <p:spPr>
+          <a:xfrm>
+            <a:off x="3063240" y="2464308"/>
+            <a:ext cx="280301" cy="457200"/>
+          </a:xfrm>
+          <a:prstGeom prst="rect">
+            <a:avLst/>
+          </a:prstGeom>
+          <a:noFill/>
+        </p:spPr>
+        <p:txBody>
+          <a:bodyPr wrap="none" lIns="45720" rIns="45720" tIns="18288" bIns="18288" anchor="ctr">
+            <a:noAutofit/>
+          </a:bodyPr>
+          <a:lstStyle/>
+          <a:p>
+            <a:pPr algn="l"/>
+            <a:r>
+              <a:rPr sz="2280" b="0" i="0">
+                <a:solidFill>
+                  <a:srgbClr val="1A1A1A"/>
+                </a:solidFill>
+                <a:latin typeface="Lexend"/>
+              </a:rPr>
+              <a:t>.</a:t>
+            </a:r>
+          </a:p>
+        </p:txBody>
+      </p:sp>
+      <p:sp>
+        <p:nvSpPr>
+          <p:cNvPr id="13" name="TextBox 12"/>
+          <p:cNvSpPr txBox="1"/>
+          <p:nvPr/>
+        </p:nvSpPr>
+        <p:spPr>
+          <a:xfrm>
+            <a:off x="1234440" y="3099816"/>
+            <a:ext cx="10058400" cy="429370"/>
+          </a:xfrm>
+          <a:prstGeom prst="rect">
+            <a:avLst/>
+          </a:prstGeom>
+          <a:noFill/>
+        </p:spPr>
+        <p:txBody>
+          <a:bodyPr wrap="square" lIns="45720" rIns="45720" tIns="18288" bIns="18288" anchor="t">
+            <a:spAutoFit/>
+          </a:bodyPr>
+          <a:lstStyle/>
+          <a:p>
+            <a:pPr algn="l"/>
+            <a:r>
+              <a:rPr sz="2280" b="1" i="0">
+                <a:solidFill>
+                  <a:srgbClr val="1A1A1A"/>
+                </a:solidFill>
+                <a:latin typeface="Lexend"/>
+              </a:rPr>
+              <a:t>Find the room's area in square meters.</a:t>
+            </a:r>
+          </a:p>
+        </p:txBody>
+      </p:sp>
+      <p:pic>
+        <p:nvPicPr>
+          <p:cNvPr id="14" name="Picture 13" descr="edc42479e43efb19.png"/>
+          <p:cNvPicPr>
+            <a:picLocks noChangeAspect="1"/>
+          </p:cNvPicPr>
+          <p:nvPr/>
+        </p:nvPicPr>
+        <p:blipFill>
+          <a:blip r:embed="rId4"/>
+          <a:stretch>
+            <a:fillRect/>
+          </a:stretch>
+        </p:blipFill>
+        <p:spPr>
+          <a:xfrm>
+            <a:off x="1557527" y="3839510"/>
+            <a:ext cx="4294632" cy="268224"/>
+          </a:xfrm>
+          <a:prstGeom prst="rect">
+            <a:avLst/>
+          </a:prstGeom>
+        </p:spPr>
+      </p:pic>
+      <p:pic>
+        <p:nvPicPr>
+          <p:cNvPr id="15" name="Picture 14" descr="8d1545a1affce0b7.png"/>
+          <p:cNvPicPr>
+            <a:picLocks noChangeAspect="1"/>
+          </p:cNvPicPr>
+          <p:nvPr/>
+        </p:nvPicPr>
+        <p:blipFill>
+          <a:blip r:embed="rId5"/>
+          <a:stretch>
+            <a:fillRect/>
+          </a:stretch>
+        </p:blipFill>
+        <p:spPr>
+          <a:xfrm>
+            <a:off x="1557527" y="4394246"/>
             <a:ext cx="9162288" cy="252984"/>
           </a:xfrm>
           <a:prstGeom prst="rect">
@@ -12323,13 +13584,13 @@
       </p:pic>
       <p:sp>
         <p:nvSpPr>
-          <p:cNvPr id="12" name="TextBox 11"/>
-          <p:cNvSpPr txBox="1"/>
-          <p:nvPr/>
-        </p:nvSpPr>
-        <p:spPr>
-          <a:xfrm>
-            <a:off x="777240" y="4663440"/>
+          <p:cNvPr id="16" name="TextBox 15"/>
+          <p:cNvSpPr txBox="1"/>
+          <p:nvPr/>
+        </p:nvSpPr>
+        <p:spPr>
+          <a:xfrm>
+            <a:off x="777240" y="4845922"/>
             <a:ext cx="10607040" cy="548640"/>
           </a:xfrm>
           <a:prstGeom prst="rect">
@@ -12593,25 +13854,49 @@
           </a:p>
         </p:txBody>
       </p:sp>
-      <p:sp>
-        <p:nvSpPr>
-          <p:cNvPr id="8" name="TextBox 7"/>
-          <p:cNvSpPr txBox="1"/>
-          <p:nvPr/>
-        </p:nvSpPr>
-        <p:spPr>
-          <a:xfrm>
-            <a:off x="1234440" y="1874519"/>
-            <a:ext cx="10058400" cy="858740"/>
-          </a:xfrm>
-          <a:prstGeom prst="rect">
-            <a:avLst/>
-          </a:prstGeom>
-          <a:noFill/>
-        </p:spPr>
-        <p:txBody>
-          <a:bodyPr wrap="square" lIns="45720" rIns="45720" tIns="18288" bIns="18288" anchor="t">
-            <a:spAutoFit/>
+      <p:pic>
+        <p:nvPicPr>
+          <p:cNvPr id="8" name="Picture 7" descr="673c0080fbe2317f.png"/>
+          <p:cNvPicPr>
+            <a:picLocks noChangeAspect="1"/>
+          </p:cNvPicPr>
+          <p:nvPr/>
+        </p:nvPicPr>
+        <p:blipFill>
+          <a:blip r:embed="rId2"/>
+          <a:stretch>
+            <a:fillRect/>
+          </a:stretch>
+        </p:blipFill>
+        <p:spPr>
+          <a:xfrm>
+            <a:off x="1234440" y="1728216"/>
+            <a:ext cx="1901952" cy="243840"/>
+          </a:xfrm>
+          <a:prstGeom prst="rect">
+            <a:avLst/>
+          </a:prstGeom>
+        </p:spPr>
+      </p:pic>
+      <p:sp>
+        <p:nvSpPr>
+          <p:cNvPr id="9" name="TextBox 8"/>
+          <p:cNvSpPr txBox="1"/>
+          <p:nvPr/>
+        </p:nvSpPr>
+        <p:spPr>
+          <a:xfrm>
+            <a:off x="3136392" y="1623060"/>
+            <a:ext cx="280301" cy="457200"/>
+          </a:xfrm>
+          <a:prstGeom prst="rect">
+            <a:avLst/>
+          </a:prstGeom>
+          <a:noFill/>
+        </p:spPr>
+        <p:txBody>
+          <a:bodyPr wrap="none" lIns="45720" rIns="45720" tIns="18288" bIns="18288" anchor="ctr">
+            <a:noAutofit/>
           </a:bodyPr>
           <a:lstStyle/>
           <a:p>
@@ -12623,20 +13908,20 @@
                 </a:solidFill>
                 <a:latin typeface="Lexend"/>
               </a:rPr>
-              <a:t>1 mi = 1.61 km. A 300-km drive. Car A averages 50 mi/h; car B averages 75 km/h.</a:t>
-            </a:r>
-          </a:p>
-        </p:txBody>
-      </p:sp>
-      <p:sp>
-        <p:nvSpPr>
-          <p:cNvPr id="9" name="TextBox 8"/>
-          <p:cNvSpPr txBox="1"/>
-          <p:nvPr/>
-        </p:nvSpPr>
-        <p:spPr>
-          <a:xfrm>
-            <a:off x="1234440" y="2842988"/>
+              <a:t>.</a:t>
+            </a:r>
+          </a:p>
+        </p:txBody>
+      </p:sp>
+      <p:sp>
+        <p:nvSpPr>
+          <p:cNvPr id="10" name="TextBox 9"/>
+          <p:cNvSpPr txBox="1"/>
+          <p:nvPr/>
+        </p:nvSpPr>
+        <p:spPr>
+          <a:xfrm>
+            <a:off x="1234440" y="2258568"/>
             <a:ext cx="10058400" cy="429370"/>
           </a:xfrm>
           <a:prstGeom prst="rect">
@@ -12652,6 +13937,76 @@
           <a:p>
             <a:pPr algn="l"/>
             <a:r>
+              <a:rPr sz="2280" b="0" i="0">
+                <a:solidFill>
+                  <a:srgbClr val="1A1A1A"/>
+                </a:solidFill>
+                <a:latin typeface="Lexend"/>
+              </a:rPr>
+              <a:t>A 300-km drive.</a:t>
+            </a:r>
+          </a:p>
+        </p:txBody>
+      </p:sp>
+      <p:sp>
+        <p:nvSpPr>
+          <p:cNvPr id="11" name="TextBox 10"/>
+          <p:cNvSpPr txBox="1"/>
+          <p:nvPr/>
+        </p:nvSpPr>
+        <p:spPr>
+          <a:xfrm>
+            <a:off x="1234440" y="2797666"/>
+            <a:ext cx="10058400" cy="429370"/>
+          </a:xfrm>
+          <a:prstGeom prst="rect">
+            <a:avLst/>
+          </a:prstGeom>
+          <a:noFill/>
+        </p:spPr>
+        <p:txBody>
+          <a:bodyPr wrap="square" lIns="45720" rIns="45720" tIns="18288" bIns="18288" anchor="t">
+            <a:spAutoFit/>
+          </a:bodyPr>
+          <a:lstStyle/>
+          <a:p>
+            <a:pPr algn="l"/>
+            <a:r>
+              <a:rPr sz="2280" b="0" i="0">
+                <a:solidFill>
+                  <a:srgbClr val="1A1A1A"/>
+                </a:solidFill>
+                <a:latin typeface="Lexend"/>
+              </a:rPr>
+              <a:t>Car A averages 50 mi/h; car B averages 75 km/h.</a:t>
+            </a:r>
+          </a:p>
+        </p:txBody>
+      </p:sp>
+      <p:sp>
+        <p:nvSpPr>
+          <p:cNvPr id="12" name="TextBox 11"/>
+          <p:cNvSpPr txBox="1"/>
+          <p:nvPr/>
+        </p:nvSpPr>
+        <p:spPr>
+          <a:xfrm>
+            <a:off x="1234440" y="3336764"/>
+            <a:ext cx="10058400" cy="429370"/>
+          </a:xfrm>
+          <a:prstGeom prst="rect">
+            <a:avLst/>
+          </a:prstGeom>
+          <a:noFill/>
+        </p:spPr>
+        <p:txBody>
+          <a:bodyPr wrap="square" lIns="45720" rIns="45720" tIns="18288" bIns="18288" anchor="t">
+            <a:spAutoFit/>
+          </a:bodyPr>
+          <a:lstStyle/>
+          <a:p>
+            <a:pPr algn="l"/>
+            <a:r>
               <a:rPr sz="2280" b="1" i="0">
                 <a:solidFill>
                   <a:srgbClr val="1A1A1A"/>
@@ -12665,7 +14020,7 @@
       </p:sp>
       <p:sp>
         <p:nvSpPr>
-          <p:cNvPr id="10" name="TextBox 9"/>
+          <p:cNvPr id="13" name="TextBox 12"/>
           <p:cNvSpPr txBox="1"/>
           <p:nvPr/>
         </p:nvSpPr>
@@ -12926,79 +14281,9 @@
           </a:p>
         </p:txBody>
       </p:sp>
-      <p:sp>
-        <p:nvSpPr>
-          <p:cNvPr id="8" name="TextBox 7"/>
-          <p:cNvSpPr txBox="1"/>
-          <p:nvPr/>
-        </p:nvSpPr>
-        <p:spPr>
-          <a:xfrm>
-            <a:off x="1234440" y="1874519"/>
-            <a:ext cx="10058400" cy="858740"/>
-          </a:xfrm>
-          <a:prstGeom prst="rect">
-            <a:avLst/>
-          </a:prstGeom>
-          <a:noFill/>
-        </p:spPr>
-        <p:txBody>
-          <a:bodyPr wrap="square" lIns="45720" rIns="45720" tIns="18288" bIns="18288" anchor="t">
-            <a:spAutoFit/>
-          </a:bodyPr>
-          <a:lstStyle/>
-          <a:p>
-            <a:pPr algn="l"/>
-            <a:r>
-              <a:rPr sz="2280" b="0" i="0">
-                <a:solidFill>
-                  <a:srgbClr val="1A1A1A"/>
-                </a:solidFill>
-                <a:latin typeface="Lexend"/>
-              </a:rPr>
-              <a:t>1 mi = 1.61 km. A 300-km drive. Car A averages 50 mi/h; car B averages 75 km/h.</a:t>
-            </a:r>
-          </a:p>
-        </p:txBody>
-      </p:sp>
-      <p:sp>
-        <p:nvSpPr>
-          <p:cNvPr id="9" name="TextBox 8"/>
-          <p:cNvSpPr txBox="1"/>
-          <p:nvPr/>
-        </p:nvSpPr>
-        <p:spPr>
-          <a:xfrm>
-            <a:off x="1234440" y="2842988"/>
-            <a:ext cx="10058400" cy="429370"/>
-          </a:xfrm>
-          <a:prstGeom prst="rect">
-            <a:avLst/>
-          </a:prstGeom>
-          <a:noFill/>
-        </p:spPr>
-        <p:txBody>
-          <a:bodyPr wrap="square" lIns="45720" rIns="45720" tIns="18288" bIns="18288" anchor="t">
-            <a:spAutoFit/>
-          </a:bodyPr>
-          <a:lstStyle/>
-          <a:p>
-            <a:pPr algn="l"/>
-            <a:r>
-              <a:rPr sz="2280" b="1" i="0">
-                <a:solidFill>
-                  <a:srgbClr val="1A1A1A"/>
-                </a:solidFill>
-                <a:latin typeface="Lexend"/>
-              </a:rPr>
-              <a:t>Which car gets there first, and by how long? Explain.</a:t>
-            </a:r>
-          </a:p>
-        </p:txBody>
-      </p:sp>
       <p:pic>
         <p:nvPicPr>
-          <p:cNvPr id="10" name="Picture 9" descr="6fd1d65a65982d0a.png"/>
+          <p:cNvPr id="8" name="Picture 7" descr="e62e96f3d6ecb8f1.png"/>
           <p:cNvPicPr>
             <a:picLocks noChangeAspect="1"/>
           </p:cNvPicPr>
@@ -13012,17 +14297,157 @@
         </p:blipFill>
         <p:spPr>
           <a:xfrm>
-            <a:off x="3281172" y="3552775"/>
-            <a:ext cx="3340608" cy="307848"/>
+            <a:off x="1234440" y="1728216"/>
+            <a:ext cx="1901952" cy="243840"/>
           </a:xfrm>
           <a:prstGeom prst="rect">
             <a:avLst/>
           </a:prstGeom>
         </p:spPr>
       </p:pic>
+      <p:sp>
+        <p:nvSpPr>
+          <p:cNvPr id="9" name="TextBox 8"/>
+          <p:cNvSpPr txBox="1"/>
+          <p:nvPr/>
+        </p:nvSpPr>
+        <p:spPr>
+          <a:xfrm>
+            <a:off x="3136392" y="1623060"/>
+            <a:ext cx="280301" cy="457200"/>
+          </a:xfrm>
+          <a:prstGeom prst="rect">
+            <a:avLst/>
+          </a:prstGeom>
+          <a:noFill/>
+        </p:spPr>
+        <p:txBody>
+          <a:bodyPr wrap="none" lIns="45720" rIns="45720" tIns="18288" bIns="18288" anchor="ctr">
+            <a:noAutofit/>
+          </a:bodyPr>
+          <a:lstStyle/>
+          <a:p>
+            <a:pPr algn="l"/>
+            <a:r>
+              <a:rPr sz="2280" b="0" i="0">
+                <a:solidFill>
+                  <a:srgbClr val="1A1A1A"/>
+                </a:solidFill>
+                <a:latin typeface="Lexend"/>
+              </a:rPr>
+              <a:t>.</a:t>
+            </a:r>
+          </a:p>
+        </p:txBody>
+      </p:sp>
+      <p:sp>
+        <p:nvSpPr>
+          <p:cNvPr id="10" name="TextBox 9"/>
+          <p:cNvSpPr txBox="1"/>
+          <p:nvPr/>
+        </p:nvSpPr>
+        <p:spPr>
+          <a:xfrm>
+            <a:off x="1234440" y="2258568"/>
+            <a:ext cx="10058400" cy="429370"/>
+          </a:xfrm>
+          <a:prstGeom prst="rect">
+            <a:avLst/>
+          </a:prstGeom>
+          <a:noFill/>
+        </p:spPr>
+        <p:txBody>
+          <a:bodyPr wrap="square" lIns="45720" rIns="45720" tIns="18288" bIns="18288" anchor="t">
+            <a:spAutoFit/>
+          </a:bodyPr>
+          <a:lstStyle/>
+          <a:p>
+            <a:pPr algn="l"/>
+            <a:r>
+              <a:rPr sz="2280" b="0" i="0">
+                <a:solidFill>
+                  <a:srgbClr val="1A1A1A"/>
+                </a:solidFill>
+                <a:latin typeface="Lexend"/>
+              </a:rPr>
+              <a:t>A 300-km drive.</a:t>
+            </a:r>
+          </a:p>
+        </p:txBody>
+      </p:sp>
+      <p:sp>
+        <p:nvSpPr>
+          <p:cNvPr id="11" name="TextBox 10"/>
+          <p:cNvSpPr txBox="1"/>
+          <p:nvPr/>
+        </p:nvSpPr>
+        <p:spPr>
+          <a:xfrm>
+            <a:off x="1234440" y="2797666"/>
+            <a:ext cx="10058400" cy="429370"/>
+          </a:xfrm>
+          <a:prstGeom prst="rect">
+            <a:avLst/>
+          </a:prstGeom>
+          <a:noFill/>
+        </p:spPr>
+        <p:txBody>
+          <a:bodyPr wrap="square" lIns="45720" rIns="45720" tIns="18288" bIns="18288" anchor="t">
+            <a:spAutoFit/>
+          </a:bodyPr>
+          <a:lstStyle/>
+          <a:p>
+            <a:pPr algn="l"/>
+            <a:r>
+              <a:rPr sz="2280" b="0" i="0">
+                <a:solidFill>
+                  <a:srgbClr val="1A1A1A"/>
+                </a:solidFill>
+                <a:latin typeface="Lexend"/>
+              </a:rPr>
+              <a:t>Car A averages 50 mi/h; car B averages 75 km/h.</a:t>
+            </a:r>
+          </a:p>
+        </p:txBody>
+      </p:sp>
+      <p:sp>
+        <p:nvSpPr>
+          <p:cNvPr id="12" name="TextBox 11"/>
+          <p:cNvSpPr txBox="1"/>
+          <p:nvPr/>
+        </p:nvSpPr>
+        <p:spPr>
+          <a:xfrm>
+            <a:off x="1234440" y="3336764"/>
+            <a:ext cx="10058400" cy="429370"/>
+          </a:xfrm>
+          <a:prstGeom prst="rect">
+            <a:avLst/>
+          </a:prstGeom>
+          <a:noFill/>
+        </p:spPr>
+        <p:txBody>
+          <a:bodyPr wrap="square" lIns="45720" rIns="45720" tIns="18288" bIns="18288" anchor="t">
+            <a:spAutoFit/>
+          </a:bodyPr>
+          <a:lstStyle/>
+          <a:p>
+            <a:pPr algn="l"/>
+            <a:r>
+              <a:rPr sz="2280" b="1" i="0">
+                <a:solidFill>
+                  <a:srgbClr val="1A1A1A"/>
+                </a:solidFill>
+                <a:latin typeface="Lexend"/>
+              </a:rPr>
+              <a:t>Which car gets there first, and by how long? Explain.</a:t>
+            </a:r>
+          </a:p>
+        </p:txBody>
+      </p:sp>
       <p:pic>
         <p:nvPicPr>
-          <p:cNvPr id="11" name="Picture 10" descr="6a117b4420daa3f3.png"/>
+          <p:cNvPr id="13" name="Picture 12" descr="6fd1d65a65982d0a.png"/>
           <p:cNvPicPr>
             <a:picLocks noChangeAspect="1"/>
           </p:cNvPicPr>
@@ -13036,7 +14461,31 @@
         </p:blipFill>
         <p:spPr>
           <a:xfrm>
-            <a:off x="3281172" y="4112083"/>
+            <a:off x="3281172" y="4079507"/>
+            <a:ext cx="3340608" cy="307848"/>
+          </a:xfrm>
+          <a:prstGeom prst="rect">
+            <a:avLst/>
+          </a:prstGeom>
+        </p:spPr>
+      </p:pic>
+      <p:pic>
+        <p:nvPicPr>
+          <p:cNvPr id="14" name="Picture 13" descr="6a117b4420daa3f3.png"/>
+          <p:cNvPicPr>
+            <a:picLocks noChangeAspect="1"/>
+          </p:cNvPicPr>
+          <p:nvPr/>
+        </p:nvPicPr>
+        <p:blipFill>
+          <a:blip r:embed="rId4"/>
+          <a:stretch>
+            <a:fillRect/>
+          </a:stretch>
+        </p:blipFill>
+        <p:spPr>
+          <a:xfrm>
+            <a:off x="3281172" y="4615955"/>
             <a:ext cx="5711952" cy="268224"/>
           </a:xfrm>
           <a:prstGeom prst="rect">
@@ -13046,13 +14495,13 @@
       </p:pic>
       <p:sp>
         <p:nvSpPr>
-          <p:cNvPr id="12" name="TextBox 11"/>
-          <p:cNvSpPr txBox="1"/>
-          <p:nvPr/>
-        </p:nvSpPr>
-        <p:spPr>
-          <a:xfrm>
-            <a:off x="777240" y="4663440"/>
+          <p:cNvPr id="15" name="TextBox 14"/>
+          <p:cNvSpPr txBox="1"/>
+          <p:nvPr/>
+        </p:nvSpPr>
+        <p:spPr>
+          <a:xfrm>
+            <a:off x="777240" y="5082871"/>
             <a:ext cx="10607040" cy="1072896"/>
           </a:xfrm>
           <a:prstGeom prst="rect">
@@ -13315,23 +14764,23 @@
         </p:nvSpPr>
         <p:spPr>
           <a:xfrm>
-            <a:off x="960120" y="1572768"/>
-            <a:ext cx="548640" cy="356616"/>
-          </a:xfrm>
-          <a:prstGeom prst="rect">
-            <a:avLst/>
-          </a:prstGeom>
-          <a:noFill/>
-        </p:spPr>
-        <p:txBody>
-          <a:bodyPr wrap="square" lIns="45720" rIns="45720" tIns="18288" bIns="18288" anchor="t">
-            <a:spAutoFit/>
-          </a:bodyPr>
-          <a:lstStyle/>
-          <a:p>
-            <a:pPr algn="l"/>
-            <a:r>
-              <a:rPr sz="1710" b="1" i="0">
+            <a:off x="960120" y="1499019"/>
+            <a:ext cx="548640" cy="377686"/>
+          </a:xfrm>
+          <a:prstGeom prst="rect">
+            <a:avLst/>
+          </a:prstGeom>
+          <a:noFill/>
+        </p:spPr>
+        <p:txBody>
+          <a:bodyPr wrap="square" lIns="45720" rIns="45720" tIns="18288" bIns="18288" anchor="ctr">
+            <a:spAutoFit/>
+          </a:bodyPr>
+          <a:lstStyle/>
+          <a:p>
+            <a:pPr algn="l"/>
+            <a:r>
+              <a:rPr sz="1810" b="1" i="0">
                 <a:solidFill>
                   <a:srgbClr val="0B5394"/>
                 </a:solidFill>
@@ -13350,29 +14799,29 @@
         </p:nvSpPr>
         <p:spPr>
           <a:xfrm>
-            <a:off x="1554480" y="1572768"/>
-            <a:ext cx="9829800" cy="768096"/>
-          </a:xfrm>
-          <a:prstGeom prst="rect">
-            <a:avLst/>
-          </a:prstGeom>
-          <a:noFill/>
-        </p:spPr>
-        <p:txBody>
-          <a:bodyPr wrap="square" lIns="45720" rIns="45720" tIns="18288" bIns="18288" anchor="t">
-            <a:spAutoFit/>
-          </a:bodyPr>
-          <a:lstStyle/>
-          <a:p>
-            <a:pPr algn="l"/>
-            <a:r>
-              <a:rPr sz="1710" b="0" i="0">
+            <a:off x="1554480" y="1499019"/>
+            <a:ext cx="9557199" cy="377686"/>
+          </a:xfrm>
+          <a:prstGeom prst="rect">
+            <a:avLst/>
+          </a:prstGeom>
+          <a:noFill/>
+        </p:spPr>
+        <p:txBody>
+          <a:bodyPr wrap="none" lIns="45720" rIns="45720" tIns="18288" bIns="18288" anchor="ctr">
+            <a:noAutofit/>
+          </a:bodyPr>
+          <a:lstStyle/>
+          <a:p>
+            <a:pPr algn="l"/>
+            <a:r>
+              <a:rPr sz="1810" b="0" i="0">
                 <a:solidFill>
                   <a:srgbClr val="1A1A1A"/>
                 </a:solidFill>
                 <a:latin typeface="Lexend"/>
               </a:rPr>
-              <a:t>A car gets 32 miles per gallon and its tank holds 14 gal. How far does it go on a tank?</a:t>
+              <a:t>A car gets 32 miles per gallon and its tank holds 14 gal. How far does it go on a </a:t>
             </a:r>
           </a:p>
         </p:txBody>
@@ -13385,23 +14834,58 @@
         </p:nvSpPr>
         <p:spPr>
           <a:xfrm>
-            <a:off x="960120" y="2414016"/>
-            <a:ext cx="548640" cy="356616"/>
-          </a:xfrm>
-          <a:prstGeom prst="rect">
-            <a:avLst/>
-          </a:prstGeom>
-          <a:noFill/>
-        </p:spPr>
-        <p:txBody>
-          <a:bodyPr wrap="square" lIns="45720" rIns="45720" tIns="18288" bIns="18288" anchor="t">
-            <a:spAutoFit/>
-          </a:bodyPr>
-          <a:lstStyle/>
-          <a:p>
-            <a:pPr algn="l"/>
-            <a:r>
-              <a:rPr sz="1710" b="1" i="0">
+            <a:off x="1554480" y="1866369"/>
+            <a:ext cx="863045" cy="377686"/>
+          </a:xfrm>
+          <a:prstGeom prst="rect">
+            <a:avLst/>
+          </a:prstGeom>
+          <a:noFill/>
+        </p:spPr>
+        <p:txBody>
+          <a:bodyPr wrap="none" lIns="45720" rIns="45720" tIns="18288" bIns="18288" anchor="ctr">
+            <a:noAutofit/>
+          </a:bodyPr>
+          <a:lstStyle/>
+          <a:p>
+            <a:pPr algn="l"/>
+            <a:r>
+              <a:rPr sz="1810" b="0" i="0">
+                <a:solidFill>
+                  <a:srgbClr val="1A1A1A"/>
+                </a:solidFill>
+                <a:latin typeface="Lexend"/>
+              </a:rPr>
+              <a:t>tank?</a:t>
+            </a:r>
+          </a:p>
+        </p:txBody>
+      </p:sp>
+      <p:sp>
+        <p:nvSpPr>
+          <p:cNvPr id="11" name="TextBox 10"/>
+          <p:cNvSpPr txBox="1"/>
+          <p:nvPr/>
+        </p:nvSpPr>
+        <p:spPr>
+          <a:xfrm>
+            <a:off x="960120" y="2334304"/>
+            <a:ext cx="548640" cy="377686"/>
+          </a:xfrm>
+          <a:prstGeom prst="rect">
+            <a:avLst/>
+          </a:prstGeom>
+          <a:noFill/>
+        </p:spPr>
+        <p:txBody>
+          <a:bodyPr wrap="square" lIns="45720" rIns="45720" tIns="18288" bIns="18288" anchor="ctr">
+            <a:spAutoFit/>
+          </a:bodyPr>
+          <a:lstStyle/>
+          <a:p>
+            <a:pPr algn="l"/>
+            <a:r>
+              <a:rPr sz="1810" b="1" i="0">
                 <a:solidFill>
                   <a:srgbClr val="0B5394"/>
                 </a:solidFill>
@@ -13414,64 +14898,99 @@
       </p:sp>
       <p:sp>
         <p:nvSpPr>
-          <p:cNvPr id="11" name="TextBox 10"/>
-          <p:cNvSpPr txBox="1"/>
-          <p:nvPr/>
-        </p:nvSpPr>
-        <p:spPr>
-          <a:xfrm>
-            <a:off x="1554480" y="2414016"/>
-            <a:ext cx="9829800" cy="768096"/>
-          </a:xfrm>
-          <a:prstGeom prst="rect">
-            <a:avLst/>
-          </a:prstGeom>
-          <a:noFill/>
-        </p:spPr>
-        <p:txBody>
-          <a:bodyPr wrap="square" lIns="45720" rIns="45720" tIns="18288" bIns="18288" anchor="t">
-            <a:spAutoFit/>
-          </a:bodyPr>
-          <a:lstStyle/>
-          <a:p>
-            <a:pPr algn="l"/>
-            <a:r>
-              <a:rPr sz="1710" b="0" i="0">
+          <p:cNvPr id="12" name="TextBox 11"/>
+          <p:cNvSpPr txBox="1"/>
+          <p:nvPr/>
+        </p:nvSpPr>
+        <p:spPr>
+          <a:xfrm>
+            <a:off x="1554480" y="2334304"/>
+            <a:ext cx="9421966" cy="377686"/>
+          </a:xfrm>
+          <a:prstGeom prst="rect">
+            <a:avLst/>
+          </a:prstGeom>
+          <a:noFill/>
+        </p:spPr>
+        <p:txBody>
+          <a:bodyPr wrap="none" lIns="45720" rIns="45720" tIns="18288" bIns="18288" anchor="ctr">
+            <a:noAutofit/>
+          </a:bodyPr>
+          <a:lstStyle/>
+          <a:p>
+            <a:pPr algn="l"/>
+            <a:r>
+              <a:rPr sz="1810" b="0" i="0">
                 <a:solidFill>
                   <a:srgbClr val="1A1A1A"/>
                 </a:solidFill>
                 <a:latin typeface="Lexend"/>
               </a:rPr>
-              <a:t>That car makes a 1,000-mi trip. How many tanks of gas does it use? (Part of a tank counts as a whole tank.)</a:t>
-            </a:r>
-          </a:p>
-        </p:txBody>
-      </p:sp>
-      <p:sp>
-        <p:nvSpPr>
-          <p:cNvPr id="12" name="TextBox 11"/>
-          <p:cNvSpPr txBox="1"/>
-          <p:nvPr/>
-        </p:nvSpPr>
-        <p:spPr>
-          <a:xfrm>
-            <a:off x="960120" y="3255264"/>
-            <a:ext cx="548640" cy="356616"/>
-          </a:xfrm>
-          <a:prstGeom prst="rect">
-            <a:avLst/>
-          </a:prstGeom>
-          <a:noFill/>
-        </p:spPr>
-        <p:txBody>
-          <a:bodyPr wrap="square" lIns="45720" rIns="45720" tIns="18288" bIns="18288" anchor="t">
-            <a:spAutoFit/>
-          </a:bodyPr>
-          <a:lstStyle/>
-          <a:p>
-            <a:pPr algn="l"/>
-            <a:r>
-              <a:rPr sz="1710" b="1" i="0">
+              <a:t>That car makes a 1,000-mi trip. How many tanks of gas does it use? (Part of a </a:t>
+            </a:r>
+          </a:p>
+        </p:txBody>
+      </p:sp>
+      <p:sp>
+        <p:nvSpPr>
+          <p:cNvPr id="13" name="TextBox 12"/>
+          <p:cNvSpPr txBox="1"/>
+          <p:nvPr/>
+        </p:nvSpPr>
+        <p:spPr>
+          <a:xfrm>
+            <a:off x="1554480" y="2701654"/>
+            <a:ext cx="3650825" cy="377686"/>
+          </a:xfrm>
+          <a:prstGeom prst="rect">
+            <a:avLst/>
+          </a:prstGeom>
+          <a:noFill/>
+        </p:spPr>
+        <p:txBody>
+          <a:bodyPr wrap="none" lIns="45720" rIns="45720" tIns="18288" bIns="18288" anchor="ctr">
+            <a:noAutofit/>
+          </a:bodyPr>
+          <a:lstStyle/>
+          <a:p>
+            <a:pPr algn="l"/>
+            <a:r>
+              <a:rPr sz="1810" b="0" i="0">
+                <a:solidFill>
+                  <a:srgbClr val="1A1A1A"/>
+                </a:solidFill>
+                <a:latin typeface="Lexend"/>
+              </a:rPr>
+              <a:t>tank counts as a whole tank.)</a:t>
+            </a:r>
+          </a:p>
+        </p:txBody>
+      </p:sp>
+      <p:sp>
+        <p:nvSpPr>
+          <p:cNvPr id="14" name="TextBox 13"/>
+          <p:cNvSpPr txBox="1"/>
+          <p:nvPr/>
+        </p:nvSpPr>
+        <p:spPr>
+          <a:xfrm>
+            <a:off x="960120" y="3222464"/>
+            <a:ext cx="548640" cy="377686"/>
+          </a:xfrm>
+          <a:prstGeom prst="rect">
+            <a:avLst/>
+          </a:prstGeom>
+          <a:noFill/>
+        </p:spPr>
+        <p:txBody>
+          <a:bodyPr wrap="square" lIns="45720" rIns="45720" tIns="18288" bIns="18288" anchor="ctr">
+            <a:spAutoFit/>
+          </a:bodyPr>
+          <a:lstStyle/>
+          <a:p>
+            <a:pPr algn="l"/>
+            <a:r>
+              <a:rPr sz="1810" b="1" i="0">
                 <a:solidFill>
                   <a:srgbClr val="0B5394"/>
                 </a:solidFill>
@@ -13484,64 +15003,123 @@
       </p:sp>
       <p:sp>
         <p:nvSpPr>
-          <p:cNvPr id="13" name="TextBox 12"/>
-          <p:cNvSpPr txBox="1"/>
-          <p:nvPr/>
-        </p:nvSpPr>
-        <p:spPr>
-          <a:xfrm>
-            <a:off x="1554480" y="3255264"/>
-            <a:ext cx="9829800" cy="411480"/>
-          </a:xfrm>
-          <a:prstGeom prst="rect">
-            <a:avLst/>
-          </a:prstGeom>
-          <a:noFill/>
-        </p:spPr>
-        <p:txBody>
-          <a:bodyPr wrap="square" lIns="45720" rIns="45720" tIns="18288" bIns="18288" anchor="t">
-            <a:spAutoFit/>
-          </a:bodyPr>
-          <a:lstStyle/>
-          <a:p>
-            <a:pPr algn="l"/>
-            <a:r>
-              <a:rPr sz="1710" b="0" i="0">
+          <p:cNvPr id="15" name="TextBox 14"/>
+          <p:cNvSpPr txBox="1"/>
+          <p:nvPr/>
+        </p:nvSpPr>
+        <p:spPr>
+          <a:xfrm>
+            <a:off x="1554480" y="3222464"/>
+            <a:ext cx="3519539" cy="377686"/>
+          </a:xfrm>
+          <a:prstGeom prst="rect">
+            <a:avLst/>
+          </a:prstGeom>
+          <a:noFill/>
+        </p:spPr>
+        <p:txBody>
+          <a:bodyPr wrap="none" lIns="45720" rIns="45720" tIns="18288" bIns="18288" anchor="ctr">
+            <a:noAutofit/>
+          </a:bodyPr>
+          <a:lstStyle/>
+          <a:p>
+            <a:pPr algn="l"/>
+            <a:r>
+              <a:rPr sz="1810" b="0" i="0">
                 <a:solidFill>
                   <a:srgbClr val="1A1A1A"/>
                 </a:solidFill>
                 <a:latin typeface="Lexend"/>
               </a:rPr>
-              <a:t>A recipe for 4 servings uses 1¼ cups of rice. How much rice for 10 servings?</a:t>
-            </a:r>
-          </a:p>
-        </p:txBody>
-      </p:sp>
-      <p:sp>
-        <p:nvSpPr>
-          <p:cNvPr id="14" name="TextBox 13"/>
-          <p:cNvSpPr txBox="1"/>
-          <p:nvPr/>
-        </p:nvSpPr>
-        <p:spPr>
-          <a:xfrm>
-            <a:off x="960120" y="3739896"/>
-            <a:ext cx="548640" cy="356616"/>
-          </a:xfrm>
-          <a:prstGeom prst="rect">
-            <a:avLst/>
-          </a:prstGeom>
-          <a:noFill/>
-        </p:spPr>
-        <p:txBody>
-          <a:bodyPr wrap="square" lIns="45720" rIns="45720" tIns="18288" bIns="18288" anchor="t">
-            <a:spAutoFit/>
-          </a:bodyPr>
-          <a:lstStyle/>
-          <a:p>
-            <a:pPr algn="l"/>
-            <a:r>
-              <a:rPr sz="1710" b="1" i="0">
+              <a:t>A recipe for 4 servings uses </a:t>
+            </a:r>
+          </a:p>
+        </p:txBody>
+      </p:sp>
+      <p:pic>
+        <p:nvPicPr>
+          <p:cNvPr id="16" name="Picture 15" descr="8ef7b8baa04105bc.png"/>
+          <p:cNvPicPr>
+            <a:picLocks noChangeAspect="1"/>
+          </p:cNvPicPr>
+          <p:nvPr/>
+        </p:nvPicPr>
+        <p:blipFill>
+          <a:blip r:embed="rId2"/>
+          <a:stretch>
+            <a:fillRect/>
+          </a:stretch>
+        </p:blipFill>
+        <p:spPr>
+          <a:xfrm>
+            <a:off x="4936859" y="3188473"/>
+            <a:ext cx="274452" cy="445670"/>
+          </a:xfrm>
+          <a:prstGeom prst="rect">
+            <a:avLst/>
+          </a:prstGeom>
+        </p:spPr>
+      </p:pic>
+      <p:sp>
+        <p:nvSpPr>
+          <p:cNvPr id="17" name="TextBox 16"/>
+          <p:cNvSpPr txBox="1"/>
+          <p:nvPr/>
+        </p:nvSpPr>
+        <p:spPr>
+          <a:xfrm>
+            <a:off x="5211312" y="3222464"/>
+            <a:ext cx="5432829" cy="377686"/>
+          </a:xfrm>
+          <a:prstGeom prst="rect">
+            <a:avLst/>
+          </a:prstGeom>
+          <a:noFill/>
+        </p:spPr>
+        <p:txBody>
+          <a:bodyPr wrap="none" lIns="45720" rIns="45720" tIns="18288" bIns="18288" anchor="ctr">
+            <a:noAutofit/>
+          </a:bodyPr>
+          <a:lstStyle/>
+          <a:p>
+            <a:pPr algn="l"/>
+            <a:r>
+              <a:rPr sz="1810" b="0" i="0">
+                <a:solidFill>
+                  <a:srgbClr val="1A1A1A"/>
+                </a:solidFill>
+                <a:latin typeface="Lexend"/>
+              </a:rPr>
+              <a:t> cups of rice. How much rice for 10 servings?</a:t>
+            </a:r>
+          </a:p>
+        </p:txBody>
+      </p:sp>
+      <p:sp>
+        <p:nvSpPr>
+          <p:cNvPr id="18" name="TextBox 17"/>
+          <p:cNvSpPr txBox="1"/>
+          <p:nvPr/>
+        </p:nvSpPr>
+        <p:spPr>
+          <a:xfrm>
+            <a:off x="960120" y="3743275"/>
+            <a:ext cx="548640" cy="377686"/>
+          </a:xfrm>
+          <a:prstGeom prst="rect">
+            <a:avLst/>
+          </a:prstGeom>
+          <a:noFill/>
+        </p:spPr>
+        <p:txBody>
+          <a:bodyPr wrap="square" lIns="45720" rIns="45720" tIns="18288" bIns="18288" anchor="ctr">
+            <a:spAutoFit/>
+          </a:bodyPr>
+          <a:lstStyle/>
+          <a:p>
+            <a:pPr algn="l"/>
+            <a:r>
+              <a:rPr sz="1810" b="1" i="0">
                 <a:solidFill>
                   <a:srgbClr val="0B5394"/>
                 </a:solidFill>
@@ -13552,66 +15130,125 @@
           </a:p>
         </p:txBody>
       </p:sp>
-      <p:sp>
-        <p:nvSpPr>
-          <p:cNvPr id="15" name="TextBox 14"/>
-          <p:cNvSpPr txBox="1"/>
-          <p:nvPr/>
-        </p:nvSpPr>
-        <p:spPr>
-          <a:xfrm>
-            <a:off x="1554480" y="3739896"/>
-            <a:ext cx="9829800" cy="768096"/>
-          </a:xfrm>
-          <a:prstGeom prst="rect">
-            <a:avLst/>
-          </a:prstGeom>
-          <a:noFill/>
-        </p:spPr>
-        <p:txBody>
-          <a:bodyPr wrap="square" lIns="45720" rIns="45720" tIns="18288" bIns="18288" anchor="t">
-            <a:spAutoFit/>
-          </a:bodyPr>
-          <a:lstStyle/>
-          <a:p>
-            <a:pPr algn="l"/>
-            <a:r>
-              <a:rPr sz="1710" b="0" i="0">
+      <p:pic>
+        <p:nvPicPr>
+          <p:cNvPr id="19" name="Picture 18" descr="d2f86d8905c9108c.png"/>
+          <p:cNvPicPr>
+            <a:picLocks noChangeAspect="1"/>
+          </p:cNvPicPr>
+          <p:nvPr/>
+        </p:nvPicPr>
+        <p:blipFill>
+          <a:blip r:embed="rId3"/>
+          <a:stretch>
+            <a:fillRect/>
+          </a:stretch>
+        </p:blipFill>
+        <p:spPr>
+          <a:xfrm>
+            <a:off x="1627632" y="3831402"/>
+            <a:ext cx="1611464" cy="201433"/>
+          </a:xfrm>
+          <a:prstGeom prst="rect">
+            <a:avLst/>
+          </a:prstGeom>
+        </p:spPr>
+      </p:pic>
+      <p:sp>
+        <p:nvSpPr>
+          <p:cNvPr id="20" name="TextBox 19"/>
+          <p:cNvSpPr txBox="1"/>
+          <p:nvPr/>
+        </p:nvSpPr>
+        <p:spPr>
+          <a:xfrm>
+            <a:off x="3239096" y="3743275"/>
+            <a:ext cx="8081680" cy="377686"/>
+          </a:xfrm>
+          <a:prstGeom prst="rect">
+            <a:avLst/>
+          </a:prstGeom>
+          <a:noFill/>
+        </p:spPr>
+        <p:txBody>
+          <a:bodyPr wrap="none" lIns="45720" rIns="45720" tIns="18288" bIns="18288" anchor="ctr">
+            <a:noAutofit/>
+          </a:bodyPr>
+          <a:lstStyle/>
+          <a:p>
+            <a:pPr algn="l"/>
+            <a:r>
+              <a:rPr sz="1810" b="0" i="0">
                 <a:solidFill>
                   <a:srgbClr val="1A1A1A"/>
                 </a:solidFill>
                 <a:latin typeface="Lexend"/>
               </a:rPr>
-              <a:t>1 km = 0.62 mi. A train does 120 km/h; a bus does 70 mi/h. Which is faster? Show the speeds in one unit.</a:t>
-            </a:r>
-          </a:p>
-        </p:txBody>
-      </p:sp>
-      <p:sp>
-        <p:nvSpPr>
-          <p:cNvPr id="16" name="TextBox 15"/>
-          <p:cNvSpPr txBox="1"/>
-          <p:nvPr/>
-        </p:nvSpPr>
-        <p:spPr>
-          <a:xfrm>
-            <a:off x="960120" y="4581144"/>
-            <a:ext cx="548640" cy="356616"/>
-          </a:xfrm>
-          <a:prstGeom prst="rect">
-            <a:avLst/>
-          </a:prstGeom>
-          <a:noFill/>
-        </p:spPr>
-        <p:txBody>
-          <a:bodyPr wrap="square" lIns="45720" rIns="45720" tIns="18288" bIns="18288" anchor="t">
-            <a:spAutoFit/>
-          </a:bodyPr>
-          <a:lstStyle/>
-          <a:p>
-            <a:pPr algn="l"/>
-            <a:r>
-              <a:rPr sz="1710" b="1" i="0">
+              <a:t>. A train does 120 km/h; a bus does 70 mi/h. Which is faster? Show </a:t>
+            </a:r>
+          </a:p>
+        </p:txBody>
+      </p:sp>
+      <p:sp>
+        <p:nvSpPr>
+          <p:cNvPr id="21" name="TextBox 20"/>
+          <p:cNvSpPr txBox="1"/>
+          <p:nvPr/>
+        </p:nvSpPr>
+        <p:spPr>
+          <a:xfrm>
+            <a:off x="1554480" y="4110625"/>
+            <a:ext cx="2844026" cy="377686"/>
+          </a:xfrm>
+          <a:prstGeom prst="rect">
+            <a:avLst/>
+          </a:prstGeom>
+          <a:noFill/>
+        </p:spPr>
+        <p:txBody>
+          <a:bodyPr wrap="none" lIns="45720" rIns="45720" tIns="18288" bIns="18288" anchor="ctr">
+            <a:noAutofit/>
+          </a:bodyPr>
+          <a:lstStyle/>
+          <a:p>
+            <a:pPr algn="l"/>
+            <a:r>
+              <a:rPr sz="1810" b="0" i="0">
+                <a:solidFill>
+                  <a:srgbClr val="1A1A1A"/>
+                </a:solidFill>
+                <a:latin typeface="Lexend"/>
+              </a:rPr>
+              <a:t>the speeds in one unit.</a:t>
+            </a:r>
+          </a:p>
+        </p:txBody>
+      </p:sp>
+      <p:sp>
+        <p:nvSpPr>
+          <p:cNvPr id="22" name="TextBox 21"/>
+          <p:cNvSpPr txBox="1"/>
+          <p:nvPr/>
+        </p:nvSpPr>
+        <p:spPr>
+          <a:xfrm>
+            <a:off x="960120" y="4578559"/>
+            <a:ext cx="548640" cy="377686"/>
+          </a:xfrm>
+          <a:prstGeom prst="rect">
+            <a:avLst/>
+          </a:prstGeom>
+          <a:noFill/>
+        </p:spPr>
+        <p:txBody>
+          <a:bodyPr wrap="square" lIns="45720" rIns="45720" tIns="18288" bIns="18288" anchor="ctr">
+            <a:spAutoFit/>
+          </a:bodyPr>
+          <a:lstStyle/>
+          <a:p>
+            <a:pPr algn="l"/>
+            <a:r>
+              <a:rPr sz="1810" b="1" i="0">
                 <a:solidFill>
                   <a:srgbClr val="0B5394"/>
                 </a:solidFill>
@@ -13624,64 +15261,158 @@
       </p:sp>
       <p:sp>
         <p:nvSpPr>
-          <p:cNvPr id="17" name="TextBox 16"/>
-          <p:cNvSpPr txBox="1"/>
-          <p:nvPr/>
-        </p:nvSpPr>
-        <p:spPr>
-          <a:xfrm>
-            <a:off x="1554480" y="4581144"/>
-            <a:ext cx="9829800" cy="768096"/>
-          </a:xfrm>
-          <a:prstGeom prst="rect">
-            <a:avLst/>
-          </a:prstGeom>
-          <a:noFill/>
-        </p:spPr>
-        <p:txBody>
-          <a:bodyPr wrap="square" lIns="45720" rIns="45720" tIns="18288" bIns="18288" anchor="t">
-            <a:spAutoFit/>
-          </a:bodyPr>
-          <a:lstStyle/>
-          <a:p>
-            <a:pPr algn="l"/>
-            <a:r>
-              <a:rPr sz="1710" b="0" i="0">
+          <p:cNvPr id="23" name="TextBox 22"/>
+          <p:cNvSpPr txBox="1"/>
+          <p:nvPr/>
+        </p:nvSpPr>
+        <p:spPr>
+          <a:xfrm>
+            <a:off x="1554480" y="4578559"/>
+            <a:ext cx="4949598" cy="377686"/>
+          </a:xfrm>
+          <a:prstGeom prst="rect">
+            <a:avLst/>
+          </a:prstGeom>
+          <a:noFill/>
+        </p:spPr>
+        <p:txBody>
+          <a:bodyPr wrap="none" lIns="45720" rIns="45720" tIns="18288" bIns="18288" anchor="ctr">
+            <a:noAutofit/>
+          </a:bodyPr>
+          <a:lstStyle/>
+          <a:p>
+            <a:pPr algn="l"/>
+            <a:r>
+              <a:rPr sz="1810" b="0" i="0">
                 <a:solidFill>
                   <a:srgbClr val="1A1A1A"/>
                 </a:solidFill>
                 <a:latin typeface="Lexend"/>
               </a:rPr>
-              <a:t>Juice is mixed orange : mango : water = 3 : 2 : 5. A batch uses 9 cups of orange. How many cups is the whole batch?</a:t>
-            </a:r>
-          </a:p>
-        </p:txBody>
-      </p:sp>
-      <p:sp>
-        <p:nvSpPr>
-          <p:cNvPr id="18" name="TextBox 17"/>
-          <p:cNvSpPr txBox="1"/>
-          <p:nvPr/>
-        </p:nvSpPr>
-        <p:spPr>
-          <a:xfrm>
-            <a:off x="960120" y="5422392"/>
-            <a:ext cx="548640" cy="356616"/>
-          </a:xfrm>
-          <a:prstGeom prst="rect">
-            <a:avLst/>
-          </a:prstGeom>
-          <a:noFill/>
-        </p:spPr>
-        <p:txBody>
-          <a:bodyPr wrap="square" lIns="45720" rIns="45720" tIns="18288" bIns="18288" anchor="t">
-            <a:spAutoFit/>
-          </a:bodyPr>
-          <a:lstStyle/>
-          <a:p>
-            <a:pPr algn="l"/>
-            <a:r>
-              <a:rPr sz="1710" b="1" i="0">
+              <a:t>Juice is mixed orange : mango : water = </a:t>
+            </a:r>
+          </a:p>
+        </p:txBody>
+      </p:sp>
+      <p:pic>
+        <p:nvPicPr>
+          <p:cNvPr id="24" name="Picture 23" descr="3e12847d3b5309c7.png"/>
+          <p:cNvPicPr>
+            <a:picLocks noChangeAspect="1"/>
+          </p:cNvPicPr>
+          <p:nvPr/>
+        </p:nvPicPr>
+        <p:blipFill>
+          <a:blip r:embed="rId4"/>
+          <a:stretch>
+            <a:fillRect/>
+          </a:stretch>
+        </p:blipFill>
+        <p:spPr>
+          <a:xfrm>
+            <a:off x="6366918" y="4674240"/>
+            <a:ext cx="715087" cy="186325"/>
+          </a:xfrm>
+          <a:prstGeom prst="rect">
+            <a:avLst/>
+          </a:prstGeom>
+        </p:spPr>
+      </p:pic>
+      <p:sp>
+        <p:nvSpPr>
+          <p:cNvPr id="25" name="TextBox 24"/>
+          <p:cNvSpPr txBox="1"/>
+          <p:nvPr/>
+        </p:nvSpPr>
+        <p:spPr>
+          <a:xfrm>
+            <a:off x="7082005" y="4578559"/>
+            <a:ext cx="3992479" cy="377686"/>
+          </a:xfrm>
+          <a:prstGeom prst="rect">
+            <a:avLst/>
+          </a:prstGeom>
+          <a:noFill/>
+        </p:spPr>
+        <p:txBody>
+          <a:bodyPr wrap="none" lIns="45720" rIns="45720" tIns="18288" bIns="18288" anchor="ctr">
+            <a:noAutofit/>
+          </a:bodyPr>
+          <a:lstStyle/>
+          <a:p>
+            <a:pPr algn="l"/>
+            <a:r>
+              <a:rPr sz="1810" b="0" i="0">
+                <a:solidFill>
+                  <a:srgbClr val="1A1A1A"/>
+                </a:solidFill>
+                <a:latin typeface="Lexend"/>
+              </a:rPr>
+              <a:t>. A batch uses 9 cups of orange. </a:t>
+            </a:r>
+          </a:p>
+        </p:txBody>
+      </p:sp>
+      <p:sp>
+        <p:nvSpPr>
+          <p:cNvPr id="26" name="TextBox 25"/>
+          <p:cNvSpPr txBox="1"/>
+          <p:nvPr/>
+        </p:nvSpPr>
+        <p:spPr>
+          <a:xfrm>
+            <a:off x="1554480" y="4945910"/>
+            <a:ext cx="4402623" cy="377686"/>
+          </a:xfrm>
+          <a:prstGeom prst="rect">
+            <a:avLst/>
+          </a:prstGeom>
+          <a:noFill/>
+        </p:spPr>
+        <p:txBody>
+          <a:bodyPr wrap="none" lIns="45720" rIns="45720" tIns="18288" bIns="18288" anchor="ctr">
+            <a:noAutofit/>
+          </a:bodyPr>
+          <a:lstStyle/>
+          <a:p>
+            <a:pPr algn="l"/>
+            <a:r>
+              <a:rPr sz="1810" b="0" i="0">
+                <a:solidFill>
+                  <a:srgbClr val="1A1A1A"/>
+                </a:solidFill>
+                <a:latin typeface="Lexend"/>
+              </a:rPr>
+              <a:t>How many cups is the whole batch?</a:t>
+            </a:r>
+          </a:p>
+        </p:txBody>
+      </p:sp>
+      <p:sp>
+        <p:nvSpPr>
+          <p:cNvPr id="27" name="TextBox 26"/>
+          <p:cNvSpPr txBox="1"/>
+          <p:nvPr/>
+        </p:nvSpPr>
+        <p:spPr>
+          <a:xfrm>
+            <a:off x="960120" y="5413844"/>
+            <a:ext cx="548640" cy="377686"/>
+          </a:xfrm>
+          <a:prstGeom prst="rect">
+            <a:avLst/>
+          </a:prstGeom>
+          <a:noFill/>
+        </p:spPr>
+        <p:txBody>
+          <a:bodyPr wrap="square" lIns="45720" rIns="45720" tIns="18288" bIns="18288" anchor="ctr">
+            <a:spAutoFit/>
+          </a:bodyPr>
+          <a:lstStyle/>
+          <a:p>
+            <a:pPr algn="l"/>
+            <a:r>
+              <a:rPr sz="1810" b="1" i="0">
                 <a:solidFill>
                   <a:srgbClr val="0B5394"/>
                 </a:solidFill>
@@ -13694,35 +15425,94 @@
       </p:sp>
       <p:sp>
         <p:nvSpPr>
-          <p:cNvPr id="19" name="TextBox 18"/>
-          <p:cNvSpPr txBox="1"/>
-          <p:nvPr/>
-        </p:nvSpPr>
-        <p:spPr>
-          <a:xfrm>
-            <a:off x="1554480" y="5422392"/>
-            <a:ext cx="9829800" cy="768096"/>
-          </a:xfrm>
-          <a:prstGeom prst="rect">
-            <a:avLst/>
-          </a:prstGeom>
-          <a:noFill/>
-        </p:spPr>
-        <p:txBody>
-          <a:bodyPr wrap="square" lIns="45720" rIns="45720" tIns="18288" bIns="18288" anchor="t">
-            <a:spAutoFit/>
-          </a:bodyPr>
-          <a:lstStyle/>
-          <a:p>
-            <a:pPr algn="l"/>
-            <a:r>
-              <a:rPr sz="1710" b="0" i="0">
+          <p:cNvPr id="28" name="TextBox 27"/>
+          <p:cNvSpPr txBox="1"/>
+          <p:nvPr/>
+        </p:nvSpPr>
+        <p:spPr>
+          <a:xfrm>
+            <a:off x="1554480" y="5413844"/>
+            <a:ext cx="2399911" cy="377686"/>
+          </a:xfrm>
+          <a:prstGeom prst="rect">
+            <a:avLst/>
+          </a:prstGeom>
+          <a:noFill/>
+        </p:spPr>
+        <p:txBody>
+          <a:bodyPr wrap="none" lIns="45720" rIns="45720" tIns="18288" bIns="18288" anchor="ctr">
+            <a:noAutofit/>
+          </a:bodyPr>
+          <a:lstStyle/>
+          <a:p>
+            <a:pPr algn="l"/>
+            <a:r>
+              <a:rPr sz="1810" b="0" i="0">
                 <a:solidFill>
                   <a:srgbClr val="1A1A1A"/>
                 </a:solidFill>
                 <a:latin typeface="Lexend"/>
               </a:rPr>
-              <a:t>A plan is drawn at 1 in : 6 ft; a room is 2 in by 3.5 in on it. Find the room's real area.</a:t>
+              <a:t>A plan is drawn at </a:t>
+            </a:r>
+          </a:p>
+        </p:txBody>
+      </p:sp>
+      <p:pic>
+        <p:nvPicPr>
+          <p:cNvPr id="29" name="Picture 28" descr="bf04384952a1402c.png"/>
+          <p:cNvPicPr>
+            <a:picLocks noChangeAspect="1"/>
+          </p:cNvPicPr>
+          <p:nvPr/>
+        </p:nvPicPr>
+        <p:blipFill>
+          <a:blip r:embed="rId5"/>
+          <a:stretch>
+            <a:fillRect/>
+          </a:stretch>
+        </p:blipFill>
+        <p:spPr>
+          <a:xfrm>
+            <a:off x="3817231" y="5501971"/>
+            <a:ext cx="908966" cy="201433"/>
+          </a:xfrm>
+          <a:prstGeom prst="rect">
+            <a:avLst/>
+          </a:prstGeom>
+        </p:spPr>
+      </p:pic>
+      <p:sp>
+        <p:nvSpPr>
+          <p:cNvPr id="30" name="TextBox 29"/>
+          <p:cNvSpPr txBox="1"/>
+          <p:nvPr/>
+        </p:nvSpPr>
+        <p:spPr>
+          <a:xfrm>
+            <a:off x="4726198" y="5413844"/>
+            <a:ext cx="6648424" cy="377686"/>
+          </a:xfrm>
+          <a:prstGeom prst="rect">
+            <a:avLst/>
+          </a:prstGeom>
+          <a:noFill/>
+        </p:spPr>
+        <p:txBody>
+          <a:bodyPr wrap="none" lIns="45720" rIns="45720" tIns="18288" bIns="18288" anchor="ctr">
+            <a:noAutofit/>
+          </a:bodyPr>
+          <a:lstStyle/>
+          <a:p>
+            <a:pPr algn="l"/>
+            <a:r>
+              <a:rPr sz="1810" b="0" i="0">
+                <a:solidFill>
+                  <a:srgbClr val="1A1A1A"/>
+                </a:solidFill>
+                <a:latin typeface="Lexend"/>
+              </a:rPr>
+              <a:t>; a room is 2 in by 3.5 in on it. Find the room's real area.</a:t>
             </a:r>
           </a:p>
         </p:txBody>
@@ -15022,7 +16812,7 @@
         </p:blipFill>
         <p:spPr>
           <a:xfrm>
-            <a:off x="1205483" y="2007108"/>
+            <a:off x="1205483" y="2020824"/>
             <a:ext cx="9750552" cy="384048"/>
           </a:xfrm>
           <a:prstGeom prst="rect">
@@ -15344,7 +17134,7 @@
         </p:blipFill>
         <p:spPr>
           <a:xfrm>
-            <a:off x="2816352" y="2023872"/>
+            <a:off x="2816352" y="2024253"/>
             <a:ext cx="6528816" cy="350520"/>
           </a:xfrm>
           <a:prstGeom prst="rect">
@@ -15725,7 +17515,7 @@
         </p:blipFill>
         <p:spPr>
           <a:xfrm>
-            <a:off x="1043939" y="2953512"/>
+            <a:off x="1043939" y="2965704"/>
             <a:ext cx="10073640" cy="387096"/>
           </a:xfrm>
           <a:prstGeom prst="rect">
@@ -15961,16 +17751,75 @@
           </a:p>
         </p:txBody>
       </p:sp>
-      <p:sp>
-        <p:nvSpPr>
-          <p:cNvPr id="8" name="TextBox 7"/>
-          <p:cNvSpPr txBox="1"/>
-          <p:nvPr/>
-        </p:nvSpPr>
-        <p:spPr>
-          <a:xfrm>
-            <a:off x="777240" y="2103120"/>
-            <a:ext cx="10607040" cy="858740"/>
+      <p:pic>
+        <p:nvPicPr>
+          <p:cNvPr id="8" name="Picture 7" descr="17a8a85b0b9a11ab.png"/>
+          <p:cNvPicPr>
+            <a:picLocks noChangeAspect="1"/>
+          </p:cNvPicPr>
+          <p:nvPr/>
+        </p:nvPicPr>
+        <p:blipFill>
+          <a:blip r:embed="rId2"/>
+          <a:stretch>
+            <a:fillRect/>
+          </a:stretch>
+        </p:blipFill>
+        <p:spPr>
+          <a:xfrm>
+            <a:off x="4835834" y="1771269"/>
+            <a:ext cx="2340864" cy="301752"/>
+          </a:xfrm>
+          <a:prstGeom prst="rect">
+            <a:avLst/>
+          </a:prstGeom>
+        </p:spPr>
+      </p:pic>
+      <p:sp>
+        <p:nvSpPr>
+          <p:cNvPr id="9" name="TextBox 8"/>
+          <p:cNvSpPr txBox="1"/>
+          <p:nvPr/>
+        </p:nvSpPr>
+        <p:spPr>
+          <a:xfrm>
+            <a:off x="7176698" y="1714500"/>
+            <a:ext cx="286146" cy="457200"/>
+          </a:xfrm>
+          <a:prstGeom prst="rect">
+            <a:avLst/>
+          </a:prstGeom>
+          <a:noFill/>
+        </p:spPr>
+        <p:txBody>
+          <a:bodyPr wrap="none" lIns="45720" rIns="45720" tIns="18288" bIns="18288" anchor="ctr">
+            <a:noAutofit/>
+          </a:bodyPr>
+          <a:lstStyle/>
+          <a:p>
+            <a:pPr algn="l"/>
+            <a:r>
+              <a:rPr sz="2470" b="0" i="0">
+                <a:solidFill>
+                  <a:srgbClr val="1A1A1A"/>
+                </a:solidFill>
+                <a:latin typeface="Lexend"/>
+              </a:rPr>
+              <a:t>.</a:t>
+            </a:r>
+          </a:p>
+        </p:txBody>
+      </p:sp>
+      <p:sp>
+        <p:nvSpPr>
+          <p:cNvPr id="10" name="TextBox 9"/>
+          <p:cNvSpPr txBox="1"/>
+          <p:nvPr/>
+        </p:nvSpPr>
+        <p:spPr>
+          <a:xfrm>
+            <a:off x="777240" y="2468880"/>
+            <a:ext cx="10607040" cy="429370"/>
           </a:xfrm>
           <a:prstGeom prst="rect">
             <a:avLst/>
@@ -15991,20 +17840,20 @@
                 </a:solidFill>
                 <a:latin typeface="Lexend"/>
               </a:rPr>
-              <a:t>1 mi = 1.61 km. Runner A does 5 mi in 40 min; runner B does 9 km in 45 min.</a:t>
-            </a:r>
-          </a:p>
-        </p:txBody>
-      </p:sp>
-      <p:sp>
-        <p:nvSpPr>
-          <p:cNvPr id="9" name="TextBox 8"/>
-          <p:cNvSpPr txBox="1"/>
-          <p:nvPr/>
-        </p:nvSpPr>
-        <p:spPr>
-          <a:xfrm>
-            <a:off x="777240" y="3254468"/>
+              <a:t>Runner A does 5 mi in 40 min; runner B does 9 km in 45 min.</a:t>
+            </a:r>
+          </a:p>
+        </p:txBody>
+      </p:sp>
+      <p:sp>
+        <p:nvSpPr>
+          <p:cNvPr id="11" name="TextBox 10"/>
+          <p:cNvSpPr txBox="1"/>
+          <p:nvPr/>
+        </p:nvSpPr>
+        <p:spPr>
+          <a:xfrm>
+            <a:off x="777240" y="3190858"/>
             <a:ext cx="10607040" cy="429370"/>
           </a:xfrm>
           <a:prstGeom prst="rect">

--- a/a7/build/out/u5/A7 5.10 Multi-Step Proportion Problems - Slides.pptx
+++ b/a7/build/out/u5/A7 5.10 Multi-Step Proportion Problems - Slides.pptx
@@ -4470,7 +4470,7 @@
         </p:nvSpPr>
         <p:spPr>
           <a:xfrm>
-            <a:off x="2820414" y="2145792"/>
+            <a:off x="2820604" y="2145696"/>
             <a:ext cx="4377744" cy="457200"/>
           </a:xfrm>
           <a:prstGeom prst="rect">
@@ -4499,7 +4499,7 @@
       </p:sp>
       <p:pic>
         <p:nvPicPr>
-          <p:cNvPr id="9" name="Picture 8" descr="37e2160f39e92d84.png"/>
+          <p:cNvPr id="9" name="Picture 8" descr="cfbc1da7a07fba9a.png"/>
           <p:cNvPicPr>
             <a:picLocks noChangeAspect="1"/>
           </p:cNvPicPr>
@@ -4513,8 +4513,8 @@
         </p:blipFill>
         <p:spPr>
           <a:xfrm>
-            <a:off x="7060999" y="2103120"/>
-            <a:ext cx="332232" cy="542544"/>
+            <a:off x="7061189" y="2103120"/>
+            <a:ext cx="331851" cy="542353"/>
           </a:xfrm>
           <a:prstGeom prst="rect">
             <a:avLst/>
@@ -4529,7 +4529,7 @@
         </p:nvSpPr>
         <p:spPr>
           <a:xfrm>
-            <a:off x="7393231" y="2145792"/>
+            <a:off x="7393040" y="2145696"/>
             <a:ext cx="2085034" cy="457200"/>
           </a:xfrm>
           <a:prstGeom prst="rect">
@@ -4564,7 +4564,7 @@
         </p:nvSpPr>
         <p:spPr>
           <a:xfrm>
-            <a:off x="777240" y="3102864"/>
+            <a:off x="777240" y="3102673"/>
             <a:ext cx="10607040" cy="858740"/>
           </a:xfrm>
           <a:prstGeom prst="rect">
@@ -5138,7 +5138,7 @@
         </p:nvSpPr>
         <p:spPr>
           <a:xfrm>
-            <a:off x="2835978" y="1642872"/>
+            <a:off x="2837597" y="1642776"/>
             <a:ext cx="4371000" cy="457200"/>
           </a:xfrm>
           <a:prstGeom prst="rect">
@@ -5167,7 +5167,7 @@
       </p:sp>
       <p:pic>
         <p:nvPicPr>
-          <p:cNvPr id="9" name="Picture 8" descr="c329812939336051.png"/>
+          <p:cNvPr id="9" name="Picture 8" descr="b8f565bf2384f76b.png"/>
           <p:cNvPicPr>
             <a:picLocks noChangeAspect="1"/>
           </p:cNvPicPr>
@@ -5181,8 +5181,8 @@
         </p:blipFill>
         <p:spPr>
           <a:xfrm>
-            <a:off x="7069818" y="1600200"/>
-            <a:ext cx="307848" cy="542544"/>
+            <a:off x="7071438" y="1600200"/>
+            <a:ext cx="304609" cy="542353"/>
           </a:xfrm>
           <a:prstGeom prst="rect">
             <a:avLst/>
@@ -5197,7 +5197,7 @@
         </p:nvSpPr>
         <p:spPr>
           <a:xfrm>
-            <a:off x="7377666" y="1642872"/>
+            <a:off x="7376047" y="1642776"/>
             <a:ext cx="2085034" cy="457200"/>
           </a:xfrm>
           <a:prstGeom prst="rect">
@@ -5232,7 +5232,7 @@
         </p:nvSpPr>
         <p:spPr>
           <a:xfrm>
-            <a:off x="777240" y="2417064"/>
+            <a:off x="777240" y="2416873"/>
             <a:ext cx="10607040" cy="429370"/>
           </a:xfrm>
           <a:prstGeom prst="rect">
@@ -5267,7 +5267,7 @@
         </p:nvSpPr>
         <p:spPr>
           <a:xfrm>
-            <a:off x="2802201" y="2998834"/>
+            <a:off x="2802773" y="2998548"/>
             <a:ext cx="987737" cy="457200"/>
           </a:xfrm>
           <a:prstGeom prst="rect">
@@ -5296,7 +5296,7 @@
       </p:sp>
       <p:pic>
         <p:nvPicPr>
-          <p:cNvPr id="13" name="Picture 12" descr="c4d7fa400edc5e3e.png"/>
+          <p:cNvPr id="13" name="Picture 12" descr="d0dda701f68944c0.png"/>
           <p:cNvPicPr>
             <a:picLocks noChangeAspect="1"/>
           </p:cNvPicPr>
@@ -5310,8 +5310,8 @@
         </p:blipFill>
         <p:spPr>
           <a:xfrm>
-            <a:off x="3652778" y="2956162"/>
-            <a:ext cx="362712" cy="542544"/>
+            <a:off x="3653350" y="2955971"/>
+            <a:ext cx="361569" cy="542353"/>
           </a:xfrm>
           <a:prstGeom prst="rect">
             <a:avLst/>
@@ -5326,7 +5326,7 @@
         </p:nvSpPr>
         <p:spPr>
           <a:xfrm>
-            <a:off x="4015490" y="2998834"/>
+            <a:off x="4014919" y="2998548"/>
             <a:ext cx="5480987" cy="457200"/>
           </a:xfrm>
           <a:prstGeom prst="rect">
@@ -5589,7 +5589,7 @@
         </p:nvSpPr>
         <p:spPr>
           <a:xfrm>
-            <a:off x="2839026" y="1642872"/>
+            <a:off x="2840073" y="1644015"/>
             <a:ext cx="4371000" cy="457200"/>
           </a:xfrm>
           <a:prstGeom prst="rect">
@@ -5618,7 +5618,7 @@
       </p:sp>
       <p:pic>
         <p:nvPicPr>
-          <p:cNvPr id="9" name="Picture 8" descr="da5a8fd9ee34c7c2.png"/>
+          <p:cNvPr id="9" name="Picture 8" descr="a256e78171c67370.png"/>
           <p:cNvPicPr>
             <a:picLocks noChangeAspect="1"/>
           </p:cNvPicPr>
@@ -5632,8 +5632,8 @@
         </p:blipFill>
         <p:spPr>
           <a:xfrm>
-            <a:off x="7072866" y="1600200"/>
-            <a:ext cx="301752" cy="542544"/>
+            <a:off x="7073914" y="1600200"/>
+            <a:ext cx="299656" cy="544830"/>
           </a:xfrm>
           <a:prstGeom prst="rect">
             <a:avLst/>
@@ -5648,7 +5648,7 @@
         </p:nvSpPr>
         <p:spPr>
           <a:xfrm>
-            <a:off x="7374618" y="1642872"/>
+            <a:off x="7373571" y="1644015"/>
             <a:ext cx="2085034" cy="457200"/>
           </a:xfrm>
           <a:prstGeom prst="rect">
@@ -5683,7 +5683,7 @@
         </p:nvSpPr>
         <p:spPr>
           <a:xfrm>
-            <a:off x="777240" y="2417064"/>
+            <a:off x="777240" y="2419349"/>
             <a:ext cx="10607040" cy="429370"/>
           </a:xfrm>
           <a:prstGeom prst="rect">
@@ -5718,7 +5718,7 @@
         </p:nvSpPr>
         <p:spPr>
           <a:xfrm>
-            <a:off x="2805249" y="2998834"/>
+            <a:off x="2805249" y="3002263"/>
             <a:ext cx="987737" cy="457200"/>
           </a:xfrm>
           <a:prstGeom prst="rect">
@@ -5747,7 +5747,7 @@
       </p:sp>
       <p:pic>
         <p:nvPicPr>
-          <p:cNvPr id="13" name="Picture 12" descr="8e2d2576f86f7f20.png"/>
+          <p:cNvPr id="13" name="Picture 12" descr="e79d51c912547678.png"/>
           <p:cNvPicPr>
             <a:picLocks noChangeAspect="1"/>
           </p:cNvPicPr>
@@ -5761,8 +5761,8 @@
         </p:blipFill>
         <p:spPr>
           <a:xfrm>
-            <a:off x="3655826" y="2956162"/>
-            <a:ext cx="356616" cy="542544"/>
+            <a:off x="3655826" y="2958448"/>
+            <a:ext cx="356616" cy="544830"/>
           </a:xfrm>
           <a:prstGeom prst="rect">
             <a:avLst/>
@@ -5777,7 +5777,7 @@
         </p:nvSpPr>
         <p:spPr>
           <a:xfrm>
-            <a:off x="4012442" y="2998834"/>
+            <a:off x="4012442" y="3002263"/>
             <a:ext cx="5480987" cy="457200"/>
           </a:xfrm>
           <a:prstGeom prst="rect">
@@ -5820,7 +5820,7 @@
         </p:blipFill>
         <p:spPr>
           <a:xfrm>
-            <a:off x="4279392" y="3846178"/>
+            <a:off x="4279392" y="3850750"/>
             <a:ext cx="3474720" cy="606552"/>
           </a:xfrm>
           <a:prstGeom prst="rect">
@@ -5844,7 +5844,7 @@
         </p:blipFill>
         <p:spPr>
           <a:xfrm>
-            <a:off x="4279392" y="4580746"/>
+            <a:off x="4279392" y="4585318"/>
             <a:ext cx="3712463" cy="606552"/>
           </a:xfrm>
           <a:prstGeom prst="rect">
@@ -5860,7 +5860,7 @@
         </p:nvSpPr>
         <p:spPr>
           <a:xfrm>
-            <a:off x="777240" y="5324458"/>
+            <a:off x="777240" y="5329030"/>
             <a:ext cx="10607040" cy="548640"/>
           </a:xfrm>
           <a:prstGeom prst="rect">
@@ -7532,7 +7532,7 @@
       </p:sp>
       <p:pic>
         <p:nvPicPr>
-          <p:cNvPr id="9" name="Picture 8" descr="d7de33d50f52caf2.png"/>
+          <p:cNvPr id="9" name="Picture 8" descr="b20e69a494d39ec5.png"/>
           <p:cNvPicPr>
             <a:picLocks noChangeAspect="1"/>
           </p:cNvPicPr>
@@ -7546,8 +7546,8 @@
         </p:blipFill>
         <p:spPr>
           <a:xfrm>
-            <a:off x="2408921" y="1546669"/>
-            <a:ext cx="1965960" cy="304800"/>
+            <a:off x="2408921" y="1557599"/>
+            <a:ext cx="1882036" cy="291917"/>
           </a:xfrm>
           <a:prstGeom prst="rect">
             <a:avLst/>
@@ -7562,7 +7562,7 @@
         </p:nvSpPr>
         <p:spPr>
           <a:xfrm>
-            <a:off x="4374881" y="1440180"/>
+            <a:off x="4290958" y="1440180"/>
             <a:ext cx="4161532" cy="457200"/>
           </a:xfrm>
           <a:prstGeom prst="rect">
@@ -7626,7 +7626,7 @@
       </p:sp>
       <p:pic>
         <p:nvPicPr>
-          <p:cNvPr id="12" name="Picture 11" descr="f4514319604e2a5c.png"/>
+          <p:cNvPr id="12" name="Picture 11" descr="90f92a5da9ad458c.png"/>
           <p:cNvPicPr>
             <a:picLocks noChangeAspect="1"/>
           </p:cNvPicPr>
@@ -7640,8 +7640,8 @@
         </p:blipFill>
         <p:spPr>
           <a:xfrm>
-            <a:off x="2822862" y="2162365"/>
-            <a:ext cx="1685544" cy="234696"/>
+            <a:off x="2822862" y="2170247"/>
+            <a:ext cx="1613852" cy="225464"/>
           </a:xfrm>
           <a:prstGeom prst="rect">
             <a:avLst/>
@@ -7656,7 +7656,7 @@
         </p:nvSpPr>
         <p:spPr>
           <a:xfrm>
-            <a:off x="4508406" y="2052828"/>
+            <a:off x="4436714" y="2052828"/>
             <a:ext cx="5270819" cy="457200"/>
           </a:xfrm>
           <a:prstGeom prst="rect">
@@ -7720,7 +7720,7 @@
       </p:sp>
       <p:pic>
         <p:nvPicPr>
-          <p:cNvPr id="15" name="Picture 14" descr="278b168b184c0a71.png"/>
+          <p:cNvPr id="15" name="Picture 14" descr="260e68e76011183b.png"/>
           <p:cNvPicPr>
             <a:picLocks noChangeAspect="1"/>
           </p:cNvPicPr>
@@ -7734,8 +7734,8 @@
         </p:blipFill>
         <p:spPr>
           <a:xfrm>
-            <a:off x="4667711" y="2784157"/>
-            <a:ext cx="1536192" cy="225552"/>
+            <a:off x="4667711" y="2792388"/>
+            <a:ext cx="1473827" cy="215971"/>
           </a:xfrm>
           <a:prstGeom prst="rect">
             <a:avLst/>
@@ -11380,7 +11380,7 @@
       </p:sp>
       <p:pic>
         <p:nvPicPr>
-          <p:cNvPr id="9" name="Picture 8" descr="36303ebf85e26cd1.png"/>
+          <p:cNvPr id="9" name="Picture 8" descr="51d1cdc51197b05b.png"/>
           <p:cNvPicPr>
             <a:picLocks noChangeAspect="1"/>
           </p:cNvPicPr>
@@ -11394,8 +11394,8 @@
         </p:blipFill>
         <p:spPr>
           <a:xfrm>
-            <a:off x="6419704" y="1975103"/>
-            <a:ext cx="883920" cy="225552"/>
+            <a:off x="6419704" y="1974151"/>
+            <a:ext cx="884110" cy="225361"/>
           </a:xfrm>
           <a:prstGeom prst="rect">
             <a:avLst/>
@@ -11410,7 +11410,7 @@
         </p:nvSpPr>
         <p:spPr>
           <a:xfrm>
-            <a:off x="7303624" y="1851660"/>
+            <a:off x="7303815" y="1851660"/>
             <a:ext cx="280301" cy="457200"/>
           </a:xfrm>
           <a:prstGeom prst="rect">
@@ -11807,7 +11807,7 @@
       </p:sp>
       <p:pic>
         <p:nvPicPr>
-          <p:cNvPr id="9" name="Picture 8" descr="55a59dfed8072881.png"/>
+          <p:cNvPr id="9" name="Picture 8" descr="4d1f2e7bdd7bf89b.png"/>
           <p:cNvPicPr>
             <a:picLocks noChangeAspect="1"/>
           </p:cNvPicPr>
@@ -11821,8 +11821,8 @@
         </p:blipFill>
         <p:spPr>
           <a:xfrm>
-            <a:off x="6419704" y="1975103"/>
-            <a:ext cx="886968" cy="225552"/>
+            <a:off x="6419704" y="1974151"/>
+            <a:ext cx="889063" cy="225361"/>
           </a:xfrm>
           <a:prstGeom prst="rect">
             <a:avLst/>
@@ -11837,7 +11837,7 @@
         </p:nvSpPr>
         <p:spPr>
           <a:xfrm>
-            <a:off x="7306672" y="1851660"/>
+            <a:off x="7308768" y="1851660"/>
             <a:ext cx="280301" cy="457200"/>
           </a:xfrm>
           <a:prstGeom prst="rect">
@@ -12282,7 +12282,7 @@
       </p:sp>
       <p:pic>
         <p:nvPicPr>
-          <p:cNvPr id="9" name="Picture 8" descr="d7de33d50f52caf2.png"/>
+          <p:cNvPr id="9" name="Picture 8" descr="b20e69a494d39ec5.png"/>
           <p:cNvPicPr>
             <a:picLocks noChangeAspect="1"/>
           </p:cNvPicPr>
@@ -12296,8 +12296,8 @@
         </p:blipFill>
         <p:spPr>
           <a:xfrm>
-            <a:off x="2408921" y="1546669"/>
-            <a:ext cx="1965960" cy="304800"/>
+            <a:off x="2408921" y="1557599"/>
+            <a:ext cx="1882036" cy="291917"/>
           </a:xfrm>
           <a:prstGeom prst="rect">
             <a:avLst/>
@@ -12312,7 +12312,7 @@
         </p:nvSpPr>
         <p:spPr>
           <a:xfrm>
-            <a:off x="4374881" y="1440180"/>
+            <a:off x="4290958" y="1440180"/>
             <a:ext cx="4161532" cy="457200"/>
           </a:xfrm>
           <a:prstGeom prst="rect">
@@ -12347,7 +12347,7 @@
         </p:nvSpPr>
         <p:spPr>
           <a:xfrm>
-            <a:off x="8947894" y="1440180"/>
+            <a:off x="8863971" y="1440180"/>
             <a:ext cx="1350672" cy="457200"/>
           </a:xfrm>
           <a:prstGeom prst="rect">
@@ -12411,7 +12411,7 @@
       </p:sp>
       <p:pic>
         <p:nvPicPr>
-          <p:cNvPr id="13" name="Picture 12" descr="f4514319604e2a5c.png"/>
+          <p:cNvPr id="13" name="Picture 12" descr="90f92a5da9ad458c.png"/>
           <p:cNvPicPr>
             <a:picLocks noChangeAspect="1"/>
           </p:cNvPicPr>
@@ -12425,8 +12425,8 @@
         </p:blipFill>
         <p:spPr>
           <a:xfrm>
-            <a:off x="2822862" y="2162365"/>
-            <a:ext cx="1685544" cy="234696"/>
+            <a:off x="2822862" y="2170247"/>
+            <a:ext cx="1613852" cy="225464"/>
           </a:xfrm>
           <a:prstGeom prst="rect">
             <a:avLst/>
@@ -12441,7 +12441,7 @@
         </p:nvSpPr>
         <p:spPr>
           <a:xfrm>
-            <a:off x="4508406" y="2052828"/>
+            <a:off x="4436714" y="2052828"/>
             <a:ext cx="5270819" cy="457200"/>
           </a:xfrm>
           <a:prstGeom prst="rect">
@@ -12476,7 +12476,7 @@
         </p:nvSpPr>
         <p:spPr>
           <a:xfrm>
-            <a:off x="10190706" y="2052828"/>
+            <a:off x="10119014" y="2052828"/>
             <a:ext cx="1310357" cy="457200"/>
           </a:xfrm>
           <a:prstGeom prst="rect">
@@ -12540,7 +12540,7 @@
       </p:sp>
       <p:pic>
         <p:nvPicPr>
-          <p:cNvPr id="17" name="Picture 16" descr="278b168b184c0a71.png"/>
+          <p:cNvPr id="17" name="Picture 16" descr="260e68e76011183b.png"/>
           <p:cNvPicPr>
             <a:picLocks noChangeAspect="1"/>
           </p:cNvPicPr>
@@ -12554,8 +12554,8 @@
         </p:blipFill>
         <p:spPr>
           <a:xfrm>
-            <a:off x="4667711" y="2784157"/>
-            <a:ext cx="1536192" cy="225552"/>
+            <a:off x="4667711" y="2792388"/>
+            <a:ext cx="1473827" cy="215971"/>
           </a:xfrm>
           <a:prstGeom prst="rect">
             <a:avLst/>
@@ -12570,7 +12570,7 @@
         </p:nvSpPr>
         <p:spPr>
           <a:xfrm>
-            <a:off x="6752543" y="2665476"/>
+            <a:off x="6690178" y="2665476"/>
             <a:ext cx="380014" cy="457200"/>
           </a:xfrm>
           <a:prstGeom prst="rect">
@@ -12932,7 +12932,7 @@
       </p:sp>
       <p:pic>
         <p:nvPicPr>
-          <p:cNvPr id="9" name="Picture 8" descr="69da27b14c874025.png"/>
+          <p:cNvPr id="9" name="Picture 8" descr="2e89f08f987938e8.png"/>
           <p:cNvPicPr>
             <a:picLocks noChangeAspect="1"/>
           </p:cNvPicPr>
@@ -12946,8 +12946,8 @@
         </p:blipFill>
         <p:spPr>
           <a:xfrm>
-            <a:off x="4073291" y="1956815"/>
-            <a:ext cx="1121664" cy="243840"/>
+            <a:off x="4073291" y="1954339"/>
+            <a:ext cx="1116901" cy="245173"/>
           </a:xfrm>
           <a:prstGeom prst="rect">
             <a:avLst/>
@@ -12962,7 +12962,7 @@
         </p:nvSpPr>
         <p:spPr>
           <a:xfrm>
-            <a:off x="5194955" y="1851660"/>
+            <a:off x="5190193" y="1851660"/>
             <a:ext cx="4480705" cy="457200"/>
           </a:xfrm>
           <a:prstGeom prst="rect">
@@ -13383,7 +13383,7 @@
       </p:sp>
       <p:pic>
         <p:nvPicPr>
-          <p:cNvPr id="9" name="Picture 8" descr="0108e640f9a5d2fa.png"/>
+          <p:cNvPr id="9" name="Picture 8" descr="123cd4c222dc2b70.png"/>
           <p:cNvPicPr>
             <a:picLocks noChangeAspect="1"/>
           </p:cNvPicPr>
@@ -13397,8 +13397,8 @@
         </p:blipFill>
         <p:spPr>
           <a:xfrm>
-            <a:off x="4073291" y="1956815"/>
-            <a:ext cx="1121664" cy="243840"/>
+            <a:off x="4073291" y="1954339"/>
+            <a:ext cx="1116901" cy="245173"/>
           </a:xfrm>
           <a:prstGeom prst="rect">
             <a:avLst/>
@@ -13413,7 +13413,7 @@
         </p:nvSpPr>
         <p:spPr>
           <a:xfrm>
-            <a:off x="5194955" y="1851660"/>
+            <a:off x="5190193" y="1851660"/>
             <a:ext cx="4480705" cy="457200"/>
           </a:xfrm>
           <a:prstGeom prst="rect">

--- a/a7/build/out/u5/A7 5.10 Multi-Step Proportion Problems - Slides.pptx
+++ b/a7/build/out/u5/A7 5.10 Multi-Step Proportion Problems - Slides.pptx
@@ -16798,7 +16798,7 @@
       </p:cxnSp>
       <p:pic>
         <p:nvPicPr>
-          <p:cNvPr id="10" name="Picture 9" descr="584e611f1028333b.png"/>
+          <p:cNvPr id="10" name="Picture 9" descr="4779836f7ad35def.png"/>
           <p:cNvPicPr>
             <a:picLocks noChangeAspect="1"/>
           </p:cNvPicPr>
@@ -16812,8 +16812,8 @@
         </p:blipFill>
         <p:spPr>
           <a:xfrm>
-            <a:off x="1205483" y="2020824"/>
-            <a:ext cx="9750552" cy="384048"/>
+            <a:off x="1027176" y="2221992"/>
+            <a:ext cx="10107168" cy="384048"/>
           </a:xfrm>
           <a:prstGeom prst="rect">
             <a:avLst/>
@@ -17120,7 +17120,7 @@
       </p:cxnSp>
       <p:pic>
         <p:nvPicPr>
-          <p:cNvPr id="10" name="Picture 9" descr="d21ff173496ec771.png"/>
+          <p:cNvPr id="10" name="Picture 9" descr="91182504396a8a75.png"/>
           <p:cNvPicPr>
             <a:picLocks noChangeAspect="1"/>
           </p:cNvPicPr>
@@ -17134,8 +17134,8 @@
         </p:blipFill>
         <p:spPr>
           <a:xfrm>
-            <a:off x="2816352" y="2024253"/>
-            <a:ext cx="6528816" cy="350520"/>
+            <a:off x="2638044" y="2225421"/>
+            <a:ext cx="6885432" cy="350520"/>
           </a:xfrm>
           <a:prstGeom prst="rect">
             <a:avLst/>
@@ -17150,7 +17150,7 @@
         </p:nvSpPr>
         <p:spPr>
           <a:xfrm>
-            <a:off x="987552" y="2743200"/>
+            <a:off x="987552" y="3145536"/>
             <a:ext cx="10131551" cy="475488"/>
           </a:xfrm>
           <a:prstGeom prst="rect">
@@ -17477,7 +17477,7 @@
       </p:cxnSp>
       <p:pic>
         <p:nvPicPr>
-          <p:cNvPr id="10" name="Picture 9" descr="9d35a45236af3a67.png"/>
+          <p:cNvPr id="10" name="Picture 9" descr="750a1b78c883b6ba.png"/>
           <p:cNvPicPr>
             <a:picLocks noChangeAspect="1"/>
           </p:cNvPicPr>
@@ -17491,8 +17491,8 @@
         </p:blipFill>
         <p:spPr>
           <a:xfrm>
-            <a:off x="2932176" y="1993392"/>
-            <a:ext cx="6297168" cy="673608"/>
+            <a:off x="2755392" y="2194560"/>
+            <a:ext cx="6650736" cy="673608"/>
           </a:xfrm>
           <a:prstGeom prst="rect">
             <a:avLst/>
@@ -17515,7 +17515,7 @@
         </p:blipFill>
         <p:spPr>
           <a:xfrm>
-            <a:off x="1043939" y="2965704"/>
+            <a:off x="1043939" y="3276600"/>
             <a:ext cx="10073640" cy="387096"/>
           </a:xfrm>
           <a:prstGeom prst="rect">

--- a/a7/build/out/u5/A7 5.10 Multi-Step Proportion Problems - Slides.pptx
+++ b/a7/build/out/u5/A7 5.10 Multi-Step Proportion Problems - Slides.pptx
@@ -15950,7 +15950,7 @@
                 </a:solidFill>
                 <a:latin typeface="Lexend"/>
               </a:rPr>
-              <a:t>Every skill listed is required, to a SmartScore of 67. Due at the start of the next class.</a:t>
+              <a:t>Every skill listed is required, to a SmartScore of 67. Due by the Unit 5 test.</a:t>
             </a:r>
           </a:p>
         </p:txBody>
